--- a/capital_bikeshare_operations_platform.pptx
+++ b/capital_bikeshare_operations_platform.pptx
@@ -5,17 +5,23 @@
     <p:sldMasterId id="2147483648" r:id="rId1"/>
   </p:sldMasterIdLst>
   <p:notesMasterIdLst>
-    <p:notesMasterId r:id="rId10"/>
+    <p:notesMasterId r:id="rId16"/>
   </p:notesMasterIdLst>
   <p:sldIdLst>
     <p:sldId id="256" r:id="rId2"/>
     <p:sldId id="258" r:id="rId3"/>
-    <p:sldId id="260" r:id="rId4"/>
-    <p:sldId id="271" r:id="rId5"/>
+    <p:sldId id="277" r:id="rId4"/>
+    <p:sldId id="283" r:id="rId5"/>
     <p:sldId id="272" r:id="rId6"/>
-    <p:sldId id="274" r:id="rId7"/>
-    <p:sldId id="275" r:id="rId8"/>
-    <p:sldId id="276" r:id="rId9"/>
+    <p:sldId id="279" r:id="rId7"/>
+    <p:sldId id="271" r:id="rId8"/>
+    <p:sldId id="278" r:id="rId9"/>
+    <p:sldId id="275" r:id="rId10"/>
+    <p:sldId id="280" r:id="rId11"/>
+    <p:sldId id="281" r:id="rId12"/>
+    <p:sldId id="276" r:id="rId13"/>
+    <p:sldId id="260" r:id="rId14"/>
+    <p:sldId id="282" r:id="rId15"/>
   </p:sldIdLst>
   <p:sldSz cx="12192000" cy="6858000"/>
   <p:notesSz cx="6858000" cy="9144000"/>
@@ -114,7 +120,619 @@
       </a:defRPr>
     </a:lvl9pPr>
   </p:defaultTextStyle>
+  <p:extLst>
+    <p:ext uri="{EFAFB233-063F-42B5-8137-9DF3F51BA10A}">
+      <p15:sldGuideLst xmlns:p15="http://schemas.microsoft.com/office/powerpoint/2012/main"/>
+    </p:ext>
+  </p:extLst>
 </p:presentation>
+</file>
+
+<file path=ppt/revisionInfo.xml><?xml version="1.0" encoding="utf-8"?>
+<p1510:revInfo xmlns:a="http://schemas.openxmlformats.org/drawingml/2006/main" xmlns:r="http://schemas.openxmlformats.org/officeDocument/2006/relationships" xmlns:p1510="http://schemas.microsoft.com/office/powerpoint/2015/10/main">
+  <p1510:revLst>
+    <p1510:client id="{EF6AF223-40D1-4852-ADD9-270F7A4D296A}" v="27" dt="2026-09-04T08:13:11.716"/>
+  </p1510:revLst>
+</p1510:revInfo>
+</file>
+
+<file path=ppt/changesInfos/changesInfo1.xml><?xml version="1.0" encoding="utf-8"?>
+<pc:chgInfo xmlns:a="http://schemas.openxmlformats.org/drawingml/2006/main" xmlns:r="http://schemas.openxmlformats.org/officeDocument/2006/relationships" xmlns:ac="http://schemas.microsoft.com/office/drawing/2013/main/command" xmlns:pc="http://schemas.microsoft.com/office/powerpoint/2013/main/command">
+  <pc:docChgLst>
+    <pc:chgData name="Eyasu Tesfamichael Araya(H00396248)" userId="5f34a840-5bf0-42b4-8834-69f81fab09db" providerId="ADAL" clId="{0A60BBEC-1A11-42D0-9589-428906AA01F9}"/>
+    <pc:docChg chg="undo custSel addSld delSld modSld sldOrd">
+      <pc:chgData name="Eyasu Tesfamichael Araya(H00396248)" userId="5f34a840-5bf0-42b4-8834-69f81fab09db" providerId="ADAL" clId="{0A60BBEC-1A11-42D0-9589-428906AA01F9}" dt="2026-09-04T08:17:14.232" v="392"/>
+      <pc:docMkLst>
+        <pc:docMk/>
+      </pc:docMkLst>
+      <pc:sldChg chg="modSp mod">
+        <pc:chgData name="Eyasu Tesfamichael Araya(H00396248)" userId="5f34a840-5bf0-42b4-8834-69f81fab09db" providerId="ADAL" clId="{0A60BBEC-1A11-42D0-9589-428906AA01F9}" dt="2026-09-04T08:02:03.278" v="353" actId="20577"/>
+        <pc:sldMkLst>
+          <pc:docMk/>
+          <pc:sldMk cId="1567715759" sldId="258"/>
+        </pc:sldMkLst>
+        <pc:spChg chg="mod">
+          <ac:chgData name="Eyasu Tesfamichael Araya(H00396248)" userId="5f34a840-5bf0-42b4-8834-69f81fab09db" providerId="ADAL" clId="{0A60BBEC-1A11-42D0-9589-428906AA01F9}" dt="2026-09-04T07:26:35.574" v="1" actId="1076"/>
+          <ac:spMkLst>
+            <pc:docMk/>
+            <pc:sldMk cId="1567715759" sldId="258"/>
+            <ac:spMk id="13" creationId="{6954FA77-643F-42FA-A1E4-B5EA8F661F24}"/>
+          </ac:spMkLst>
+        </pc:spChg>
+        <pc:spChg chg="mod">
+          <ac:chgData name="Eyasu Tesfamichael Araya(H00396248)" userId="5f34a840-5bf0-42b4-8834-69f81fab09db" providerId="ADAL" clId="{0A60BBEC-1A11-42D0-9589-428906AA01F9}" dt="2026-09-04T08:02:03.278" v="353" actId="20577"/>
+          <ac:spMkLst>
+            <pc:docMk/>
+            <pc:sldMk cId="1567715759" sldId="258"/>
+            <ac:spMk id="15" creationId="{DE9B025C-A448-4C70-9F54-654FA669CD35}"/>
+          </ac:spMkLst>
+        </pc:spChg>
+        <pc:spChg chg="mod">
+          <ac:chgData name="Eyasu Tesfamichael Araya(H00396248)" userId="5f34a840-5bf0-42b4-8834-69f81fab09db" providerId="ADAL" clId="{0A60BBEC-1A11-42D0-9589-428906AA01F9}" dt="2026-09-04T07:28:58.111" v="78" actId="20577"/>
+          <ac:spMkLst>
+            <pc:docMk/>
+            <pc:sldMk cId="1567715759" sldId="258"/>
+            <ac:spMk id="17" creationId="{D74210D6-01BC-42BD-8DE6-39C9C3EECCBA}"/>
+          </ac:spMkLst>
+        </pc:spChg>
+      </pc:sldChg>
+      <pc:sldChg chg="ord">
+        <pc:chgData name="Eyasu Tesfamichael Araya(H00396248)" userId="5f34a840-5bf0-42b4-8834-69f81fab09db" providerId="ADAL" clId="{0A60BBEC-1A11-42D0-9589-428906AA01F9}" dt="2026-09-04T08:17:14.232" v="392"/>
+        <pc:sldMkLst>
+          <pc:docMk/>
+          <pc:sldMk cId="180954338" sldId="260"/>
+        </pc:sldMkLst>
+      </pc:sldChg>
+      <pc:sldChg chg="delSp modSp mod">
+        <pc:chgData name="Eyasu Tesfamichael Araya(H00396248)" userId="5f34a840-5bf0-42b4-8834-69f81fab09db" providerId="ADAL" clId="{0A60BBEC-1A11-42D0-9589-428906AA01F9}" dt="2026-09-04T07:38:54.118" v="129" actId="14100"/>
+        <pc:sldMkLst>
+          <pc:docMk/>
+          <pc:sldMk cId="3642325858" sldId="271"/>
+        </pc:sldMkLst>
+        <pc:spChg chg="del">
+          <ac:chgData name="Eyasu Tesfamichael Araya(H00396248)" userId="5f34a840-5bf0-42b4-8834-69f81fab09db" providerId="ADAL" clId="{0A60BBEC-1A11-42D0-9589-428906AA01F9}" dt="2026-09-04T07:38:33.996" v="123" actId="478"/>
+          <ac:spMkLst>
+            <pc:docMk/>
+            <pc:sldMk cId="3642325858" sldId="271"/>
+            <ac:spMk id="5" creationId="{5CF4D5AD-B99B-B502-A28C-4BD718B1C6E9}"/>
+          </ac:spMkLst>
+        </pc:spChg>
+        <pc:spChg chg="del mod">
+          <ac:chgData name="Eyasu Tesfamichael Araya(H00396248)" userId="5f34a840-5bf0-42b4-8834-69f81fab09db" providerId="ADAL" clId="{0A60BBEC-1A11-42D0-9589-428906AA01F9}" dt="2026-09-04T07:38:35.506" v="124" actId="478"/>
+          <ac:spMkLst>
+            <pc:docMk/>
+            <pc:sldMk cId="3642325858" sldId="271"/>
+            <ac:spMk id="7" creationId="{FCB58224-75D0-3C97-FB03-4C89226327F2}"/>
+          </ac:spMkLst>
+        </pc:spChg>
+        <pc:picChg chg="mod">
+          <ac:chgData name="Eyasu Tesfamichael Araya(H00396248)" userId="5f34a840-5bf0-42b4-8834-69f81fab09db" providerId="ADAL" clId="{0A60BBEC-1A11-42D0-9589-428906AA01F9}" dt="2026-09-04T07:38:54.118" v="129" actId="14100"/>
+          <ac:picMkLst>
+            <pc:docMk/>
+            <pc:sldMk cId="3642325858" sldId="271"/>
+            <ac:picMk id="6" creationId="{8DE14099-BCED-9C9B-9C53-0FD10A60DA70}"/>
+          </ac:picMkLst>
+        </pc:picChg>
+      </pc:sldChg>
+      <pc:sldChg chg="addSp delSp modSp mod ord">
+        <pc:chgData name="Eyasu Tesfamichael Araya(H00396248)" userId="5f34a840-5bf0-42b4-8834-69f81fab09db" providerId="ADAL" clId="{0A60BBEC-1A11-42D0-9589-428906AA01F9}" dt="2026-09-04T08:05:03.900" v="355"/>
+        <pc:sldMkLst>
+          <pc:docMk/>
+          <pc:sldMk cId="1623352141" sldId="272"/>
+        </pc:sldMkLst>
+        <pc:spChg chg="del">
+          <ac:chgData name="Eyasu Tesfamichael Araya(H00396248)" userId="5f34a840-5bf0-42b4-8834-69f81fab09db" providerId="ADAL" clId="{0A60BBEC-1A11-42D0-9589-428906AA01F9}" dt="2026-09-04T07:39:01.149" v="130" actId="478"/>
+          <ac:spMkLst>
+            <pc:docMk/>
+            <pc:sldMk cId="1623352141" sldId="272"/>
+            <ac:spMk id="5" creationId="{849B9FC0-5BD1-4B39-1069-D2281AEC3803}"/>
+          </ac:spMkLst>
+        </pc:spChg>
+        <pc:spChg chg="add del">
+          <ac:chgData name="Eyasu Tesfamichael Araya(H00396248)" userId="5f34a840-5bf0-42b4-8834-69f81fab09db" providerId="ADAL" clId="{0A60BBEC-1A11-42D0-9589-428906AA01F9}" dt="2026-09-04T07:39:18.864" v="138" actId="478"/>
+          <ac:spMkLst>
+            <pc:docMk/>
+            <pc:sldMk cId="1623352141" sldId="272"/>
+            <ac:spMk id="7" creationId="{75F1B98E-6436-5CA0-31C9-5F5B18D49F05}"/>
+          </ac:spMkLst>
+        </pc:spChg>
+        <pc:picChg chg="mod">
+          <ac:chgData name="Eyasu Tesfamichael Araya(H00396248)" userId="5f34a840-5bf0-42b4-8834-69f81fab09db" providerId="ADAL" clId="{0A60BBEC-1A11-42D0-9589-428906AA01F9}" dt="2026-09-04T07:39:18.336" v="137" actId="1076"/>
+          <ac:picMkLst>
+            <pc:docMk/>
+            <pc:sldMk cId="1623352141" sldId="272"/>
+            <ac:picMk id="4" creationId="{C44B5AF8-1BAF-DA21-F138-596DC02E99E6}"/>
+          </ac:picMkLst>
+        </pc:picChg>
+      </pc:sldChg>
+      <pc:sldChg chg="del">
+        <pc:chgData name="Eyasu Tesfamichael Araya(H00396248)" userId="5f34a840-5bf0-42b4-8834-69f81fab09db" providerId="ADAL" clId="{0A60BBEC-1A11-42D0-9589-428906AA01F9}" dt="2026-09-04T07:35:06.903" v="111" actId="47"/>
+        <pc:sldMkLst>
+          <pc:docMk/>
+          <pc:sldMk cId="3255495754" sldId="274"/>
+        </pc:sldMkLst>
+      </pc:sldChg>
+      <pc:sldChg chg="addSp delSp modSp add mod setBg">
+        <pc:chgData name="Eyasu Tesfamichael Araya(H00396248)" userId="5f34a840-5bf0-42b4-8834-69f81fab09db" providerId="ADAL" clId="{0A60BBEC-1A11-42D0-9589-428906AA01F9}" dt="2026-09-04T07:32:16.006" v="88"/>
+        <pc:sldMkLst>
+          <pc:docMk/>
+          <pc:sldMk cId="1661983185" sldId="277"/>
+        </pc:sldMkLst>
+        <pc:spChg chg="mod">
+          <ac:chgData name="Eyasu Tesfamichael Araya(H00396248)" userId="5f34a840-5bf0-42b4-8834-69f81fab09db" providerId="ADAL" clId="{0A60BBEC-1A11-42D0-9589-428906AA01F9}" dt="2026-09-04T07:30:46.553" v="80"/>
+          <ac:spMkLst>
+            <pc:docMk/>
+            <pc:sldMk cId="1661983185" sldId="277"/>
+            <ac:spMk id="2" creationId="{61AF15BC-D6D9-9C64-A379-B2A2A2702D22}"/>
+          </ac:spMkLst>
+        </pc:spChg>
+        <pc:spChg chg="del">
+          <ac:chgData name="Eyasu Tesfamichael Araya(H00396248)" userId="5f34a840-5bf0-42b4-8834-69f81fab09db" providerId="ADAL" clId="{0A60BBEC-1A11-42D0-9589-428906AA01F9}" dt="2026-09-04T07:30:54.803" v="81" actId="478"/>
+          <ac:spMkLst>
+            <pc:docMk/>
+            <pc:sldMk cId="1661983185" sldId="277"/>
+            <ac:spMk id="4" creationId="{9B641066-A9DF-06F3-5070-754ECF942A76}"/>
+          </ac:spMkLst>
+        </pc:spChg>
+        <pc:spChg chg="del">
+          <ac:chgData name="Eyasu Tesfamichael Araya(H00396248)" userId="5f34a840-5bf0-42b4-8834-69f81fab09db" providerId="ADAL" clId="{0A60BBEC-1A11-42D0-9589-428906AA01F9}" dt="2026-09-04T07:30:54.803" v="81" actId="478"/>
+          <ac:spMkLst>
+            <pc:docMk/>
+            <pc:sldMk cId="1661983185" sldId="277"/>
+            <ac:spMk id="6" creationId="{C06931BF-B69D-3584-213D-719AE96225D5}"/>
+          </ac:spMkLst>
+        </pc:spChg>
+        <pc:spChg chg="del">
+          <ac:chgData name="Eyasu Tesfamichael Araya(H00396248)" userId="5f34a840-5bf0-42b4-8834-69f81fab09db" providerId="ADAL" clId="{0A60BBEC-1A11-42D0-9589-428906AA01F9}" dt="2026-09-04T07:30:54.803" v="81" actId="478"/>
+          <ac:spMkLst>
+            <pc:docMk/>
+            <pc:sldMk cId="1661983185" sldId="277"/>
+            <ac:spMk id="10" creationId="{58AAFE79-C50A-77C7-C52B-D1A4AA0BC477}"/>
+          </ac:spMkLst>
+        </pc:spChg>
+        <pc:spChg chg="del">
+          <ac:chgData name="Eyasu Tesfamichael Araya(H00396248)" userId="5f34a840-5bf0-42b4-8834-69f81fab09db" providerId="ADAL" clId="{0A60BBEC-1A11-42D0-9589-428906AA01F9}" dt="2026-09-04T07:30:54.803" v="81" actId="478"/>
+          <ac:spMkLst>
+            <pc:docMk/>
+            <pc:sldMk cId="1661983185" sldId="277"/>
+            <ac:spMk id="12" creationId="{BAEFCEA7-C782-E1F7-CB8E-271646D153BD}"/>
+          </ac:spMkLst>
+        </pc:spChg>
+        <pc:spChg chg="del">
+          <ac:chgData name="Eyasu Tesfamichael Araya(H00396248)" userId="5f34a840-5bf0-42b4-8834-69f81fab09db" providerId="ADAL" clId="{0A60BBEC-1A11-42D0-9589-428906AA01F9}" dt="2026-09-04T07:30:54.803" v="81" actId="478"/>
+          <ac:spMkLst>
+            <pc:docMk/>
+            <pc:sldMk cId="1661983185" sldId="277"/>
+            <ac:spMk id="16" creationId="{CD4DEF69-5AC5-EFED-D636-C32E7C7A5341}"/>
+          </ac:spMkLst>
+        </pc:spChg>
+        <pc:spChg chg="del">
+          <ac:chgData name="Eyasu Tesfamichael Araya(H00396248)" userId="5f34a840-5bf0-42b4-8834-69f81fab09db" providerId="ADAL" clId="{0A60BBEC-1A11-42D0-9589-428906AA01F9}" dt="2026-09-04T07:30:57.564" v="82" actId="478"/>
+          <ac:spMkLst>
+            <pc:docMk/>
+            <pc:sldMk cId="1661983185" sldId="277"/>
+            <ac:spMk id="18" creationId="{492F120F-F0D2-E86C-A2BC-8DD9A46A0878}"/>
+          </ac:spMkLst>
+        </pc:spChg>
+        <pc:spChg chg="del">
+          <ac:chgData name="Eyasu Tesfamichael Araya(H00396248)" userId="5f34a840-5bf0-42b4-8834-69f81fab09db" providerId="ADAL" clId="{0A60BBEC-1A11-42D0-9589-428906AA01F9}" dt="2026-09-04T07:30:54.803" v="81" actId="478"/>
+          <ac:spMkLst>
+            <pc:docMk/>
+            <pc:sldMk cId="1661983185" sldId="277"/>
+            <ac:spMk id="20" creationId="{CE7C0C81-67DB-F861-1527-5957955500EA}"/>
+          </ac:spMkLst>
+        </pc:spChg>
+        <pc:spChg chg="del">
+          <ac:chgData name="Eyasu Tesfamichael Araya(H00396248)" userId="5f34a840-5bf0-42b4-8834-69f81fab09db" providerId="ADAL" clId="{0A60BBEC-1A11-42D0-9589-428906AA01F9}" dt="2026-09-04T07:30:54.803" v="81" actId="478"/>
+          <ac:spMkLst>
+            <pc:docMk/>
+            <pc:sldMk cId="1661983185" sldId="277"/>
+            <ac:spMk id="21" creationId="{8E8FFF22-7DE1-3E9A-0118-768C510AE314}"/>
+          </ac:spMkLst>
+        </pc:spChg>
+        <pc:spChg chg="del">
+          <ac:chgData name="Eyasu Tesfamichael Araya(H00396248)" userId="5f34a840-5bf0-42b4-8834-69f81fab09db" providerId="ADAL" clId="{0A60BBEC-1A11-42D0-9589-428906AA01F9}" dt="2026-09-04T07:30:54.803" v="81" actId="478"/>
+          <ac:spMkLst>
+            <pc:docMk/>
+            <pc:sldMk cId="1661983185" sldId="277"/>
+            <ac:spMk id="22" creationId="{90876651-D6F2-A711-BB31-0BDDC6E161C7}"/>
+          </ac:spMkLst>
+        </pc:spChg>
+        <pc:spChg chg="del">
+          <ac:chgData name="Eyasu Tesfamichael Araya(H00396248)" userId="5f34a840-5bf0-42b4-8834-69f81fab09db" providerId="ADAL" clId="{0A60BBEC-1A11-42D0-9589-428906AA01F9}" dt="2026-09-04T07:30:54.803" v="81" actId="478"/>
+          <ac:spMkLst>
+            <pc:docMk/>
+            <pc:sldMk cId="1661983185" sldId="277"/>
+            <ac:spMk id="24" creationId="{25A5C534-5224-89A3-6146-A5885DD707C8}"/>
+          </ac:spMkLst>
+        </pc:spChg>
+        <pc:spChg chg="del">
+          <ac:chgData name="Eyasu Tesfamichael Araya(H00396248)" userId="5f34a840-5bf0-42b4-8834-69f81fab09db" providerId="ADAL" clId="{0A60BBEC-1A11-42D0-9589-428906AA01F9}" dt="2026-09-04T07:30:54.803" v="81" actId="478"/>
+          <ac:spMkLst>
+            <pc:docMk/>
+            <pc:sldMk cId="1661983185" sldId="277"/>
+            <ac:spMk id="25" creationId="{914519FA-FD03-32BB-5780-1A3D366F90AC}"/>
+          </ac:spMkLst>
+        </pc:spChg>
+        <pc:spChg chg="del">
+          <ac:chgData name="Eyasu Tesfamichael Araya(H00396248)" userId="5f34a840-5bf0-42b4-8834-69f81fab09db" providerId="ADAL" clId="{0A60BBEC-1A11-42D0-9589-428906AA01F9}" dt="2026-09-04T07:30:58.371" v="83" actId="478"/>
+          <ac:spMkLst>
+            <pc:docMk/>
+            <pc:sldMk cId="1661983185" sldId="277"/>
+            <ac:spMk id="51" creationId="{53C782C1-CC68-70FE-0479-D8DECEBF0590}"/>
+          </ac:spMkLst>
+        </pc:spChg>
+        <pc:spChg chg="del mod">
+          <ac:chgData name="Eyasu Tesfamichael Araya(H00396248)" userId="5f34a840-5bf0-42b4-8834-69f81fab09db" providerId="ADAL" clId="{0A60BBEC-1A11-42D0-9589-428906AA01F9}" dt="2026-09-04T07:31:00.131" v="85" actId="478"/>
+          <ac:spMkLst>
+            <pc:docMk/>
+            <pc:sldMk cId="1661983185" sldId="277"/>
+            <ac:spMk id="53" creationId="{A46A2C67-18DE-0445-7B45-1F785220C4EE}"/>
+          </ac:spMkLst>
+        </pc:spChg>
+        <pc:graphicFrameChg chg="add del mod">
+          <ac:chgData name="Eyasu Tesfamichael Araya(H00396248)" userId="5f34a840-5bf0-42b4-8834-69f81fab09db" providerId="ADAL" clId="{0A60BBEC-1A11-42D0-9589-428906AA01F9}" dt="2026-09-04T07:32:15" v="87" actId="478"/>
+          <ac:graphicFrameMkLst>
+            <pc:docMk/>
+            <pc:sldMk cId="1661983185" sldId="277"/>
+            <ac:graphicFrameMk id="3" creationId="{E8AB7211-0294-3E94-6713-420C80725F97}"/>
+          </ac:graphicFrameMkLst>
+        </pc:graphicFrameChg>
+        <pc:graphicFrameChg chg="add mod">
+          <ac:chgData name="Eyasu Tesfamichael Araya(H00396248)" userId="5f34a840-5bf0-42b4-8834-69f81fab09db" providerId="ADAL" clId="{0A60BBEC-1A11-42D0-9589-428906AA01F9}" dt="2026-09-04T07:32:16.006" v="88"/>
+          <ac:graphicFrameMkLst>
+            <pc:docMk/>
+            <pc:sldMk cId="1661983185" sldId="277"/>
+            <ac:graphicFrameMk id="5" creationId="{0E13C1AC-11D0-4D70-23E6-042B19C226F4}"/>
+          </ac:graphicFrameMkLst>
+        </pc:graphicFrameChg>
+      </pc:sldChg>
+      <pc:sldChg chg="add del">
+        <pc:chgData name="Eyasu Tesfamichael Araya(H00396248)" userId="5f34a840-5bf0-42b4-8834-69f81fab09db" providerId="ADAL" clId="{0A60BBEC-1A11-42D0-9589-428906AA01F9}" dt="2026-09-04T07:37:16.281" v="113"/>
+        <pc:sldMkLst>
+          <pc:docMk/>
+          <pc:sldMk cId="1339309014" sldId="278"/>
+        </pc:sldMkLst>
+      </pc:sldChg>
+      <pc:sldChg chg="delSp add del mod">
+        <pc:chgData name="Eyasu Tesfamichael Araya(H00396248)" userId="5f34a840-5bf0-42b4-8834-69f81fab09db" providerId="ADAL" clId="{0A60BBEC-1A11-42D0-9589-428906AA01F9}" dt="2026-09-04T07:34:27.419" v="110" actId="47"/>
+        <pc:sldMkLst>
+          <pc:docMk/>
+          <pc:sldMk cId="1378770216" sldId="278"/>
+        </pc:sldMkLst>
+        <pc:spChg chg="del">
+          <ac:chgData name="Eyasu Tesfamichael Araya(H00396248)" userId="5f34a840-5bf0-42b4-8834-69f81fab09db" providerId="ADAL" clId="{0A60BBEC-1A11-42D0-9589-428906AA01F9}" dt="2026-09-04T07:33:30.859" v="92" actId="478"/>
+          <ac:spMkLst>
+            <pc:docMk/>
+            <pc:sldMk cId="1378770216" sldId="278"/>
+            <ac:spMk id="5" creationId="{4ACD7F35-EFA9-AB6C-0D81-B47F37DFB37F}"/>
+          </ac:spMkLst>
+        </pc:spChg>
+        <pc:spChg chg="del">
+          <ac:chgData name="Eyasu Tesfamichael Araya(H00396248)" userId="5f34a840-5bf0-42b4-8834-69f81fab09db" providerId="ADAL" clId="{0A60BBEC-1A11-42D0-9589-428906AA01F9}" dt="2026-09-04T07:33:29.389" v="91" actId="478"/>
+          <ac:spMkLst>
+            <pc:docMk/>
+            <pc:sldMk cId="1378770216" sldId="278"/>
+            <ac:spMk id="7" creationId="{11CCA598-0CCC-C17D-3AEC-D8C64CC69B56}"/>
+          </ac:spMkLst>
+        </pc:spChg>
+        <pc:picChg chg="del">
+          <ac:chgData name="Eyasu Tesfamichael Araya(H00396248)" userId="5f34a840-5bf0-42b4-8834-69f81fab09db" providerId="ADAL" clId="{0A60BBEC-1A11-42D0-9589-428906AA01F9}" dt="2026-09-04T07:33:26.346" v="90" actId="478"/>
+          <ac:picMkLst>
+            <pc:docMk/>
+            <pc:sldMk cId="1378770216" sldId="278"/>
+            <ac:picMk id="6" creationId="{26B0A7BE-7008-2A51-1B66-4BA5E1D6BAC8}"/>
+          </ac:picMkLst>
+        </pc:picChg>
+      </pc:sldChg>
+      <pc:sldChg chg="addSp delSp modSp add mod">
+        <pc:chgData name="Eyasu Tesfamichael Araya(H00396248)" userId="5f34a840-5bf0-42b4-8834-69f81fab09db" providerId="ADAL" clId="{0A60BBEC-1A11-42D0-9589-428906AA01F9}" dt="2026-09-04T07:37:55.848" v="122" actId="1076"/>
+        <pc:sldMkLst>
+          <pc:docMk/>
+          <pc:sldMk cId="1406673078" sldId="278"/>
+        </pc:sldMkLst>
+        <pc:spChg chg="mod">
+          <ac:chgData name="Eyasu Tesfamichael Araya(H00396248)" userId="5f34a840-5bf0-42b4-8834-69f81fab09db" providerId="ADAL" clId="{0A60BBEC-1A11-42D0-9589-428906AA01F9}" dt="2026-09-04T07:37:37.749" v="120"/>
+          <ac:spMkLst>
+            <pc:docMk/>
+            <pc:sldMk cId="1406673078" sldId="278"/>
+            <ac:spMk id="2" creationId="{94B57C39-A125-533B-375D-2DAB2F4567D2}"/>
+          </ac:spMkLst>
+        </pc:spChg>
+        <pc:spChg chg="del">
+          <ac:chgData name="Eyasu Tesfamichael Araya(H00396248)" userId="5f34a840-5bf0-42b4-8834-69f81fab09db" providerId="ADAL" clId="{0A60BBEC-1A11-42D0-9589-428906AA01F9}" dt="2026-09-04T07:37:24.779" v="118" actId="478"/>
+          <ac:spMkLst>
+            <pc:docMk/>
+            <pc:sldMk cId="1406673078" sldId="278"/>
+            <ac:spMk id="5" creationId="{B99236D7-FC60-F162-D6EA-30A928A9B79B}"/>
+          </ac:spMkLst>
+        </pc:spChg>
+        <pc:spChg chg="del mod">
+          <ac:chgData name="Eyasu Tesfamichael Araya(H00396248)" userId="5f34a840-5bf0-42b4-8834-69f81fab09db" providerId="ADAL" clId="{0A60BBEC-1A11-42D0-9589-428906AA01F9}" dt="2026-09-04T07:37:24.015" v="117" actId="478"/>
+          <ac:spMkLst>
+            <pc:docMk/>
+            <pc:sldMk cId="1406673078" sldId="278"/>
+            <ac:spMk id="7" creationId="{597A643A-50C7-37A1-F2A7-ED0C1515145F}"/>
+          </ac:spMkLst>
+        </pc:spChg>
+        <pc:graphicFrameChg chg="add mod modGraphic">
+          <ac:chgData name="Eyasu Tesfamichael Araya(H00396248)" userId="5f34a840-5bf0-42b4-8834-69f81fab09db" providerId="ADAL" clId="{0A60BBEC-1A11-42D0-9589-428906AA01F9}" dt="2026-09-04T07:37:55.848" v="122" actId="1076"/>
+          <ac:graphicFrameMkLst>
+            <pc:docMk/>
+            <pc:sldMk cId="1406673078" sldId="278"/>
+            <ac:graphicFrameMk id="3" creationId="{D72A2C61-9CFF-718A-5B85-F0EE501F4E9F}"/>
+          </ac:graphicFrameMkLst>
+        </pc:graphicFrameChg>
+        <pc:picChg chg="del">
+          <ac:chgData name="Eyasu Tesfamichael Araya(H00396248)" userId="5f34a840-5bf0-42b4-8834-69f81fab09db" providerId="ADAL" clId="{0A60BBEC-1A11-42D0-9589-428906AA01F9}" dt="2026-09-04T07:37:21.091" v="115" actId="478"/>
+          <ac:picMkLst>
+            <pc:docMk/>
+            <pc:sldMk cId="1406673078" sldId="278"/>
+            <ac:picMk id="6" creationId="{064B22CB-995A-A9BA-B261-BFF59BEC72C2}"/>
+          </ac:picMkLst>
+        </pc:picChg>
+      </pc:sldChg>
+      <pc:sldChg chg="addSp delSp modSp add mod ord">
+        <pc:chgData name="Eyasu Tesfamichael Araya(H00396248)" userId="5f34a840-5bf0-42b4-8834-69f81fab09db" providerId="ADAL" clId="{0A60BBEC-1A11-42D0-9589-428906AA01F9}" dt="2026-09-04T08:05:06.243" v="357"/>
+        <pc:sldMkLst>
+          <pc:docMk/>
+          <pc:sldMk cId="810582112" sldId="279"/>
+        </pc:sldMkLst>
+        <pc:spChg chg="mod">
+          <ac:chgData name="Eyasu Tesfamichael Araya(H00396248)" userId="5f34a840-5bf0-42b4-8834-69f81fab09db" providerId="ADAL" clId="{0A60BBEC-1A11-42D0-9589-428906AA01F9}" dt="2026-09-04T07:44:35.138" v="145"/>
+          <ac:spMkLst>
+            <pc:docMk/>
+            <pc:sldMk cId="810582112" sldId="279"/>
+            <ac:spMk id="2" creationId="{D13E4512-CE41-8EA3-106C-A7302E99E888}"/>
+          </ac:spMkLst>
+        </pc:spChg>
+        <pc:spChg chg="del">
+          <ac:chgData name="Eyasu Tesfamichael Araya(H00396248)" userId="5f34a840-5bf0-42b4-8834-69f81fab09db" providerId="ADAL" clId="{0A60BBEC-1A11-42D0-9589-428906AA01F9}" dt="2026-09-04T07:44:18.208" v="142" actId="478"/>
+          <ac:spMkLst>
+            <pc:docMk/>
+            <pc:sldMk cId="810582112" sldId="279"/>
+            <ac:spMk id="7" creationId="{D59E4EC2-9407-CE30-2545-4D9457B50367}"/>
+          </ac:spMkLst>
+        </pc:spChg>
+        <pc:graphicFrameChg chg="add del mod modGraphic">
+          <ac:chgData name="Eyasu Tesfamichael Araya(H00396248)" userId="5f34a840-5bf0-42b4-8834-69f81fab09db" providerId="ADAL" clId="{0A60BBEC-1A11-42D0-9589-428906AA01F9}" dt="2026-09-04T07:50:17.106" v="186" actId="478"/>
+          <ac:graphicFrameMkLst>
+            <pc:docMk/>
+            <pc:sldMk cId="810582112" sldId="279"/>
+            <ac:graphicFrameMk id="3" creationId="{F9DCF923-D646-0ED3-D552-95805A643011}"/>
+          </ac:graphicFrameMkLst>
+        </pc:graphicFrameChg>
+        <pc:graphicFrameChg chg="add del mod modGraphic">
+          <ac:chgData name="Eyasu Tesfamichael Araya(H00396248)" userId="5f34a840-5bf0-42b4-8834-69f81fab09db" providerId="ADAL" clId="{0A60BBEC-1A11-42D0-9589-428906AA01F9}" dt="2026-09-04T07:52:17.631" v="196" actId="478"/>
+          <ac:graphicFrameMkLst>
+            <pc:docMk/>
+            <pc:sldMk cId="810582112" sldId="279"/>
+            <ac:graphicFrameMk id="5" creationId="{67A948F4-3A6D-5CAD-60BF-A940514EB497}"/>
+          </ac:graphicFrameMkLst>
+        </pc:graphicFrameChg>
+        <pc:graphicFrameChg chg="add mod modGraphic">
+          <ac:chgData name="Eyasu Tesfamichael Araya(H00396248)" userId="5f34a840-5bf0-42b4-8834-69f81fab09db" providerId="ADAL" clId="{0A60BBEC-1A11-42D0-9589-428906AA01F9}" dt="2026-09-04T07:53:48.161" v="213" actId="1076"/>
+          <ac:graphicFrameMkLst>
+            <pc:docMk/>
+            <pc:sldMk cId="810582112" sldId="279"/>
+            <ac:graphicFrameMk id="6" creationId="{7A198911-7A5D-3C87-E5E9-8FDACC1CAD2B}"/>
+          </ac:graphicFrameMkLst>
+        </pc:graphicFrameChg>
+        <pc:picChg chg="del">
+          <ac:chgData name="Eyasu Tesfamichael Araya(H00396248)" userId="5f34a840-5bf0-42b4-8834-69f81fab09db" providerId="ADAL" clId="{0A60BBEC-1A11-42D0-9589-428906AA01F9}" dt="2026-09-04T07:44:19.016" v="143" actId="478"/>
+          <ac:picMkLst>
+            <pc:docMk/>
+            <pc:sldMk cId="810582112" sldId="279"/>
+            <ac:picMk id="4" creationId="{BDA61505-4350-A2C8-8C3A-72D9665E161D}"/>
+          </ac:picMkLst>
+        </pc:picChg>
+      </pc:sldChg>
+      <pc:sldChg chg="add del">
+        <pc:chgData name="Eyasu Tesfamichael Araya(H00396248)" userId="5f34a840-5bf0-42b4-8834-69f81fab09db" providerId="ADAL" clId="{0A60BBEC-1A11-42D0-9589-428906AA01F9}" dt="2026-09-04T07:42:05.518" v="140" actId="47"/>
+        <pc:sldMkLst>
+          <pc:docMk/>
+          <pc:sldMk cId="1658287465" sldId="279"/>
+        </pc:sldMkLst>
+      </pc:sldChg>
+      <pc:sldChg chg="addSp delSp modSp add mod">
+        <pc:chgData name="Eyasu Tesfamichael Araya(H00396248)" userId="5f34a840-5bf0-42b4-8834-69f81fab09db" providerId="ADAL" clId="{0A60BBEC-1A11-42D0-9589-428906AA01F9}" dt="2026-09-04T07:56:04.089" v="232" actId="20577"/>
+        <pc:sldMkLst>
+          <pc:docMk/>
+          <pc:sldMk cId="1334353423" sldId="280"/>
+        </pc:sldMkLst>
+        <pc:spChg chg="mod">
+          <ac:chgData name="Eyasu Tesfamichael Araya(H00396248)" userId="5f34a840-5bf0-42b4-8834-69f81fab09db" providerId="ADAL" clId="{0A60BBEC-1A11-42D0-9589-428906AA01F9}" dt="2026-09-04T07:54:51.015" v="215"/>
+          <ac:spMkLst>
+            <pc:docMk/>
+            <pc:sldMk cId="1334353423" sldId="280"/>
+            <ac:spMk id="2" creationId="{0B09D8E6-4727-4569-FF6E-2441FFA32F87}"/>
+          </ac:spMkLst>
+        </pc:spChg>
+        <pc:spChg chg="del">
+          <ac:chgData name="Eyasu Tesfamichael Araya(H00396248)" userId="5f34a840-5bf0-42b4-8834-69f81fab09db" providerId="ADAL" clId="{0A60BBEC-1A11-42D0-9589-428906AA01F9}" dt="2026-09-04T07:54:54.917" v="216" actId="478"/>
+          <ac:spMkLst>
+            <pc:docMk/>
+            <pc:sldMk cId="1334353423" sldId="280"/>
+            <ac:spMk id="5" creationId="{900C62B6-8B7A-4AE9-F5DB-8614DC2FC342}"/>
+          </ac:spMkLst>
+        </pc:spChg>
+        <pc:spChg chg="del">
+          <ac:chgData name="Eyasu Tesfamichael Araya(H00396248)" userId="5f34a840-5bf0-42b4-8834-69f81fab09db" providerId="ADAL" clId="{0A60BBEC-1A11-42D0-9589-428906AA01F9}" dt="2026-09-04T07:54:56.035" v="217" actId="478"/>
+          <ac:spMkLst>
+            <pc:docMk/>
+            <pc:sldMk cId="1334353423" sldId="280"/>
+            <ac:spMk id="7" creationId="{2F365091-A229-5A81-9A7E-0DB5CFB32B69}"/>
+          </ac:spMkLst>
+        </pc:spChg>
+        <pc:graphicFrameChg chg="add mod modGraphic">
+          <ac:chgData name="Eyasu Tesfamichael Araya(H00396248)" userId="5f34a840-5bf0-42b4-8834-69f81fab09db" providerId="ADAL" clId="{0A60BBEC-1A11-42D0-9589-428906AA01F9}" dt="2026-09-04T07:56:04.089" v="232" actId="20577"/>
+          <ac:graphicFrameMkLst>
+            <pc:docMk/>
+            <pc:sldMk cId="1334353423" sldId="280"/>
+            <ac:graphicFrameMk id="3" creationId="{AED74D8A-B90B-8B9E-795F-E2147BD37B0B}"/>
+          </ac:graphicFrameMkLst>
+        </pc:graphicFrameChg>
+        <pc:picChg chg="del">
+          <ac:chgData name="Eyasu Tesfamichael Araya(H00396248)" userId="5f34a840-5bf0-42b4-8834-69f81fab09db" providerId="ADAL" clId="{0A60BBEC-1A11-42D0-9589-428906AA01F9}" dt="2026-09-04T07:54:56.630" v="218" actId="478"/>
+          <ac:picMkLst>
+            <pc:docMk/>
+            <pc:sldMk cId="1334353423" sldId="280"/>
+            <ac:picMk id="6" creationId="{FAC5A39A-E41E-08AC-C020-3783F15A56C2}"/>
+          </ac:picMkLst>
+        </pc:picChg>
+      </pc:sldChg>
+      <pc:sldChg chg="addSp delSp modSp add mod ord">
+        <pc:chgData name="Eyasu Tesfamichael Araya(H00396248)" userId="5f34a840-5bf0-42b4-8834-69f81fab09db" providerId="ADAL" clId="{0A60BBEC-1A11-42D0-9589-428906AA01F9}" dt="2026-09-04T08:16:31.657" v="390"/>
+        <pc:sldMkLst>
+          <pc:docMk/>
+          <pc:sldMk cId="69078770" sldId="281"/>
+        </pc:sldMkLst>
+        <pc:spChg chg="mod">
+          <ac:chgData name="Eyasu Tesfamichael Araya(H00396248)" userId="5f34a840-5bf0-42b4-8834-69f81fab09db" providerId="ADAL" clId="{0A60BBEC-1A11-42D0-9589-428906AA01F9}" dt="2026-09-04T07:57:21.194" v="256" actId="20577"/>
+          <ac:spMkLst>
+            <pc:docMk/>
+            <pc:sldMk cId="69078770" sldId="281"/>
+            <ac:spMk id="2" creationId="{CBC4AB1D-C1A0-BC7E-8F4D-E17ADFEC854D}"/>
+          </ac:spMkLst>
+        </pc:spChg>
+        <pc:spChg chg="del">
+          <ac:chgData name="Eyasu Tesfamichael Araya(H00396248)" userId="5f34a840-5bf0-42b4-8834-69f81fab09db" providerId="ADAL" clId="{0A60BBEC-1A11-42D0-9589-428906AA01F9}" dt="2026-09-04T07:56:56.627" v="236" actId="478"/>
+          <ac:spMkLst>
+            <pc:docMk/>
+            <pc:sldMk cId="69078770" sldId="281"/>
+            <ac:spMk id="5" creationId="{45107577-3511-7292-D7BE-7206F369AFE0}"/>
+          </ac:spMkLst>
+        </pc:spChg>
+        <pc:spChg chg="del mod">
+          <ac:chgData name="Eyasu Tesfamichael Araya(H00396248)" userId="5f34a840-5bf0-42b4-8834-69f81fab09db" providerId="ADAL" clId="{0A60BBEC-1A11-42D0-9589-428906AA01F9}" dt="2026-09-04T07:56:55.927" v="235" actId="478"/>
+          <ac:spMkLst>
+            <pc:docMk/>
+            <pc:sldMk cId="69078770" sldId="281"/>
+            <ac:spMk id="7" creationId="{728705A2-2AAF-7F1F-BE95-71BCED7A4623}"/>
+          </ac:spMkLst>
+        </pc:spChg>
+        <pc:graphicFrameChg chg="add mod modGraphic">
+          <ac:chgData name="Eyasu Tesfamichael Araya(H00396248)" userId="5f34a840-5bf0-42b4-8834-69f81fab09db" providerId="ADAL" clId="{0A60BBEC-1A11-42D0-9589-428906AA01F9}" dt="2026-09-04T07:59:14.782" v="269" actId="403"/>
+          <ac:graphicFrameMkLst>
+            <pc:docMk/>
+            <pc:sldMk cId="69078770" sldId="281"/>
+            <ac:graphicFrameMk id="3" creationId="{A2125F34-C26C-05E4-FB86-CCF73DC7B808}"/>
+          </ac:graphicFrameMkLst>
+        </pc:graphicFrameChg>
+        <pc:picChg chg="del">
+          <ac:chgData name="Eyasu Tesfamichael Araya(H00396248)" userId="5f34a840-5bf0-42b4-8834-69f81fab09db" providerId="ADAL" clId="{0A60BBEC-1A11-42D0-9589-428906AA01F9}" dt="2026-09-04T07:57:00.857" v="238" actId="478"/>
+          <ac:picMkLst>
+            <pc:docMk/>
+            <pc:sldMk cId="69078770" sldId="281"/>
+            <ac:picMk id="4" creationId="{36685AEC-D85C-D196-1CE0-696B1B91DD27}"/>
+          </ac:picMkLst>
+        </pc:picChg>
+        <pc:picChg chg="del">
+          <ac:chgData name="Eyasu Tesfamichael Araya(H00396248)" userId="5f34a840-5bf0-42b4-8834-69f81fab09db" providerId="ADAL" clId="{0A60BBEC-1A11-42D0-9589-428906AA01F9}" dt="2026-09-04T07:57:00.134" v="237" actId="478"/>
+          <ac:picMkLst>
+            <pc:docMk/>
+            <pc:sldMk cId="69078770" sldId="281"/>
+            <ac:picMk id="9" creationId="{33985336-FFB5-802D-B82E-9350A5A5174E}"/>
+          </ac:picMkLst>
+        </pc:picChg>
+      </pc:sldChg>
+      <pc:sldChg chg="addSp delSp modSp add mod">
+        <pc:chgData name="Eyasu Tesfamichael Araya(H00396248)" userId="5f34a840-5bf0-42b4-8834-69f81fab09db" providerId="ADAL" clId="{0A60BBEC-1A11-42D0-9589-428906AA01F9}" dt="2026-09-04T08:01:01.943" v="340" actId="1076"/>
+        <pc:sldMkLst>
+          <pc:docMk/>
+          <pc:sldMk cId="1253824190" sldId="282"/>
+        </pc:sldMkLst>
+        <pc:spChg chg="add del mod">
+          <ac:chgData name="Eyasu Tesfamichael Araya(H00396248)" userId="5f34a840-5bf0-42b4-8834-69f81fab09db" providerId="ADAL" clId="{0A60BBEC-1A11-42D0-9589-428906AA01F9}" dt="2026-09-04T08:01:01.943" v="340" actId="1076"/>
+          <ac:spMkLst>
+            <pc:docMk/>
+            <pc:sldMk cId="1253824190" sldId="282"/>
+            <ac:spMk id="2" creationId="{1DBC91FF-A782-C960-3D7B-391A76E72E4C}"/>
+          </ac:spMkLst>
+        </pc:spChg>
+        <pc:spChg chg="del">
+          <ac:chgData name="Eyasu Tesfamichael Araya(H00396248)" userId="5f34a840-5bf0-42b4-8834-69f81fab09db" providerId="ADAL" clId="{0A60BBEC-1A11-42D0-9589-428906AA01F9}" dt="2026-09-04T07:59:41.134" v="273" actId="478"/>
+          <ac:spMkLst>
+            <pc:docMk/>
+            <pc:sldMk cId="1253824190" sldId="282"/>
+            <ac:spMk id="21" creationId="{196A41DB-C8C7-5718-14CE-6EC5B161D55A}"/>
+          </ac:spMkLst>
+        </pc:spChg>
+        <pc:graphicFrameChg chg="del">
+          <ac:chgData name="Eyasu Tesfamichael Araya(H00396248)" userId="5f34a840-5bf0-42b4-8834-69f81fab09db" providerId="ADAL" clId="{0A60BBEC-1A11-42D0-9589-428906AA01F9}" dt="2026-09-04T07:59:44.154" v="275" actId="478"/>
+          <ac:graphicFrameMkLst>
+            <pc:docMk/>
+            <pc:sldMk cId="1253824190" sldId="282"/>
+            <ac:graphicFrameMk id="3" creationId="{FAF6AD5E-DDA1-96B1-AD8D-004406E97846}"/>
+          </ac:graphicFrameMkLst>
+        </pc:graphicFrameChg>
+        <pc:cxnChg chg="del">
+          <ac:chgData name="Eyasu Tesfamichael Araya(H00396248)" userId="5f34a840-5bf0-42b4-8834-69f81fab09db" providerId="ADAL" clId="{0A60BBEC-1A11-42D0-9589-428906AA01F9}" dt="2026-09-04T07:59:42.258" v="274" actId="478"/>
+          <ac:cxnSpMkLst>
+            <pc:docMk/>
+            <pc:sldMk cId="1253824190" sldId="282"/>
+            <ac:cxnSpMk id="23" creationId="{57C093EE-D1A1-9D3E-7102-E2E8914DCA84}"/>
+          </ac:cxnSpMkLst>
+        </pc:cxnChg>
+      </pc:sldChg>
+      <pc:sldChg chg="addSp delSp modSp add mod">
+        <pc:chgData name="Eyasu Tesfamichael Araya(H00396248)" userId="5f34a840-5bf0-42b4-8834-69f81fab09db" providerId="ADAL" clId="{0A60BBEC-1A11-42D0-9589-428906AA01F9}" dt="2026-09-04T08:13:43.114" v="388" actId="20577"/>
+        <pc:sldMkLst>
+          <pc:docMk/>
+          <pc:sldMk cId="2362741516" sldId="283"/>
+        </pc:sldMkLst>
+        <pc:spChg chg="mod">
+          <ac:chgData name="Eyasu Tesfamichael Araya(H00396248)" userId="5f34a840-5bf0-42b4-8834-69f81fab09db" providerId="ADAL" clId="{0A60BBEC-1A11-42D0-9589-428906AA01F9}" dt="2026-09-04T08:10:26.657" v="359"/>
+          <ac:spMkLst>
+            <pc:docMk/>
+            <pc:sldMk cId="2362741516" sldId="283"/>
+            <ac:spMk id="2" creationId="{97FA94B9-42AA-680D-F18E-A9D4E0505ADD}"/>
+          </ac:spMkLst>
+        </pc:spChg>
+        <pc:spChg chg="add mod">
+          <ac:chgData name="Eyasu Tesfamichael Araya(H00396248)" userId="5f34a840-5bf0-42b4-8834-69f81fab09db" providerId="ADAL" clId="{0A60BBEC-1A11-42D0-9589-428906AA01F9}" dt="2026-09-04T08:13:29.588" v="377" actId="14100"/>
+          <ac:spMkLst>
+            <pc:docMk/>
+            <pc:sldMk cId="2362741516" sldId="283"/>
+            <ac:spMk id="4" creationId="{7722EF48-D551-B54B-F34E-8EBE1288320E}"/>
+          </ac:spMkLst>
+        </pc:spChg>
+        <pc:spChg chg="add mod">
+          <ac:chgData name="Eyasu Tesfamichael Araya(H00396248)" userId="5f34a840-5bf0-42b4-8834-69f81fab09db" providerId="ADAL" clId="{0A60BBEC-1A11-42D0-9589-428906AA01F9}" dt="2026-09-04T08:13:43.114" v="388" actId="20577"/>
+          <ac:spMkLst>
+            <pc:docMk/>
+            <pc:sldMk cId="2362741516" sldId="283"/>
+            <ac:spMk id="7" creationId="{56DB4954-9AD1-4B48-4A13-B3A5FD21FF93}"/>
+          </ac:spMkLst>
+        </pc:spChg>
+        <pc:graphicFrameChg chg="del">
+          <ac:chgData name="Eyasu Tesfamichael Araya(H00396248)" userId="5f34a840-5bf0-42b4-8834-69f81fab09db" providerId="ADAL" clId="{0A60BBEC-1A11-42D0-9589-428906AA01F9}" dt="2026-09-04T08:11:55.526" v="360" actId="478"/>
+          <ac:graphicFrameMkLst>
+            <pc:docMk/>
+            <pc:sldMk cId="2362741516" sldId="283"/>
+            <ac:graphicFrameMk id="5" creationId="{9310A1DE-804E-3547-2CFE-4C2125DC7345}"/>
+          </ac:graphicFrameMkLst>
+        </pc:graphicFrameChg>
+        <pc:graphicFrameChg chg="add del mod">
+          <ac:chgData name="Eyasu Tesfamichael Araya(H00396248)" userId="5f34a840-5bf0-42b4-8834-69f81fab09db" providerId="ADAL" clId="{0A60BBEC-1A11-42D0-9589-428906AA01F9}" dt="2026-09-04T08:13:10.501" v="370" actId="478"/>
+          <ac:graphicFrameMkLst>
+            <pc:docMk/>
+            <pc:sldMk cId="2362741516" sldId="283"/>
+            <ac:graphicFrameMk id="8" creationId="{A12AE6BD-91CD-65C6-679B-0EF8299CB993}"/>
+          </ac:graphicFrameMkLst>
+        </pc:graphicFrameChg>
+        <pc:graphicFrameChg chg="add mod modGraphic">
+          <ac:chgData name="Eyasu Tesfamichael Araya(H00396248)" userId="5f34a840-5bf0-42b4-8834-69f81fab09db" providerId="ADAL" clId="{0A60BBEC-1A11-42D0-9589-428906AA01F9}" dt="2026-09-04T08:13:32.315" v="378" actId="1076"/>
+          <ac:graphicFrameMkLst>
+            <pc:docMk/>
+            <pc:sldMk cId="2362741516" sldId="283"/>
+            <ac:graphicFrameMk id="9" creationId="{4E601E0F-906D-0987-F6B6-438A51EBCB2B}"/>
+          </ac:graphicFrameMkLst>
+        </pc:graphicFrameChg>
+      </pc:sldChg>
+    </pc:docChg>
+  </pc:docChgLst>
+</pc:chgInfo>
 </file>
 
 <file path=ppt/notesMasters/notesMaster1.xml><?xml version="1.0" encoding="utf-8"?>
@@ -363,6 +981,497 @@
 </p:notes>
 </file>
 
+<file path=ppt/notesSlides/notesSlide10.xml><?xml version="1.0" encoding="utf-8"?>
+<p:notes xmlns:a="http://schemas.openxmlformats.org/drawingml/2006/main" xmlns:r="http://schemas.openxmlformats.org/officeDocument/2006/relationships" xmlns:p="http://schemas.openxmlformats.org/presentationml/2006/main">
+  <p:cSld>
+    <p:spTree>
+      <p:nvGrpSpPr>
+        <p:cNvPr id="1" name="">
+          <a:extLst>
+            <a:ext uri="{FF2B5EF4-FFF2-40B4-BE49-F238E27FC236}">
+              <a16:creationId xmlns:a16="http://schemas.microsoft.com/office/drawing/2014/main" id="{65691EBD-D69A-A52E-15EB-1DB6D8D10E16}"/>
+            </a:ext>
+          </a:extLst>
+        </p:cNvPr>
+        <p:cNvGrpSpPr/>
+        <p:nvPr/>
+      </p:nvGrpSpPr>
+      <p:grpSpPr>
+        <a:xfrm>
+          <a:off x="0" y="0"/>
+          <a:ext cx="0" cy="0"/>
+          <a:chOff x="0" y="0"/>
+          <a:chExt cx="0" cy="0"/>
+        </a:xfrm>
+      </p:grpSpPr>
+      <p:sp>
+        <p:nvSpPr>
+          <p:cNvPr id="2" name="Slide Image Placeholder 1">
+            <a:extLst>
+              <a:ext uri="{FF2B5EF4-FFF2-40B4-BE49-F238E27FC236}">
+                <a16:creationId xmlns:a16="http://schemas.microsoft.com/office/drawing/2014/main" id="{95AF0018-1F81-101A-DE0D-B25E7A4F4918}"/>
+              </a:ext>
+            </a:extLst>
+          </p:cNvPr>
+          <p:cNvSpPr>
+            <a:spLocks noGrp="1" noRot="1" noChangeAspect="1"/>
+          </p:cNvSpPr>
+          <p:nvPr>
+            <p:ph type="sldImg"/>
+          </p:nvPr>
+        </p:nvSpPr>
+        <p:spPr/>
+      </p:sp>
+      <p:sp>
+        <p:nvSpPr>
+          <p:cNvPr id="3" name="Notes Placeholder 2">
+            <a:extLst>
+              <a:ext uri="{FF2B5EF4-FFF2-40B4-BE49-F238E27FC236}">
+                <a16:creationId xmlns:a16="http://schemas.microsoft.com/office/drawing/2014/main" id="{75524C25-9BEE-1C84-1178-F5C8534DEF17}"/>
+              </a:ext>
+            </a:extLst>
+          </p:cNvPr>
+          <p:cNvSpPr>
+            <a:spLocks noGrp="1"/>
+          </p:cNvSpPr>
+          <p:nvPr>
+            <p:ph type="body" idx="1"/>
+          </p:nvPr>
+        </p:nvSpPr>
+        <p:spPr/>
+        <p:txBody>
+          <a:bodyPr/>
+          <a:lstStyle/>
+          <a:p>
+            <a:endParaRPr/>
+          </a:p>
+        </p:txBody>
+      </p:sp>
+      <p:sp>
+        <p:nvSpPr>
+          <p:cNvPr id="4" name="Slide Number Placeholder 3">
+            <a:extLst>
+              <a:ext uri="{FF2B5EF4-FFF2-40B4-BE49-F238E27FC236}">
+                <a16:creationId xmlns:a16="http://schemas.microsoft.com/office/drawing/2014/main" id="{5E93841D-F5CF-780A-3E34-6B39BA1C706C}"/>
+              </a:ext>
+            </a:extLst>
+          </p:cNvPr>
+          <p:cNvSpPr>
+            <a:spLocks noGrp="1"/>
+          </p:cNvSpPr>
+          <p:nvPr>
+            <p:ph type="sldNum" idx="5"/>
+          </p:nvPr>
+        </p:nvSpPr>
+        <p:spPr/>
+        <p:txBody>
+          <a:bodyPr/>
+          <a:lstStyle/>
+          <a:p>
+            <a:endParaRPr/>
+          </a:p>
+        </p:txBody>
+      </p:sp>
+    </p:spTree>
+    <p:extLst>
+      <p:ext uri="{BB962C8B-B14F-4D97-AF65-F5344CB8AC3E}">
+        <p14:creationId xmlns:p14="http://schemas.microsoft.com/office/powerpoint/2010/main" val="3485037007"/>
+      </p:ext>
+    </p:extLst>
+  </p:cSld>
+  <p:clrMapOvr>
+    <a:masterClrMapping/>
+  </p:clrMapOvr>
+</p:notes>
+</file>
+
+<file path=ppt/notesSlides/notesSlide11.xml><?xml version="1.0" encoding="utf-8"?>
+<p:notes xmlns:a="http://schemas.openxmlformats.org/drawingml/2006/main" xmlns:r="http://schemas.openxmlformats.org/officeDocument/2006/relationships" xmlns:p="http://schemas.openxmlformats.org/presentationml/2006/main">
+  <p:cSld>
+    <p:spTree>
+      <p:nvGrpSpPr>
+        <p:cNvPr id="1" name="">
+          <a:extLst>
+            <a:ext uri="{FF2B5EF4-FFF2-40B4-BE49-F238E27FC236}">
+              <a16:creationId xmlns:a16="http://schemas.microsoft.com/office/drawing/2014/main" id="{F04BEACF-1E4C-E48E-2CEA-B0154FA8F93C}"/>
+            </a:ext>
+          </a:extLst>
+        </p:cNvPr>
+        <p:cNvGrpSpPr/>
+        <p:nvPr/>
+      </p:nvGrpSpPr>
+      <p:grpSpPr>
+        <a:xfrm>
+          <a:off x="0" y="0"/>
+          <a:ext cx="0" cy="0"/>
+          <a:chOff x="0" y="0"/>
+          <a:chExt cx="0" cy="0"/>
+        </a:xfrm>
+      </p:grpSpPr>
+      <p:sp>
+        <p:nvSpPr>
+          <p:cNvPr id="2" name="Slide Image Placeholder 1">
+            <a:extLst>
+              <a:ext uri="{FF2B5EF4-FFF2-40B4-BE49-F238E27FC236}">
+                <a16:creationId xmlns:a16="http://schemas.microsoft.com/office/drawing/2014/main" id="{26F201D8-FD6B-DA7B-18FF-4C284774C121}"/>
+              </a:ext>
+            </a:extLst>
+          </p:cNvPr>
+          <p:cNvSpPr>
+            <a:spLocks noGrp="1" noRot="1" noChangeAspect="1"/>
+          </p:cNvSpPr>
+          <p:nvPr>
+            <p:ph type="sldImg"/>
+          </p:nvPr>
+        </p:nvSpPr>
+        <p:spPr/>
+      </p:sp>
+      <p:sp>
+        <p:nvSpPr>
+          <p:cNvPr id="3" name="Notes Placeholder 2">
+            <a:extLst>
+              <a:ext uri="{FF2B5EF4-FFF2-40B4-BE49-F238E27FC236}">
+                <a16:creationId xmlns:a16="http://schemas.microsoft.com/office/drawing/2014/main" id="{3FA6868F-131B-730B-2399-7984B7C30516}"/>
+              </a:ext>
+            </a:extLst>
+          </p:cNvPr>
+          <p:cNvSpPr>
+            <a:spLocks noGrp="1"/>
+          </p:cNvSpPr>
+          <p:nvPr>
+            <p:ph type="body" idx="1"/>
+          </p:nvPr>
+        </p:nvSpPr>
+        <p:spPr/>
+        <p:txBody>
+          <a:bodyPr/>
+          <a:lstStyle/>
+          <a:p>
+            <a:endParaRPr/>
+          </a:p>
+        </p:txBody>
+      </p:sp>
+      <p:sp>
+        <p:nvSpPr>
+          <p:cNvPr id="4" name="Slide Number Placeholder 3">
+            <a:extLst>
+              <a:ext uri="{FF2B5EF4-FFF2-40B4-BE49-F238E27FC236}">
+                <a16:creationId xmlns:a16="http://schemas.microsoft.com/office/drawing/2014/main" id="{024E4B7B-A0A5-E7B8-3582-7E1679973B0C}"/>
+              </a:ext>
+            </a:extLst>
+          </p:cNvPr>
+          <p:cNvSpPr>
+            <a:spLocks noGrp="1"/>
+          </p:cNvSpPr>
+          <p:nvPr>
+            <p:ph type="sldNum" idx="5"/>
+          </p:nvPr>
+        </p:nvSpPr>
+        <p:spPr/>
+        <p:txBody>
+          <a:bodyPr/>
+          <a:lstStyle/>
+          <a:p>
+            <a:endParaRPr/>
+          </a:p>
+        </p:txBody>
+      </p:sp>
+    </p:spTree>
+    <p:extLst>
+      <p:ext uri="{BB962C8B-B14F-4D97-AF65-F5344CB8AC3E}">
+        <p14:creationId xmlns:p14="http://schemas.microsoft.com/office/powerpoint/2010/main" val="3263676914"/>
+      </p:ext>
+    </p:extLst>
+  </p:cSld>
+  <p:clrMapOvr>
+    <a:masterClrMapping/>
+  </p:clrMapOvr>
+</p:notes>
+</file>
+
+<file path=ppt/notesSlides/notesSlide12.xml><?xml version="1.0" encoding="utf-8"?>
+<p:notes xmlns:a="http://schemas.openxmlformats.org/drawingml/2006/main" xmlns:r="http://schemas.openxmlformats.org/officeDocument/2006/relationships" xmlns:p="http://schemas.openxmlformats.org/presentationml/2006/main">
+  <p:cSld>
+    <p:spTree>
+      <p:nvGrpSpPr>
+        <p:cNvPr id="1" name="">
+          <a:extLst>
+            <a:ext uri="{FF2B5EF4-FFF2-40B4-BE49-F238E27FC236}">
+              <a16:creationId xmlns:a16="http://schemas.microsoft.com/office/drawing/2014/main" id="{6500C065-44F8-9DEA-8100-1C44A6A87CA9}"/>
+            </a:ext>
+          </a:extLst>
+        </p:cNvPr>
+        <p:cNvGrpSpPr/>
+        <p:nvPr/>
+      </p:nvGrpSpPr>
+      <p:grpSpPr>
+        <a:xfrm>
+          <a:off x="0" y="0"/>
+          <a:ext cx="0" cy="0"/>
+          <a:chOff x="0" y="0"/>
+          <a:chExt cx="0" cy="0"/>
+        </a:xfrm>
+      </p:grpSpPr>
+      <p:sp>
+        <p:nvSpPr>
+          <p:cNvPr id="2" name="Slide Image Placeholder 1">
+            <a:extLst>
+              <a:ext uri="{FF2B5EF4-FFF2-40B4-BE49-F238E27FC236}">
+                <a16:creationId xmlns:a16="http://schemas.microsoft.com/office/drawing/2014/main" id="{7A7E3E67-F938-4F96-DC6C-7AC9A2FAD5EB}"/>
+              </a:ext>
+            </a:extLst>
+          </p:cNvPr>
+          <p:cNvSpPr>
+            <a:spLocks noGrp="1" noRot="1" noChangeAspect="1"/>
+          </p:cNvSpPr>
+          <p:nvPr>
+            <p:ph type="sldImg"/>
+          </p:nvPr>
+        </p:nvSpPr>
+        <p:spPr/>
+      </p:sp>
+      <p:sp>
+        <p:nvSpPr>
+          <p:cNvPr id="3" name="Notes Placeholder 2">
+            <a:extLst>
+              <a:ext uri="{FF2B5EF4-FFF2-40B4-BE49-F238E27FC236}">
+                <a16:creationId xmlns:a16="http://schemas.microsoft.com/office/drawing/2014/main" id="{045CD8F8-4C26-1A0A-3CF9-24B9B5C0049C}"/>
+              </a:ext>
+            </a:extLst>
+          </p:cNvPr>
+          <p:cNvSpPr>
+            <a:spLocks noGrp="1"/>
+          </p:cNvSpPr>
+          <p:nvPr>
+            <p:ph type="body" idx="1"/>
+          </p:nvPr>
+        </p:nvSpPr>
+        <p:spPr/>
+        <p:txBody>
+          <a:bodyPr/>
+          <a:lstStyle/>
+          <a:p>
+            <a:endParaRPr/>
+          </a:p>
+        </p:txBody>
+      </p:sp>
+      <p:sp>
+        <p:nvSpPr>
+          <p:cNvPr id="4" name="Slide Number Placeholder 3">
+            <a:extLst>
+              <a:ext uri="{FF2B5EF4-FFF2-40B4-BE49-F238E27FC236}">
+                <a16:creationId xmlns:a16="http://schemas.microsoft.com/office/drawing/2014/main" id="{CBD34DA6-A1CC-8349-BD31-0F32BD81A506}"/>
+              </a:ext>
+            </a:extLst>
+          </p:cNvPr>
+          <p:cNvSpPr>
+            <a:spLocks noGrp="1"/>
+          </p:cNvSpPr>
+          <p:nvPr>
+            <p:ph type="sldNum" idx="5"/>
+          </p:nvPr>
+        </p:nvSpPr>
+        <p:spPr/>
+        <p:txBody>
+          <a:bodyPr/>
+          <a:lstStyle/>
+          <a:p>
+            <a:endParaRPr/>
+          </a:p>
+        </p:txBody>
+      </p:sp>
+    </p:spTree>
+    <p:extLst>
+      <p:ext uri="{BB962C8B-B14F-4D97-AF65-F5344CB8AC3E}">
+        <p14:creationId xmlns:p14="http://schemas.microsoft.com/office/powerpoint/2010/main" val="4035072332"/>
+      </p:ext>
+    </p:extLst>
+  </p:cSld>
+  <p:clrMapOvr>
+    <a:masterClrMapping/>
+  </p:clrMapOvr>
+</p:notes>
+</file>
+
+<file path=ppt/notesSlides/notesSlide13.xml><?xml version="1.0" encoding="utf-8"?>
+<p:notes xmlns:a="http://schemas.openxmlformats.org/drawingml/2006/main" xmlns:r="http://schemas.openxmlformats.org/officeDocument/2006/relationships" xmlns:p="http://schemas.openxmlformats.org/presentationml/2006/main">
+  <p:cSld>
+    <p:spTree>
+      <p:nvGrpSpPr>
+        <p:cNvPr id="1" name=""/>
+        <p:cNvGrpSpPr/>
+        <p:nvPr/>
+      </p:nvGrpSpPr>
+      <p:grpSpPr>
+        <a:xfrm>
+          <a:off x="0" y="0"/>
+          <a:ext cx="0" cy="0"/>
+          <a:chOff x="0" y="0"/>
+          <a:chExt cx="0" cy="0"/>
+        </a:xfrm>
+      </p:grpSpPr>
+      <p:sp>
+        <p:nvSpPr>
+          <p:cNvPr id="2" name="Slide Image Placeholder 1"/>
+          <p:cNvSpPr>
+            <a:spLocks noGrp="1" noRot="1" noChangeAspect="1"/>
+          </p:cNvSpPr>
+          <p:nvPr>
+            <p:ph type="sldImg"/>
+          </p:nvPr>
+        </p:nvSpPr>
+        <p:spPr/>
+      </p:sp>
+      <p:sp>
+        <p:nvSpPr>
+          <p:cNvPr id="3" name="Notes Placeholder 2"/>
+          <p:cNvSpPr>
+            <a:spLocks noGrp="1"/>
+          </p:cNvSpPr>
+          <p:nvPr>
+            <p:ph type="body" idx="1"/>
+          </p:nvPr>
+        </p:nvSpPr>
+        <p:spPr/>
+        <p:txBody>
+          <a:bodyPr/>
+          <a:lstStyle/>
+          <a:p>
+            <a:endParaRPr/>
+          </a:p>
+        </p:txBody>
+      </p:sp>
+      <p:sp>
+        <p:nvSpPr>
+          <p:cNvPr id="4" name="Slide Number Placeholder 3"/>
+          <p:cNvSpPr>
+            <a:spLocks noGrp="1"/>
+          </p:cNvSpPr>
+          <p:nvPr>
+            <p:ph type="sldNum" idx="5"/>
+          </p:nvPr>
+        </p:nvSpPr>
+        <p:spPr/>
+        <p:txBody>
+          <a:bodyPr/>
+          <a:lstStyle/>
+          <a:p>
+            <a:endParaRPr/>
+          </a:p>
+        </p:txBody>
+      </p:sp>
+    </p:spTree>
+  </p:cSld>
+  <p:clrMapOvr>
+    <a:masterClrMapping/>
+  </p:clrMapOvr>
+</p:notes>
+</file>
+
+<file path=ppt/notesSlides/notesSlide14.xml><?xml version="1.0" encoding="utf-8"?>
+<p:notes xmlns:a="http://schemas.openxmlformats.org/drawingml/2006/main" xmlns:r="http://schemas.openxmlformats.org/officeDocument/2006/relationships" xmlns:p="http://schemas.openxmlformats.org/presentationml/2006/main">
+  <p:cSld>
+    <p:spTree>
+      <p:nvGrpSpPr>
+        <p:cNvPr id="1" name="">
+          <a:extLst>
+            <a:ext uri="{FF2B5EF4-FFF2-40B4-BE49-F238E27FC236}">
+              <a16:creationId xmlns:a16="http://schemas.microsoft.com/office/drawing/2014/main" id="{16CE8ED0-11D0-2E19-10BD-D2E71593B1B1}"/>
+            </a:ext>
+          </a:extLst>
+        </p:cNvPr>
+        <p:cNvGrpSpPr/>
+        <p:nvPr/>
+      </p:nvGrpSpPr>
+      <p:grpSpPr>
+        <a:xfrm>
+          <a:off x="0" y="0"/>
+          <a:ext cx="0" cy="0"/>
+          <a:chOff x="0" y="0"/>
+          <a:chExt cx="0" cy="0"/>
+        </a:xfrm>
+      </p:grpSpPr>
+      <p:sp>
+        <p:nvSpPr>
+          <p:cNvPr id="2" name="Slide Image Placeholder 1">
+            <a:extLst>
+              <a:ext uri="{FF2B5EF4-FFF2-40B4-BE49-F238E27FC236}">
+                <a16:creationId xmlns:a16="http://schemas.microsoft.com/office/drawing/2014/main" id="{1B34C97C-A1F4-996F-16EB-F061D837837B}"/>
+              </a:ext>
+            </a:extLst>
+          </p:cNvPr>
+          <p:cNvSpPr>
+            <a:spLocks noGrp="1" noRot="1" noChangeAspect="1"/>
+          </p:cNvSpPr>
+          <p:nvPr>
+            <p:ph type="sldImg"/>
+          </p:nvPr>
+        </p:nvSpPr>
+        <p:spPr/>
+      </p:sp>
+      <p:sp>
+        <p:nvSpPr>
+          <p:cNvPr id="3" name="Notes Placeholder 2">
+            <a:extLst>
+              <a:ext uri="{FF2B5EF4-FFF2-40B4-BE49-F238E27FC236}">
+                <a16:creationId xmlns:a16="http://schemas.microsoft.com/office/drawing/2014/main" id="{9817FC8C-C73B-AF3E-72B8-0CD4AE19ADEA}"/>
+              </a:ext>
+            </a:extLst>
+          </p:cNvPr>
+          <p:cNvSpPr>
+            <a:spLocks noGrp="1"/>
+          </p:cNvSpPr>
+          <p:nvPr>
+            <p:ph type="body" idx="1"/>
+          </p:nvPr>
+        </p:nvSpPr>
+        <p:spPr/>
+        <p:txBody>
+          <a:bodyPr/>
+          <a:lstStyle/>
+          <a:p>
+            <a:endParaRPr/>
+          </a:p>
+        </p:txBody>
+      </p:sp>
+      <p:sp>
+        <p:nvSpPr>
+          <p:cNvPr id="4" name="Slide Number Placeholder 3">
+            <a:extLst>
+              <a:ext uri="{FF2B5EF4-FFF2-40B4-BE49-F238E27FC236}">
+                <a16:creationId xmlns:a16="http://schemas.microsoft.com/office/drawing/2014/main" id="{A86BAFAF-40A8-3D2D-7409-55DAD966B203}"/>
+              </a:ext>
+            </a:extLst>
+          </p:cNvPr>
+          <p:cNvSpPr>
+            <a:spLocks noGrp="1"/>
+          </p:cNvSpPr>
+          <p:nvPr>
+            <p:ph type="sldNum" idx="5"/>
+          </p:nvPr>
+        </p:nvSpPr>
+        <p:spPr/>
+        <p:txBody>
+          <a:bodyPr/>
+          <a:lstStyle/>
+          <a:p>
+            <a:endParaRPr/>
+          </a:p>
+        </p:txBody>
+      </p:sp>
+    </p:spTree>
+    <p:extLst>
+      <p:ext uri="{BB962C8B-B14F-4D97-AF65-F5344CB8AC3E}">
+        <p14:creationId xmlns:p14="http://schemas.microsoft.com/office/powerpoint/2010/main" val="875611239"/>
+      </p:ext>
+    </p:extLst>
+  </p:cSld>
+  <p:clrMapOvr>
+    <a:masterClrMapping/>
+  </p:clrMapOvr>
+</p:notes>
+</file>
+
 <file path=ppt/notesSlides/notesSlide2.xml><?xml version="1.0" encoding="utf-8"?>
 <p:notes xmlns:a="http://schemas.openxmlformats.org/drawingml/2006/main" xmlns:r="http://schemas.openxmlformats.org/officeDocument/2006/relationships" xmlns:p="http://schemas.openxmlformats.org/presentationml/2006/main">
   <p:cSld>
@@ -443,7 +1552,13 @@
   <p:cSld>
     <p:spTree>
       <p:nvGrpSpPr>
-        <p:cNvPr id="1" name=""/>
+        <p:cNvPr id="1" name="">
+          <a:extLst>
+            <a:ext uri="{FF2B5EF4-FFF2-40B4-BE49-F238E27FC236}">
+              <a16:creationId xmlns:a16="http://schemas.microsoft.com/office/drawing/2014/main" id="{B97638F9-1E10-2FBA-875B-B6493A00D895}"/>
+            </a:ext>
+          </a:extLst>
+        </p:cNvPr>
         <p:cNvGrpSpPr/>
         <p:nvPr/>
       </p:nvGrpSpPr>
@@ -457,7 +1572,13 @@
       </p:grpSpPr>
       <p:sp>
         <p:nvSpPr>
-          <p:cNvPr id="2" name="Slide Image Placeholder 1"/>
+          <p:cNvPr id="2" name="Slide Image Placeholder 1">
+            <a:extLst>
+              <a:ext uri="{FF2B5EF4-FFF2-40B4-BE49-F238E27FC236}">
+                <a16:creationId xmlns:a16="http://schemas.microsoft.com/office/drawing/2014/main" id="{B44F0C62-5609-C491-5F3D-5BD88F956843}"/>
+              </a:ext>
+            </a:extLst>
+          </p:cNvPr>
           <p:cNvSpPr>
             <a:spLocks noGrp="1" noRot="1" noChangeAspect="1"/>
           </p:cNvSpPr>
@@ -469,7 +1590,13 @@
       </p:sp>
       <p:sp>
         <p:nvSpPr>
-          <p:cNvPr id="3" name="Notes Placeholder 2"/>
+          <p:cNvPr id="3" name="Notes Placeholder 2">
+            <a:extLst>
+              <a:ext uri="{FF2B5EF4-FFF2-40B4-BE49-F238E27FC236}">
+                <a16:creationId xmlns:a16="http://schemas.microsoft.com/office/drawing/2014/main" id="{8A4DD51A-8352-28E6-2D44-F92D58E29A1E}"/>
+              </a:ext>
+            </a:extLst>
+          </p:cNvPr>
           <p:cNvSpPr>
             <a:spLocks noGrp="1"/>
           </p:cNvSpPr>
@@ -488,7 +1615,13 @@
       </p:sp>
       <p:sp>
         <p:nvSpPr>
-          <p:cNvPr id="4" name="Slide Number Placeholder 3"/>
+          <p:cNvPr id="4" name="Slide Number Placeholder 3">
+            <a:extLst>
+              <a:ext uri="{FF2B5EF4-FFF2-40B4-BE49-F238E27FC236}">
+                <a16:creationId xmlns:a16="http://schemas.microsoft.com/office/drawing/2014/main" id="{7A69318E-64F1-3305-34D5-76B06DEFD14E}"/>
+              </a:ext>
+            </a:extLst>
+          </p:cNvPr>
           <p:cNvSpPr>
             <a:spLocks noGrp="1"/>
           </p:cNvSpPr>
@@ -506,6 +1639,11 @@
         </p:txBody>
       </p:sp>
     </p:spTree>
+    <p:extLst>
+      <p:ext uri="{BB962C8B-B14F-4D97-AF65-F5344CB8AC3E}">
+        <p14:creationId xmlns:p14="http://schemas.microsoft.com/office/powerpoint/2010/main" val="101118642"/>
+      </p:ext>
+    </p:extLst>
   </p:cSld>
   <p:clrMapOvr>
     <a:masterClrMapping/>
@@ -521,7 +1659,7 @@
         <p:cNvPr id="1" name="">
           <a:extLst>
             <a:ext uri="{FF2B5EF4-FFF2-40B4-BE49-F238E27FC236}">
-              <a16:creationId xmlns:a16="http://schemas.microsoft.com/office/drawing/2014/main" id="{C60CC8AD-0F05-4F19-E966-66B4E0C8E236}"/>
+              <a16:creationId xmlns:a16="http://schemas.microsoft.com/office/drawing/2014/main" id="{AC1FC95A-ADA4-ACE3-60DC-DE7B3FCB5DFF}"/>
             </a:ext>
           </a:extLst>
         </p:cNvPr>
@@ -541,7 +1679,7 @@
           <p:cNvPr id="2" name="Slide Image Placeholder 1">
             <a:extLst>
               <a:ext uri="{FF2B5EF4-FFF2-40B4-BE49-F238E27FC236}">
-                <a16:creationId xmlns:a16="http://schemas.microsoft.com/office/drawing/2014/main" id="{6E328950-3379-9CA8-A075-DA849BD5F80E}"/>
+                <a16:creationId xmlns:a16="http://schemas.microsoft.com/office/drawing/2014/main" id="{3B02B6C7-03AA-4F0B-9F11-ED229398F575}"/>
               </a:ext>
             </a:extLst>
           </p:cNvPr>
@@ -559,7 +1697,7 @@
           <p:cNvPr id="3" name="Notes Placeholder 2">
             <a:extLst>
               <a:ext uri="{FF2B5EF4-FFF2-40B4-BE49-F238E27FC236}">
-                <a16:creationId xmlns:a16="http://schemas.microsoft.com/office/drawing/2014/main" id="{C17C728E-5E5B-3C4E-1FB6-1D1D6CFC1B40}"/>
+                <a16:creationId xmlns:a16="http://schemas.microsoft.com/office/drawing/2014/main" id="{CB6A1325-878C-2517-94DE-0B2D730B407D}"/>
               </a:ext>
             </a:extLst>
           </p:cNvPr>
@@ -584,7 +1722,7 @@
           <p:cNvPr id="4" name="Slide Number Placeholder 3">
             <a:extLst>
               <a:ext uri="{FF2B5EF4-FFF2-40B4-BE49-F238E27FC236}">
-                <a16:creationId xmlns:a16="http://schemas.microsoft.com/office/drawing/2014/main" id="{FBBAC7A7-3F39-0D57-C2AA-269CFD96EC6A}"/>
+                <a16:creationId xmlns:a16="http://schemas.microsoft.com/office/drawing/2014/main" id="{28C3C8A5-736F-566D-E22B-8401BC5D636E}"/>
               </a:ext>
             </a:extLst>
           </p:cNvPr>
@@ -607,7 +1745,7 @@
     </p:spTree>
     <p:extLst>
       <p:ext uri="{BB962C8B-B14F-4D97-AF65-F5344CB8AC3E}">
-        <p14:creationId xmlns:p14="http://schemas.microsoft.com/office/powerpoint/2010/main" val="1249793524"/>
+        <p14:creationId xmlns:p14="http://schemas.microsoft.com/office/powerpoint/2010/main" val="1469011017"/>
       </p:ext>
     </p:extLst>
   </p:cSld>
@@ -729,7 +1867,7 @@
         <p:cNvPr id="1" name="">
           <a:extLst>
             <a:ext uri="{FF2B5EF4-FFF2-40B4-BE49-F238E27FC236}">
-              <a16:creationId xmlns:a16="http://schemas.microsoft.com/office/drawing/2014/main" id="{E142A31B-C301-ED72-703C-A0499C8DD89F}"/>
+              <a16:creationId xmlns:a16="http://schemas.microsoft.com/office/drawing/2014/main" id="{36D3FCF7-5E40-A165-BB66-308D18AB8B64}"/>
             </a:ext>
           </a:extLst>
         </p:cNvPr>
@@ -749,7 +1887,7 @@
           <p:cNvPr id="2" name="Slide Image Placeholder 1">
             <a:extLst>
               <a:ext uri="{FF2B5EF4-FFF2-40B4-BE49-F238E27FC236}">
-                <a16:creationId xmlns:a16="http://schemas.microsoft.com/office/drawing/2014/main" id="{DD77FD42-2845-6950-D971-C3188F876BAF}"/>
+                <a16:creationId xmlns:a16="http://schemas.microsoft.com/office/drawing/2014/main" id="{C01AA8B9-29C4-09A2-E506-6282A24C2DDA}"/>
               </a:ext>
             </a:extLst>
           </p:cNvPr>
@@ -767,7 +1905,7 @@
           <p:cNvPr id="3" name="Notes Placeholder 2">
             <a:extLst>
               <a:ext uri="{FF2B5EF4-FFF2-40B4-BE49-F238E27FC236}">
-                <a16:creationId xmlns:a16="http://schemas.microsoft.com/office/drawing/2014/main" id="{14286069-601D-C2E3-5730-015D7CFBED96}"/>
+                <a16:creationId xmlns:a16="http://schemas.microsoft.com/office/drawing/2014/main" id="{8F292949-9241-F337-DEAB-CC9C1990893D}"/>
               </a:ext>
             </a:extLst>
           </p:cNvPr>
@@ -792,7 +1930,7 @@
           <p:cNvPr id="4" name="Slide Number Placeholder 3">
             <a:extLst>
               <a:ext uri="{FF2B5EF4-FFF2-40B4-BE49-F238E27FC236}">
-                <a16:creationId xmlns:a16="http://schemas.microsoft.com/office/drawing/2014/main" id="{0D55C6A5-4B5E-435E-91CC-853E474D59C6}"/>
+                <a16:creationId xmlns:a16="http://schemas.microsoft.com/office/drawing/2014/main" id="{8BC1E196-F889-AA09-2B83-5C7F52C855D0}"/>
               </a:ext>
             </a:extLst>
           </p:cNvPr>
@@ -815,7 +1953,7 @@
     </p:spTree>
     <p:extLst>
       <p:ext uri="{BB962C8B-B14F-4D97-AF65-F5344CB8AC3E}">
-        <p14:creationId xmlns:p14="http://schemas.microsoft.com/office/powerpoint/2010/main" val="1426029106"/>
+        <p14:creationId xmlns:p14="http://schemas.microsoft.com/office/powerpoint/2010/main" val="1778825611"/>
       </p:ext>
     </p:extLst>
   </p:cSld>
@@ -826,6 +1964,214 @@
 </file>
 
 <file path=ppt/notesSlides/notesSlide7.xml><?xml version="1.0" encoding="utf-8"?>
+<p:notes xmlns:a="http://schemas.openxmlformats.org/drawingml/2006/main" xmlns:r="http://schemas.openxmlformats.org/officeDocument/2006/relationships" xmlns:p="http://schemas.openxmlformats.org/presentationml/2006/main">
+  <p:cSld>
+    <p:spTree>
+      <p:nvGrpSpPr>
+        <p:cNvPr id="1" name="">
+          <a:extLst>
+            <a:ext uri="{FF2B5EF4-FFF2-40B4-BE49-F238E27FC236}">
+              <a16:creationId xmlns:a16="http://schemas.microsoft.com/office/drawing/2014/main" id="{C60CC8AD-0F05-4F19-E966-66B4E0C8E236}"/>
+            </a:ext>
+          </a:extLst>
+        </p:cNvPr>
+        <p:cNvGrpSpPr/>
+        <p:nvPr/>
+      </p:nvGrpSpPr>
+      <p:grpSpPr>
+        <a:xfrm>
+          <a:off x="0" y="0"/>
+          <a:ext cx="0" cy="0"/>
+          <a:chOff x="0" y="0"/>
+          <a:chExt cx="0" cy="0"/>
+        </a:xfrm>
+      </p:grpSpPr>
+      <p:sp>
+        <p:nvSpPr>
+          <p:cNvPr id="2" name="Slide Image Placeholder 1">
+            <a:extLst>
+              <a:ext uri="{FF2B5EF4-FFF2-40B4-BE49-F238E27FC236}">
+                <a16:creationId xmlns:a16="http://schemas.microsoft.com/office/drawing/2014/main" id="{6E328950-3379-9CA8-A075-DA849BD5F80E}"/>
+              </a:ext>
+            </a:extLst>
+          </p:cNvPr>
+          <p:cNvSpPr>
+            <a:spLocks noGrp="1" noRot="1" noChangeAspect="1"/>
+          </p:cNvSpPr>
+          <p:nvPr>
+            <p:ph type="sldImg"/>
+          </p:nvPr>
+        </p:nvSpPr>
+        <p:spPr/>
+      </p:sp>
+      <p:sp>
+        <p:nvSpPr>
+          <p:cNvPr id="3" name="Notes Placeholder 2">
+            <a:extLst>
+              <a:ext uri="{FF2B5EF4-FFF2-40B4-BE49-F238E27FC236}">
+                <a16:creationId xmlns:a16="http://schemas.microsoft.com/office/drawing/2014/main" id="{C17C728E-5E5B-3C4E-1FB6-1D1D6CFC1B40}"/>
+              </a:ext>
+            </a:extLst>
+          </p:cNvPr>
+          <p:cNvSpPr>
+            <a:spLocks noGrp="1"/>
+          </p:cNvSpPr>
+          <p:nvPr>
+            <p:ph type="body" idx="1"/>
+          </p:nvPr>
+        </p:nvSpPr>
+        <p:spPr/>
+        <p:txBody>
+          <a:bodyPr/>
+          <a:lstStyle/>
+          <a:p>
+            <a:endParaRPr/>
+          </a:p>
+        </p:txBody>
+      </p:sp>
+      <p:sp>
+        <p:nvSpPr>
+          <p:cNvPr id="4" name="Slide Number Placeholder 3">
+            <a:extLst>
+              <a:ext uri="{FF2B5EF4-FFF2-40B4-BE49-F238E27FC236}">
+                <a16:creationId xmlns:a16="http://schemas.microsoft.com/office/drawing/2014/main" id="{FBBAC7A7-3F39-0D57-C2AA-269CFD96EC6A}"/>
+              </a:ext>
+            </a:extLst>
+          </p:cNvPr>
+          <p:cNvSpPr>
+            <a:spLocks noGrp="1"/>
+          </p:cNvSpPr>
+          <p:nvPr>
+            <p:ph type="sldNum" idx="5"/>
+          </p:nvPr>
+        </p:nvSpPr>
+        <p:spPr/>
+        <p:txBody>
+          <a:bodyPr/>
+          <a:lstStyle/>
+          <a:p>
+            <a:endParaRPr/>
+          </a:p>
+        </p:txBody>
+      </p:sp>
+    </p:spTree>
+    <p:extLst>
+      <p:ext uri="{BB962C8B-B14F-4D97-AF65-F5344CB8AC3E}">
+        <p14:creationId xmlns:p14="http://schemas.microsoft.com/office/powerpoint/2010/main" val="1249793524"/>
+      </p:ext>
+    </p:extLst>
+  </p:cSld>
+  <p:clrMapOvr>
+    <a:masterClrMapping/>
+  </p:clrMapOvr>
+</p:notes>
+</file>
+
+<file path=ppt/notesSlides/notesSlide8.xml><?xml version="1.0" encoding="utf-8"?>
+<p:notes xmlns:a="http://schemas.openxmlformats.org/drawingml/2006/main" xmlns:r="http://schemas.openxmlformats.org/officeDocument/2006/relationships" xmlns:p="http://schemas.openxmlformats.org/presentationml/2006/main">
+  <p:cSld>
+    <p:spTree>
+      <p:nvGrpSpPr>
+        <p:cNvPr id="1" name="">
+          <a:extLst>
+            <a:ext uri="{FF2B5EF4-FFF2-40B4-BE49-F238E27FC236}">
+              <a16:creationId xmlns:a16="http://schemas.microsoft.com/office/drawing/2014/main" id="{CFAABF25-BD7E-58DD-8A32-343577D8C693}"/>
+            </a:ext>
+          </a:extLst>
+        </p:cNvPr>
+        <p:cNvGrpSpPr/>
+        <p:nvPr/>
+      </p:nvGrpSpPr>
+      <p:grpSpPr>
+        <a:xfrm>
+          <a:off x="0" y="0"/>
+          <a:ext cx="0" cy="0"/>
+          <a:chOff x="0" y="0"/>
+          <a:chExt cx="0" cy="0"/>
+        </a:xfrm>
+      </p:grpSpPr>
+      <p:sp>
+        <p:nvSpPr>
+          <p:cNvPr id="2" name="Slide Image Placeholder 1">
+            <a:extLst>
+              <a:ext uri="{FF2B5EF4-FFF2-40B4-BE49-F238E27FC236}">
+                <a16:creationId xmlns:a16="http://schemas.microsoft.com/office/drawing/2014/main" id="{5C0721A9-193E-8ED0-52F6-62CE0C6D195B}"/>
+              </a:ext>
+            </a:extLst>
+          </p:cNvPr>
+          <p:cNvSpPr>
+            <a:spLocks noGrp="1" noRot="1" noChangeAspect="1"/>
+          </p:cNvSpPr>
+          <p:nvPr>
+            <p:ph type="sldImg"/>
+          </p:nvPr>
+        </p:nvSpPr>
+        <p:spPr/>
+      </p:sp>
+      <p:sp>
+        <p:nvSpPr>
+          <p:cNvPr id="3" name="Notes Placeholder 2">
+            <a:extLst>
+              <a:ext uri="{FF2B5EF4-FFF2-40B4-BE49-F238E27FC236}">
+                <a16:creationId xmlns:a16="http://schemas.microsoft.com/office/drawing/2014/main" id="{E64E3209-6EEC-7863-3BDE-D84250D39599}"/>
+              </a:ext>
+            </a:extLst>
+          </p:cNvPr>
+          <p:cNvSpPr>
+            <a:spLocks noGrp="1"/>
+          </p:cNvSpPr>
+          <p:nvPr>
+            <p:ph type="body" idx="1"/>
+          </p:nvPr>
+        </p:nvSpPr>
+        <p:spPr/>
+        <p:txBody>
+          <a:bodyPr/>
+          <a:lstStyle/>
+          <a:p>
+            <a:endParaRPr/>
+          </a:p>
+        </p:txBody>
+      </p:sp>
+      <p:sp>
+        <p:nvSpPr>
+          <p:cNvPr id="4" name="Slide Number Placeholder 3">
+            <a:extLst>
+              <a:ext uri="{FF2B5EF4-FFF2-40B4-BE49-F238E27FC236}">
+                <a16:creationId xmlns:a16="http://schemas.microsoft.com/office/drawing/2014/main" id="{10E24DA4-419F-5304-9164-66A97450C41A}"/>
+              </a:ext>
+            </a:extLst>
+          </p:cNvPr>
+          <p:cNvSpPr>
+            <a:spLocks noGrp="1"/>
+          </p:cNvSpPr>
+          <p:nvPr>
+            <p:ph type="sldNum" idx="5"/>
+          </p:nvPr>
+        </p:nvSpPr>
+        <p:spPr/>
+        <p:txBody>
+          <a:bodyPr/>
+          <a:lstStyle/>
+          <a:p>
+            <a:endParaRPr/>
+          </a:p>
+        </p:txBody>
+      </p:sp>
+    </p:spTree>
+    <p:extLst>
+      <p:ext uri="{BB962C8B-B14F-4D97-AF65-F5344CB8AC3E}">
+        <p14:creationId xmlns:p14="http://schemas.microsoft.com/office/powerpoint/2010/main" val="2509395271"/>
+      </p:ext>
+    </p:extLst>
+  </p:cSld>
+  <p:clrMapOvr>
+    <a:masterClrMapping/>
+  </p:clrMapOvr>
+</p:notes>
+</file>
+
+<file path=ppt/notesSlides/notesSlide9.xml><?xml version="1.0" encoding="utf-8"?>
 <p:notes xmlns:a="http://schemas.openxmlformats.org/drawingml/2006/main" xmlns:r="http://schemas.openxmlformats.org/officeDocument/2006/relationships" xmlns:p="http://schemas.openxmlformats.org/presentationml/2006/main">
   <p:cSld>
     <p:spTree>
@@ -920,110 +2266,6 @@
     <p:extLst>
       <p:ext uri="{BB962C8B-B14F-4D97-AF65-F5344CB8AC3E}">
         <p14:creationId xmlns:p14="http://schemas.microsoft.com/office/powerpoint/2010/main" val="2515234085"/>
-      </p:ext>
-    </p:extLst>
-  </p:cSld>
-  <p:clrMapOvr>
-    <a:masterClrMapping/>
-  </p:clrMapOvr>
-</p:notes>
-</file>
-
-<file path=ppt/notesSlides/notesSlide8.xml><?xml version="1.0" encoding="utf-8"?>
-<p:notes xmlns:a="http://schemas.openxmlformats.org/drawingml/2006/main" xmlns:r="http://schemas.openxmlformats.org/officeDocument/2006/relationships" xmlns:p="http://schemas.openxmlformats.org/presentationml/2006/main">
-  <p:cSld>
-    <p:spTree>
-      <p:nvGrpSpPr>
-        <p:cNvPr id="1" name="">
-          <a:extLst>
-            <a:ext uri="{FF2B5EF4-FFF2-40B4-BE49-F238E27FC236}">
-              <a16:creationId xmlns:a16="http://schemas.microsoft.com/office/drawing/2014/main" id="{6500C065-44F8-9DEA-8100-1C44A6A87CA9}"/>
-            </a:ext>
-          </a:extLst>
-        </p:cNvPr>
-        <p:cNvGrpSpPr/>
-        <p:nvPr/>
-      </p:nvGrpSpPr>
-      <p:grpSpPr>
-        <a:xfrm>
-          <a:off x="0" y="0"/>
-          <a:ext cx="0" cy="0"/>
-          <a:chOff x="0" y="0"/>
-          <a:chExt cx="0" cy="0"/>
-        </a:xfrm>
-      </p:grpSpPr>
-      <p:sp>
-        <p:nvSpPr>
-          <p:cNvPr id="2" name="Slide Image Placeholder 1">
-            <a:extLst>
-              <a:ext uri="{FF2B5EF4-FFF2-40B4-BE49-F238E27FC236}">
-                <a16:creationId xmlns:a16="http://schemas.microsoft.com/office/drawing/2014/main" id="{7A7E3E67-F938-4F96-DC6C-7AC9A2FAD5EB}"/>
-              </a:ext>
-            </a:extLst>
-          </p:cNvPr>
-          <p:cNvSpPr>
-            <a:spLocks noGrp="1" noRot="1" noChangeAspect="1"/>
-          </p:cNvSpPr>
-          <p:nvPr>
-            <p:ph type="sldImg"/>
-          </p:nvPr>
-        </p:nvSpPr>
-        <p:spPr/>
-      </p:sp>
-      <p:sp>
-        <p:nvSpPr>
-          <p:cNvPr id="3" name="Notes Placeholder 2">
-            <a:extLst>
-              <a:ext uri="{FF2B5EF4-FFF2-40B4-BE49-F238E27FC236}">
-                <a16:creationId xmlns:a16="http://schemas.microsoft.com/office/drawing/2014/main" id="{045CD8F8-4C26-1A0A-3CF9-24B9B5C0049C}"/>
-              </a:ext>
-            </a:extLst>
-          </p:cNvPr>
-          <p:cNvSpPr>
-            <a:spLocks noGrp="1"/>
-          </p:cNvSpPr>
-          <p:nvPr>
-            <p:ph type="body" idx="1"/>
-          </p:nvPr>
-        </p:nvSpPr>
-        <p:spPr/>
-        <p:txBody>
-          <a:bodyPr/>
-          <a:lstStyle/>
-          <a:p>
-            <a:endParaRPr/>
-          </a:p>
-        </p:txBody>
-      </p:sp>
-      <p:sp>
-        <p:nvSpPr>
-          <p:cNvPr id="4" name="Slide Number Placeholder 3">
-            <a:extLst>
-              <a:ext uri="{FF2B5EF4-FFF2-40B4-BE49-F238E27FC236}">
-                <a16:creationId xmlns:a16="http://schemas.microsoft.com/office/drawing/2014/main" id="{CBD34DA6-A1CC-8349-BD31-0F32BD81A506}"/>
-              </a:ext>
-            </a:extLst>
-          </p:cNvPr>
-          <p:cNvSpPr>
-            <a:spLocks noGrp="1"/>
-          </p:cNvSpPr>
-          <p:nvPr>
-            <p:ph type="sldNum" idx="5"/>
-          </p:nvPr>
-        </p:nvSpPr>
-        <p:spPr/>
-        <p:txBody>
-          <a:bodyPr/>
-          <a:lstStyle/>
-          <a:p>
-            <a:endParaRPr/>
-          </a:p>
-        </p:txBody>
-      </p:sp>
-    </p:spTree>
-    <p:extLst>
-      <p:ext uri="{BB962C8B-B14F-4D97-AF65-F5344CB8AC3E}">
-        <p14:creationId xmlns:p14="http://schemas.microsoft.com/office/powerpoint/2010/main" val="4035072332"/>
       </p:ext>
     </p:extLst>
   </p:cSld>
@@ -1750,6 +2992,2595 @@
 </p:sld>
 </file>
 
+<file path=ppt/slides/slide10.xml><?xml version="1.0" encoding="utf-8"?>
+<p:sld xmlns:a="http://schemas.openxmlformats.org/drawingml/2006/main" xmlns:r="http://schemas.openxmlformats.org/officeDocument/2006/relationships" xmlns:p="http://schemas.openxmlformats.org/presentationml/2006/main">
+  <p:cSld>
+    <p:spTree>
+      <p:nvGrpSpPr>
+        <p:cNvPr id="1" name="">
+          <a:extLst>
+            <a:ext uri="{FF2B5EF4-FFF2-40B4-BE49-F238E27FC236}">
+              <a16:creationId xmlns:a16="http://schemas.microsoft.com/office/drawing/2014/main" id="{40E961D3-D39E-515B-1BF6-9DF8A0B8DBD9}"/>
+            </a:ext>
+          </a:extLst>
+        </p:cNvPr>
+        <p:cNvGrpSpPr/>
+        <p:nvPr/>
+      </p:nvGrpSpPr>
+      <p:grpSpPr>
+        <a:xfrm>
+          <a:off x="0" y="0"/>
+          <a:ext cx="0" cy="0"/>
+          <a:chOff x="0" y="0"/>
+          <a:chExt cx="0" cy="0"/>
+        </a:xfrm>
+      </p:grpSpPr>
+      <p:sp>
+        <p:nvSpPr>
+          <p:cNvPr id="21" name="Rectangle 20">
+            <a:extLst>
+              <a:ext uri="{FF2B5EF4-FFF2-40B4-BE49-F238E27FC236}">
+                <a16:creationId xmlns:a16="http://schemas.microsoft.com/office/drawing/2014/main" id="{B47D766D-4693-A90F-E5E4-895F6F4AF28D}"/>
+              </a:ext>
+            </a:extLst>
+          </p:cNvPr>
+          <p:cNvSpPr>
+            <a:spLocks noGrp="1"/>
+          </p:cNvSpPr>
+          <p:nvPr/>
+        </p:nvSpPr>
+        <p:spPr>
+          <a:xfrm>
+            <a:off x="400050" y="276225"/>
+            <a:ext cx="4953000" cy="209550"/>
+          </a:xfrm>
+          <a:prstGeom prst="rect">
+            <a:avLst/>
+          </a:prstGeom>
+        </p:spPr>
+        <p:txBody>
+          <a:bodyPr wrap="square" lIns="0" tIns="0" rIns="0" bIns="0" anchor="t">
+            <a:normAutofit/>
+          </a:bodyPr>
+          <a:lstStyle/>
+          <a:p>
+            <a:pPr algn="l">
+              <a:defRPr sz="975" b="1">
+                <a:solidFill>
+                  <a:srgbClr val="D9232E"/>
+                </a:solidFill>
+                <a:latin typeface="Arial"/>
+                <a:ea typeface="Arial"/>
+                <a:cs typeface="Arial"/>
+              </a:defRPr>
+            </a:pPr>
+            <a:r>
+              <a:t>CAPITAL BIKESHARE OPERATIONS</a:t>
+            </a:r>
+          </a:p>
+        </p:txBody>
+      </p:sp>
+      <p:sp>
+        <p:nvSpPr>
+          <p:cNvPr id="2" name="Rectangle 1">
+            <a:extLst>
+              <a:ext uri="{FF2B5EF4-FFF2-40B4-BE49-F238E27FC236}">
+                <a16:creationId xmlns:a16="http://schemas.microsoft.com/office/drawing/2014/main" id="{0B09D8E6-4727-4569-FF6E-2441FFA32F87}"/>
+              </a:ext>
+            </a:extLst>
+          </p:cNvPr>
+          <p:cNvSpPr>
+            <a:spLocks noGrp="1"/>
+          </p:cNvSpPr>
+          <p:nvPr/>
+        </p:nvSpPr>
+        <p:spPr>
+          <a:xfrm>
+            <a:off x="400050" y="581025"/>
+            <a:ext cx="11391900" cy="628650"/>
+          </a:xfrm>
+          <a:prstGeom prst="rect">
+            <a:avLst/>
+          </a:prstGeom>
+        </p:spPr>
+        <p:txBody>
+          <a:bodyPr wrap="square" lIns="0" tIns="0" rIns="0" bIns="0" anchor="t">
+            <a:normAutofit/>
+          </a:bodyPr>
+          <a:lstStyle/>
+          <a:p>
+            <a:pPr>
+              <a:defRPr sz="3000" b="1">
+                <a:solidFill>
+                  <a:srgbClr val="15191D"/>
+                </a:solidFill>
+                <a:latin typeface="Arial"/>
+                <a:ea typeface="Arial"/>
+                <a:cs typeface="Arial"/>
+              </a:defRPr>
+            </a:pPr>
+            <a:r>
+              <a:rPr lang="en-US" sz="3000" b="1" dirty="0">
+                <a:solidFill>
+                  <a:srgbClr val="15191D"/>
+                </a:solidFill>
+                <a:latin typeface="Arial"/>
+              </a:rPr>
+              <a:t>Kafka Implementation: Real-Time Alert Processing</a:t>
+            </a:r>
+            <a:r>
+              <a:rPr lang="en-US" dirty="0"/>
+              <a:t> </a:t>
+            </a:r>
+            <a:endParaRPr dirty="0"/>
+          </a:p>
+        </p:txBody>
+      </p:sp>
+      <p:cxnSp>
+        <p:nvCxnSpPr>
+          <p:cNvPr id="23" name="Straight Arrow Connector 22">
+            <a:extLst>
+              <a:ext uri="{FF2B5EF4-FFF2-40B4-BE49-F238E27FC236}">
+                <a16:creationId xmlns:a16="http://schemas.microsoft.com/office/drawing/2014/main" id="{7A5D8983-929D-DD3F-4767-F8BFBEB94195}"/>
+              </a:ext>
+            </a:extLst>
+          </p:cNvPr>
+          <p:cNvCxnSpPr/>
+          <p:nvPr/>
+        </p:nvCxnSpPr>
+        <p:spPr>
+          <a:xfrm>
+            <a:off x="400050" y="1304925"/>
+            <a:ext cx="11391900" cy="9525"/>
+          </a:xfrm>
+          <a:prstGeom prst="straightConnector1">
+            <a:avLst/>
+          </a:prstGeom>
+          <a:ln w="9525">
+            <a:solidFill>
+              <a:srgbClr val="C9CED2"/>
+            </a:solidFill>
+            <a:prstDash val="solid"/>
+          </a:ln>
+        </p:spPr>
+      </p:cxnSp>
+      <p:graphicFrame>
+        <p:nvGraphicFramePr>
+          <p:cNvPr id="3" name="Table 2">
+            <a:extLst>
+              <a:ext uri="{FF2B5EF4-FFF2-40B4-BE49-F238E27FC236}">
+                <a16:creationId xmlns:a16="http://schemas.microsoft.com/office/drawing/2014/main" id="{AED74D8A-B90B-8B9E-795F-E2147BD37B0B}"/>
+              </a:ext>
+            </a:extLst>
+          </p:cNvPr>
+          <p:cNvGraphicFramePr>
+            <a:graphicFrameLocks noGrp="1"/>
+          </p:cNvGraphicFramePr>
+          <p:nvPr>
+            <p:extLst>
+              <p:ext uri="{D42A27DB-BD31-4B8C-83A1-F6EECF244321}">
+                <p14:modId xmlns:p14="http://schemas.microsoft.com/office/powerpoint/2010/main" val="2471682743"/>
+              </p:ext>
+            </p:extLst>
+          </p:nvPr>
+        </p:nvGraphicFramePr>
+        <p:xfrm>
+          <a:off x="1337733" y="1419227"/>
+          <a:ext cx="8966199" cy="5196894"/>
+        </p:xfrm>
+        <a:graphic>
+          <a:graphicData uri="http://schemas.openxmlformats.org/drawingml/2006/table">
+            <a:tbl>
+              <a:tblPr>
+                <a:tableStyleId>{5C22544A-7EE6-4342-B048-85BDC9FD1C3A}</a:tableStyleId>
+              </a:tblPr>
+              <a:tblGrid>
+                <a:gridCol w="1693334">
+                  <a:extLst>
+                    <a:ext uri="{9D8B030D-6E8A-4147-A177-3AD203B41FA5}">
+                      <a16:colId xmlns:a16="http://schemas.microsoft.com/office/drawing/2014/main" val="1632147508"/>
+                    </a:ext>
+                  </a:extLst>
+                </a:gridCol>
+                <a:gridCol w="4284132">
+                  <a:extLst>
+                    <a:ext uri="{9D8B030D-6E8A-4147-A177-3AD203B41FA5}">
+                      <a16:colId xmlns:a16="http://schemas.microsoft.com/office/drawing/2014/main" val="1009953726"/>
+                    </a:ext>
+                  </a:extLst>
+                </a:gridCol>
+                <a:gridCol w="2988733">
+                  <a:extLst>
+                    <a:ext uri="{9D8B030D-6E8A-4147-A177-3AD203B41FA5}">
+                      <a16:colId xmlns:a16="http://schemas.microsoft.com/office/drawing/2014/main" val="455490219"/>
+                    </a:ext>
+                  </a:extLst>
+                </a:gridCol>
+              </a:tblGrid>
+              <a:tr h="147229">
+                <a:tc>
+                  <a:txBody>
+                    <a:bodyPr/>
+                    <a:lstStyle/>
+                    <a:p>
+                      <a:pPr>
+                        <a:buNone/>
+                      </a:pPr>
+                      <a:r>
+                        <a:rPr lang="en-US" sz="1050"/>
+                        <a:t>Implementation</a:t>
+                      </a:r>
+                    </a:p>
+                  </a:txBody>
+                  <a:tcPr marL="31081" marR="31081" marT="15540" marB="15540" anchor="ctr"/>
+                </a:tc>
+                <a:tc>
+                  <a:txBody>
+                    <a:bodyPr/>
+                    <a:lstStyle/>
+                    <a:p>
+                      <a:pPr>
+                        <a:buNone/>
+                      </a:pPr>
+                      <a:r>
+                        <a:rPr lang="en-US" sz="1050"/>
+                        <a:t>What was done</a:t>
+                      </a:r>
+                    </a:p>
+                  </a:txBody>
+                  <a:tcPr marL="31081" marR="31081" marT="15540" marB="15540" anchor="ctr"/>
+                </a:tc>
+                <a:tc>
+                  <a:txBody>
+                    <a:bodyPr/>
+                    <a:lstStyle/>
+                    <a:p>
+                      <a:pPr>
+                        <a:buNone/>
+                      </a:pPr>
+                      <a:r>
+                        <a:rPr lang="en-US" sz="1050"/>
+                        <a:t>Code location</a:t>
+                      </a:r>
+                    </a:p>
+                  </a:txBody>
+                  <a:tcPr marL="31081" marR="31081" marT="15540" marB="15540" anchor="ctr"/>
+                </a:tc>
+                <a:extLst>
+                  <a:ext uri="{0D108BD9-81ED-4DB2-BD59-A6C34878D82A}">
+                    <a16:rowId xmlns:a16="http://schemas.microsoft.com/office/drawing/2014/main" val="2481255386"/>
+                  </a:ext>
+                </a:extLst>
+              </a:tr>
+              <a:tr h="368073">
+                <a:tc>
+                  <a:txBody>
+                    <a:bodyPr/>
+                    <a:lstStyle/>
+                    <a:p>
+                      <a:pPr>
+                        <a:buNone/>
+                      </a:pPr>
+                      <a:r>
+                        <a:rPr lang="en-US" sz="1050"/>
+                        <a:t>Kafka broker</a:t>
+                      </a:r>
+                    </a:p>
+                  </a:txBody>
+                  <a:tcPr marL="31081" marR="31081" marT="15540" marB="15540" anchor="ctr"/>
+                </a:tc>
+                <a:tc>
+                  <a:txBody>
+                    <a:bodyPr/>
+                    <a:lstStyle/>
+                    <a:p>
+                      <a:pPr>
+                        <a:buNone/>
+                      </a:pPr>
+                      <a:r>
+                        <a:rPr lang="en-US" sz="1050" dirty="0"/>
+                        <a:t>Configured a single Apache Kafka broker using </a:t>
+                      </a:r>
+                      <a:r>
+                        <a:rPr lang="en-US" sz="1050" dirty="0" err="1"/>
+                        <a:t>KRaft</a:t>
+                      </a:r>
+                      <a:r>
+                        <a:rPr lang="en-US" sz="1050" dirty="0"/>
+                        <a:t> mode.</a:t>
+                      </a:r>
+                    </a:p>
+                  </a:txBody>
+                  <a:tcPr marL="31081" marR="31081" marT="15540" marB="15540" anchor="ctr"/>
+                </a:tc>
+                <a:tc>
+                  <a:txBody>
+                    <a:bodyPr/>
+                    <a:lstStyle/>
+                    <a:p>
+                      <a:pPr>
+                        <a:buNone/>
+                      </a:pPr>
+                      <a:r>
+                        <a:rPr lang="en-US" sz="1050"/>
+                        <a:t>compose.yaml</a:t>
+                      </a:r>
+                    </a:p>
+                  </a:txBody>
+                  <a:tcPr marL="31081" marR="31081" marT="15540" marB="15540" anchor="ctr"/>
+                </a:tc>
+                <a:extLst>
+                  <a:ext uri="{0D108BD9-81ED-4DB2-BD59-A6C34878D82A}">
+                    <a16:rowId xmlns:a16="http://schemas.microsoft.com/office/drawing/2014/main" val="1751516521"/>
+                  </a:ext>
+                </a:extLst>
+              </a:tr>
+              <a:tr h="478495">
+                <a:tc>
+                  <a:txBody>
+                    <a:bodyPr/>
+                    <a:lstStyle/>
+                    <a:p>
+                      <a:pPr>
+                        <a:buNone/>
+                      </a:pPr>
+                      <a:r>
+                        <a:rPr lang="en-US" sz="1050"/>
+                        <a:t>Kafka topic</a:t>
+                      </a:r>
+                    </a:p>
+                  </a:txBody>
+                  <a:tcPr marL="31081" marR="31081" marT="15540" marB="15540" anchor="ctr"/>
+                </a:tc>
+                <a:tc>
+                  <a:txBody>
+                    <a:bodyPr/>
+                    <a:lstStyle/>
+                    <a:p>
+                      <a:pPr>
+                        <a:buNone/>
+                      </a:pPr>
+                      <a:r>
+                        <a:rPr lang="en-US" sz="1050"/>
+                        <a:t>Created the station-status topic with three partitions using the one-time kafka-init container.</a:t>
+                      </a:r>
+                    </a:p>
+                  </a:txBody>
+                  <a:tcPr marL="31081" marR="31081" marT="15540" marB="15540" anchor="ctr"/>
+                </a:tc>
+                <a:tc>
+                  <a:txBody>
+                    <a:bodyPr/>
+                    <a:lstStyle/>
+                    <a:p>
+                      <a:pPr>
+                        <a:buNone/>
+                      </a:pPr>
+                      <a:r>
+                        <a:rPr lang="en-US" sz="1050"/>
+                        <a:t>compose.yaml</a:t>
+                      </a:r>
+                    </a:p>
+                  </a:txBody>
+                  <a:tcPr marL="31081" marR="31081" marT="15540" marB="15540" anchor="ctr"/>
+                </a:tc>
+                <a:extLst>
+                  <a:ext uri="{0D108BD9-81ED-4DB2-BD59-A6C34878D82A}">
+                    <a16:rowId xmlns:a16="http://schemas.microsoft.com/office/drawing/2014/main" val="459817171"/>
+                  </a:ext>
+                </a:extLst>
+              </a:tr>
+              <a:tr h="478495">
+                <a:tc>
+                  <a:txBody>
+                    <a:bodyPr/>
+                    <a:lstStyle/>
+                    <a:p>
+                      <a:pPr>
+                        <a:buNone/>
+                      </a:pPr>
+                      <a:r>
+                        <a:rPr lang="en-US" sz="1050"/>
+                        <a:t>Station producer</a:t>
+                      </a:r>
+                    </a:p>
+                  </a:txBody>
+                  <a:tcPr marL="31081" marR="31081" marT="15540" marB="15540" anchor="ctr"/>
+                </a:tc>
+                <a:tc>
+                  <a:txBody>
+                    <a:bodyPr/>
+                    <a:lstStyle/>
+                    <a:p>
+                      <a:pPr>
+                        <a:buNone/>
+                      </a:pPr>
+                      <a:r>
+                        <a:rPr lang="en-US" sz="1050"/>
+                        <a:t>Calls the Capital Bikeshare GBFS API every 60 seconds and retrieves the latest station information and availability data.</a:t>
+                      </a:r>
+                    </a:p>
+                  </a:txBody>
+                  <a:tcPr marL="31081" marR="31081" marT="15540" marB="15540" anchor="ctr"/>
+                </a:tc>
+                <a:tc>
+                  <a:txBody>
+                    <a:bodyPr/>
+                    <a:lstStyle/>
+                    <a:p>
+                      <a:pPr>
+                        <a:buNone/>
+                      </a:pPr>
+                      <a:r>
+                        <a:rPr lang="en-US" sz="1050"/>
+                        <a:t>streaming/producer.py and pipeline/extract.py</a:t>
+                      </a:r>
+                    </a:p>
+                  </a:txBody>
+                  <a:tcPr marL="31081" marR="31081" marT="15540" marB="15540" anchor="ctr"/>
+                </a:tc>
+                <a:extLst>
+                  <a:ext uri="{0D108BD9-81ED-4DB2-BD59-A6C34878D82A}">
+                    <a16:rowId xmlns:a16="http://schemas.microsoft.com/office/drawing/2014/main" val="3710595135"/>
+                  </a:ext>
+                </a:extLst>
+              </a:tr>
+              <a:tr h="588917">
+                <a:tc>
+                  <a:txBody>
+                    <a:bodyPr/>
+                    <a:lstStyle/>
+                    <a:p>
+                      <a:pPr>
+                        <a:buNone/>
+                      </a:pPr>
+                      <a:r>
+                        <a:rPr lang="en-US" sz="1050"/>
+                        <a:t>Event creation</a:t>
+                      </a:r>
+                    </a:p>
+                  </a:txBody>
+                  <a:tcPr marL="31081" marR="31081" marT="15540" marB="15540" anchor="ctr"/>
+                </a:tc>
+                <a:tc>
+                  <a:txBody>
+                    <a:bodyPr/>
+                    <a:lstStyle/>
+                    <a:p>
+                      <a:pPr>
+                        <a:buNone/>
+                      </a:pPr>
+                      <a:r>
+                        <a:rPr lang="en-US" sz="1050"/>
+                        <a:t>Converts each new station observation into a JSON event containing the station ID, name, timestamp, available bikes, docks, and operating status.</a:t>
+                      </a:r>
+                    </a:p>
+                  </a:txBody>
+                  <a:tcPr marL="31081" marR="31081" marT="15540" marB="15540" anchor="ctr"/>
+                </a:tc>
+                <a:tc>
+                  <a:txBody>
+                    <a:bodyPr/>
+                    <a:lstStyle/>
+                    <a:p>
+                      <a:pPr>
+                        <a:buNone/>
+                      </a:pPr>
+                      <a:r>
+                        <a:rPr lang="en-US" sz="1050"/>
+                        <a:t>streaming/producer.py</a:t>
+                      </a:r>
+                    </a:p>
+                  </a:txBody>
+                  <a:tcPr marL="31081" marR="31081" marT="15540" marB="15540" anchor="ctr"/>
+                </a:tc>
+                <a:extLst>
+                  <a:ext uri="{0D108BD9-81ED-4DB2-BD59-A6C34878D82A}">
+                    <a16:rowId xmlns:a16="http://schemas.microsoft.com/office/drawing/2014/main" val="1757299537"/>
+                  </a:ext>
+                </a:extLst>
+              </a:tr>
+              <a:tr h="478495">
+                <a:tc>
+                  <a:txBody>
+                    <a:bodyPr/>
+                    <a:lstStyle/>
+                    <a:p>
+                      <a:pPr>
+                        <a:buNone/>
+                      </a:pPr>
+                      <a:r>
+                        <a:rPr lang="en-US" sz="1050"/>
+                        <a:t>Message key</a:t>
+                      </a:r>
+                    </a:p>
+                  </a:txBody>
+                  <a:tcPr marL="31081" marR="31081" marT="15540" marB="15540" anchor="ctr"/>
+                </a:tc>
+                <a:tc>
+                  <a:txBody>
+                    <a:bodyPr/>
+                    <a:lstStyle/>
+                    <a:p>
+                      <a:pPr>
+                        <a:buNone/>
+                      </a:pPr>
+                      <a:r>
+                        <a:rPr lang="en-US" sz="1050"/>
+                        <a:t>Uses station_id as the Kafka message key so events for the same station remain in the same partition and maintain order.</a:t>
+                      </a:r>
+                    </a:p>
+                  </a:txBody>
+                  <a:tcPr marL="31081" marR="31081" marT="15540" marB="15540" anchor="ctr"/>
+                </a:tc>
+                <a:tc>
+                  <a:txBody>
+                    <a:bodyPr/>
+                    <a:lstStyle/>
+                    <a:p>
+                      <a:pPr>
+                        <a:buNone/>
+                      </a:pPr>
+                      <a:r>
+                        <a:rPr lang="en-US" sz="1050"/>
+                        <a:t>streaming/producer.py</a:t>
+                      </a:r>
+                    </a:p>
+                  </a:txBody>
+                  <a:tcPr marL="31081" marR="31081" marT="15540" marB="15540" anchor="ctr"/>
+                </a:tc>
+                <a:extLst>
+                  <a:ext uri="{0D108BD9-81ED-4DB2-BD59-A6C34878D82A}">
+                    <a16:rowId xmlns:a16="http://schemas.microsoft.com/office/drawing/2014/main" val="155366199"/>
+                  </a:ext>
+                </a:extLst>
+              </a:tr>
+              <a:tr h="588917">
+                <a:tc>
+                  <a:txBody>
+                    <a:bodyPr/>
+                    <a:lstStyle/>
+                    <a:p>
+                      <a:pPr>
+                        <a:buNone/>
+                      </a:pPr>
+                      <a:r>
+                        <a:rPr lang="en-US" sz="1050"/>
+                        <a:t>Duplicate filtering</a:t>
+                      </a:r>
+                    </a:p>
+                  </a:txBody>
+                  <a:tcPr marL="31081" marR="31081" marT="15540" marB="15540" anchor="ctr"/>
+                </a:tc>
+                <a:tc>
+                  <a:txBody>
+                    <a:bodyPr/>
+                    <a:lstStyle/>
+                    <a:p>
+                      <a:pPr>
+                        <a:buNone/>
+                      </a:pPr>
+                      <a:r>
+                        <a:rPr lang="en-US" sz="1050"/>
+                        <a:t>Publishes an observation only when its reported_at timestamp differs from the last observation published for that station.</a:t>
+                      </a:r>
+                    </a:p>
+                  </a:txBody>
+                  <a:tcPr marL="31081" marR="31081" marT="15540" marB="15540" anchor="ctr"/>
+                </a:tc>
+                <a:tc>
+                  <a:txBody>
+                    <a:bodyPr/>
+                    <a:lstStyle/>
+                    <a:p>
+                      <a:pPr>
+                        <a:buNone/>
+                      </a:pPr>
+                      <a:r>
+                        <a:rPr lang="en-US" sz="1050"/>
+                        <a:t>streaming/producer.py</a:t>
+                      </a:r>
+                    </a:p>
+                  </a:txBody>
+                  <a:tcPr marL="31081" marR="31081" marT="15540" marB="15540" anchor="ctr"/>
+                </a:tc>
+                <a:extLst>
+                  <a:ext uri="{0D108BD9-81ED-4DB2-BD59-A6C34878D82A}">
+                    <a16:rowId xmlns:a16="http://schemas.microsoft.com/office/drawing/2014/main" val="2983985275"/>
+                  </a:ext>
+                </a:extLst>
+              </a:tr>
+              <a:tr h="588917">
+                <a:tc>
+                  <a:txBody>
+                    <a:bodyPr/>
+                    <a:lstStyle/>
+                    <a:p>
+                      <a:pPr>
+                        <a:buNone/>
+                      </a:pPr>
+                      <a:r>
+                        <a:rPr lang="en-US" sz="1050"/>
+                        <a:t>Alert consumer</a:t>
+                      </a:r>
+                    </a:p>
+                  </a:txBody>
+                  <a:tcPr marL="31081" marR="31081" marT="15540" marB="15540" anchor="ctr"/>
+                </a:tc>
+                <a:tc>
+                  <a:txBody>
+                    <a:bodyPr/>
+                    <a:lstStyle/>
+                    <a:p>
+                      <a:pPr>
+                        <a:buNone/>
+                      </a:pPr>
+                      <a:r>
+                        <a:rPr lang="en-US" sz="1050"/>
+                        <a:t>Subscribes to station-status using the station-depletion-alerts-v1 consumer group and processes events continuously.</a:t>
+                      </a:r>
+                    </a:p>
+                  </a:txBody>
+                  <a:tcPr marL="31081" marR="31081" marT="15540" marB="15540" anchor="ctr"/>
+                </a:tc>
+                <a:tc>
+                  <a:txBody>
+                    <a:bodyPr/>
+                    <a:lstStyle/>
+                    <a:p>
+                      <a:pPr>
+                        <a:buNone/>
+                      </a:pPr>
+                      <a:r>
+                        <a:rPr lang="en-US" sz="1050"/>
+                        <a:t>streaming/alert_consumer.py</a:t>
+                      </a:r>
+                    </a:p>
+                  </a:txBody>
+                  <a:tcPr marL="31081" marR="31081" marT="15540" marB="15540" anchor="ctr"/>
+                </a:tc>
+                <a:extLst>
+                  <a:ext uri="{0D108BD9-81ED-4DB2-BD59-A6C34878D82A}">
+                    <a16:rowId xmlns:a16="http://schemas.microsoft.com/office/drawing/2014/main" val="1047917305"/>
+                  </a:ext>
+                </a:extLst>
+              </a:tr>
+              <a:tr h="478495">
+                <a:tc>
+                  <a:txBody>
+                    <a:bodyPr/>
+                    <a:lstStyle/>
+                    <a:p>
+                      <a:pPr>
+                        <a:buNone/>
+                      </a:pPr>
+                      <a:r>
+                        <a:rPr lang="en-US" sz="1050"/>
+                        <a:t>Alert rules</a:t>
+                      </a:r>
+                    </a:p>
+                  </a:txBody>
+                  <a:tcPr marL="31081" marR="31081" marT="15540" marB="15540" anchor="ctr"/>
+                </a:tc>
+                <a:tc>
+                  <a:txBody>
+                    <a:bodyPr/>
+                    <a:lstStyle/>
+                    <a:p>
+                      <a:pPr>
+                        <a:buNone/>
+                      </a:pPr>
+                      <a:r>
+                        <a:rPr lang="en-US" sz="1050"/>
+                        <a:t>Creates critical alerts at two bikes or five predicted minutes to empty, and warnings at five bikes or fifteen predicted minutes.</a:t>
+                      </a:r>
+                    </a:p>
+                  </a:txBody>
+                  <a:tcPr marL="31081" marR="31081" marT="15540" marB="15540" anchor="ctr"/>
+                </a:tc>
+                <a:tc>
+                  <a:txBody>
+                    <a:bodyPr/>
+                    <a:lstStyle/>
+                    <a:p>
+                      <a:pPr>
+                        <a:buNone/>
+                      </a:pPr>
+                      <a:r>
+                        <a:rPr lang="en-US" sz="1050"/>
+                        <a:t>streaming/alert_rules.py</a:t>
+                      </a:r>
+                    </a:p>
+                  </a:txBody>
+                  <a:tcPr marL="31081" marR="31081" marT="15540" marB="15540" anchor="ctr"/>
+                </a:tc>
+                <a:extLst>
+                  <a:ext uri="{0D108BD9-81ED-4DB2-BD59-A6C34878D82A}">
+                    <a16:rowId xmlns:a16="http://schemas.microsoft.com/office/drawing/2014/main" val="2349711949"/>
+                  </a:ext>
+                </a:extLst>
+              </a:tr>
+              <a:tr h="478495">
+                <a:tc>
+                  <a:txBody>
+                    <a:bodyPr/>
+                    <a:lstStyle/>
+                    <a:p>
+                      <a:pPr>
+                        <a:buNone/>
+                      </a:pPr>
+                      <a:r>
+                        <a:rPr lang="en-US" sz="1050"/>
+                        <a:t>Alert storage</a:t>
+                      </a:r>
+                    </a:p>
+                  </a:txBody>
+                  <a:tcPr marL="31081" marR="31081" marT="15540" marB="15540" anchor="ctr"/>
+                </a:tc>
+                <a:tc>
+                  <a:txBody>
+                    <a:bodyPr/>
+                    <a:lstStyle/>
+                    <a:p>
+                      <a:pPr>
+                        <a:buNone/>
+                      </a:pPr>
+                      <a:r>
+                        <a:rPr lang="en-US" sz="1050"/>
+                        <a:t>Creates, updates, escalates, or resolves alerts in PostgreSQL. Kafka offsets are committed only after the database operation succeeds.</a:t>
+                      </a:r>
+                    </a:p>
+                  </a:txBody>
+                  <a:tcPr marL="31081" marR="31081" marT="15540" marB="15540" anchor="ctr"/>
+                </a:tc>
+                <a:tc>
+                  <a:txBody>
+                    <a:bodyPr/>
+                    <a:lstStyle/>
+                    <a:p>
+                      <a:pPr>
+                        <a:buNone/>
+                      </a:pPr>
+                      <a:r>
+                        <a:rPr lang="en-US" sz="1050"/>
+                        <a:t>streaming/alert_store.py and streaming/alert_consumer.py</a:t>
+                      </a:r>
+                    </a:p>
+                  </a:txBody>
+                  <a:tcPr marL="31081" marR="31081" marT="15540" marB="15540" anchor="ctr"/>
+                </a:tc>
+                <a:extLst>
+                  <a:ext uri="{0D108BD9-81ED-4DB2-BD59-A6C34878D82A}">
+                    <a16:rowId xmlns:a16="http://schemas.microsoft.com/office/drawing/2014/main" val="4150336313"/>
+                  </a:ext>
+                </a:extLst>
+              </a:tr>
+              <a:tr h="478495">
+                <a:tc>
+                  <a:txBody>
+                    <a:bodyPr/>
+                    <a:lstStyle/>
+                    <a:p>
+                      <a:pPr>
+                        <a:buNone/>
+                      </a:pPr>
+                      <a:r>
+                        <a:rPr lang="en-US" sz="1050"/>
+                        <a:t>Deployment</a:t>
+                      </a:r>
+                    </a:p>
+                  </a:txBody>
+                  <a:tcPr marL="31081" marR="31081" marT="15540" marB="15540" anchor="ctr"/>
+                </a:tc>
+                <a:tc>
+                  <a:txBody>
+                    <a:bodyPr/>
+                    <a:lstStyle/>
+                    <a:p>
+                      <a:pPr>
+                        <a:buNone/>
+                      </a:pPr>
+                      <a:r>
+                        <a:rPr lang="en-US" sz="1050"/>
+                        <a:t>Packages the producer and consumer with their Python and Kafka dependencies and runs them as separate Docker services.</a:t>
+                      </a:r>
+                    </a:p>
+                  </a:txBody>
+                  <a:tcPr marL="31081" marR="31081" marT="15540" marB="15540" anchor="ctr"/>
+                </a:tc>
+                <a:tc>
+                  <a:txBody>
+                    <a:bodyPr/>
+                    <a:lstStyle/>
+                    <a:p>
+                      <a:pPr>
+                        <a:buNone/>
+                      </a:pPr>
+                      <a:r>
+                        <a:rPr lang="en-US" sz="1050" dirty="0"/>
+                        <a:t>streaming/</a:t>
+                      </a:r>
+                      <a:r>
+                        <a:rPr lang="en-US" sz="1050" dirty="0" err="1"/>
+                        <a:t>Dockerfile</a:t>
+                      </a:r>
+                      <a:r>
+                        <a:rPr lang="en-US" sz="1050" dirty="0"/>
+                        <a:t>, streaming/requirements.txt, and </a:t>
+                      </a:r>
+                      <a:r>
+                        <a:rPr lang="en-US" sz="1050" dirty="0" err="1"/>
+                        <a:t>compose.yaml</a:t>
+                      </a:r>
+                      <a:endParaRPr lang="en-US" sz="1050" dirty="0"/>
+                    </a:p>
+                  </a:txBody>
+                  <a:tcPr marL="31081" marR="31081" marT="15540" marB="15540" anchor="ctr"/>
+                </a:tc>
+                <a:extLst>
+                  <a:ext uri="{0D108BD9-81ED-4DB2-BD59-A6C34878D82A}">
+                    <a16:rowId xmlns:a16="http://schemas.microsoft.com/office/drawing/2014/main" val="3687884870"/>
+                  </a:ext>
+                </a:extLst>
+              </a:tr>
+            </a:tbl>
+          </a:graphicData>
+        </a:graphic>
+      </p:graphicFrame>
+    </p:spTree>
+    <p:extLst>
+      <p:ext uri="{BB962C8B-B14F-4D97-AF65-F5344CB8AC3E}">
+        <p14:creationId xmlns:p14="http://schemas.microsoft.com/office/powerpoint/2010/main" val="1334353423"/>
+      </p:ext>
+    </p:extLst>
+  </p:cSld>
+  <p:clrMapOvr>
+    <a:masterClrMapping/>
+  </p:clrMapOvr>
+</p:sld>
+</file>
+
+<file path=ppt/slides/slide11.xml><?xml version="1.0" encoding="utf-8"?>
+<p:sld xmlns:a="http://schemas.openxmlformats.org/drawingml/2006/main" xmlns:r="http://schemas.openxmlformats.org/officeDocument/2006/relationships" xmlns:p="http://schemas.openxmlformats.org/presentationml/2006/main">
+  <p:cSld>
+    <p:spTree>
+      <p:nvGrpSpPr>
+        <p:cNvPr id="1" name="">
+          <a:extLst>
+            <a:ext uri="{FF2B5EF4-FFF2-40B4-BE49-F238E27FC236}">
+              <a16:creationId xmlns:a16="http://schemas.microsoft.com/office/drawing/2014/main" id="{17B653FE-7DD9-A063-1242-3B7C28A8B4B6}"/>
+            </a:ext>
+          </a:extLst>
+        </p:cNvPr>
+        <p:cNvGrpSpPr/>
+        <p:nvPr/>
+      </p:nvGrpSpPr>
+      <p:grpSpPr>
+        <a:xfrm>
+          <a:off x="0" y="0"/>
+          <a:ext cx="0" cy="0"/>
+          <a:chOff x="0" y="0"/>
+          <a:chExt cx="0" cy="0"/>
+        </a:xfrm>
+      </p:grpSpPr>
+      <p:sp>
+        <p:nvSpPr>
+          <p:cNvPr id="21" name="Rectangle 20">
+            <a:extLst>
+              <a:ext uri="{FF2B5EF4-FFF2-40B4-BE49-F238E27FC236}">
+                <a16:creationId xmlns:a16="http://schemas.microsoft.com/office/drawing/2014/main" id="{9C88D855-21C6-6F52-908F-3B62DBC86F83}"/>
+              </a:ext>
+            </a:extLst>
+          </p:cNvPr>
+          <p:cNvSpPr>
+            <a:spLocks noGrp="1"/>
+          </p:cNvSpPr>
+          <p:nvPr/>
+        </p:nvSpPr>
+        <p:spPr>
+          <a:xfrm>
+            <a:off x="400050" y="276225"/>
+            <a:ext cx="4953000" cy="209550"/>
+          </a:xfrm>
+          <a:prstGeom prst="rect">
+            <a:avLst/>
+          </a:prstGeom>
+        </p:spPr>
+        <p:txBody>
+          <a:bodyPr wrap="square" lIns="0" tIns="0" rIns="0" bIns="0" anchor="t">
+            <a:normAutofit/>
+          </a:bodyPr>
+          <a:lstStyle/>
+          <a:p>
+            <a:pPr algn="l">
+              <a:defRPr sz="975" b="1">
+                <a:solidFill>
+                  <a:srgbClr val="D9232E"/>
+                </a:solidFill>
+                <a:latin typeface="Arial"/>
+                <a:ea typeface="Arial"/>
+                <a:cs typeface="Arial"/>
+              </a:defRPr>
+            </a:pPr>
+            <a:r>
+              <a:t>CAPITAL BIKESHARE OPERATIONS</a:t>
+            </a:r>
+          </a:p>
+        </p:txBody>
+      </p:sp>
+      <p:sp>
+        <p:nvSpPr>
+          <p:cNvPr id="2" name="Rectangle 1">
+            <a:extLst>
+              <a:ext uri="{FF2B5EF4-FFF2-40B4-BE49-F238E27FC236}">
+                <a16:creationId xmlns:a16="http://schemas.microsoft.com/office/drawing/2014/main" id="{CBC4AB1D-C1A0-BC7E-8F4D-E17ADFEC854D}"/>
+              </a:ext>
+            </a:extLst>
+          </p:cNvPr>
+          <p:cNvSpPr>
+            <a:spLocks noGrp="1"/>
+          </p:cNvSpPr>
+          <p:nvPr/>
+        </p:nvSpPr>
+        <p:spPr>
+          <a:xfrm>
+            <a:off x="400050" y="581025"/>
+            <a:ext cx="11391900" cy="628650"/>
+          </a:xfrm>
+          <a:prstGeom prst="rect">
+            <a:avLst/>
+          </a:prstGeom>
+        </p:spPr>
+        <p:txBody>
+          <a:bodyPr wrap="square" lIns="0" tIns="0" rIns="0" bIns="0" anchor="t">
+            <a:normAutofit/>
+          </a:bodyPr>
+          <a:lstStyle/>
+          <a:p>
+            <a:pPr algn="l">
+              <a:defRPr sz="3000" b="1">
+                <a:solidFill>
+                  <a:srgbClr val="15191D"/>
+                </a:solidFill>
+                <a:latin typeface="Arial"/>
+                <a:ea typeface="Arial"/>
+                <a:cs typeface="Arial"/>
+              </a:defRPr>
+            </a:pPr>
+            <a:r>
+              <a:rPr lang="en-US" dirty="0"/>
+              <a:t>Express (Back-End) </a:t>
+            </a:r>
+            <a:endParaRPr dirty="0"/>
+          </a:p>
+        </p:txBody>
+      </p:sp>
+      <p:cxnSp>
+        <p:nvCxnSpPr>
+          <p:cNvPr id="23" name="Straight Arrow Connector 22">
+            <a:extLst>
+              <a:ext uri="{FF2B5EF4-FFF2-40B4-BE49-F238E27FC236}">
+                <a16:creationId xmlns:a16="http://schemas.microsoft.com/office/drawing/2014/main" id="{2CDF94B7-66E9-56D0-363D-A133FF9F12A9}"/>
+              </a:ext>
+            </a:extLst>
+          </p:cNvPr>
+          <p:cNvCxnSpPr/>
+          <p:nvPr/>
+        </p:nvCxnSpPr>
+        <p:spPr>
+          <a:xfrm>
+            <a:off x="400050" y="1304925"/>
+            <a:ext cx="11391900" cy="9525"/>
+          </a:xfrm>
+          <a:prstGeom prst="straightConnector1">
+            <a:avLst/>
+          </a:prstGeom>
+          <a:ln w="9525">
+            <a:solidFill>
+              <a:srgbClr val="C9CED2"/>
+            </a:solidFill>
+            <a:prstDash val="solid"/>
+          </a:ln>
+        </p:spPr>
+      </p:cxnSp>
+      <p:graphicFrame>
+        <p:nvGraphicFramePr>
+          <p:cNvPr id="3" name="Table 2">
+            <a:extLst>
+              <a:ext uri="{FF2B5EF4-FFF2-40B4-BE49-F238E27FC236}">
+                <a16:creationId xmlns:a16="http://schemas.microsoft.com/office/drawing/2014/main" id="{A2125F34-C26C-05E4-FB86-CCF73DC7B808}"/>
+              </a:ext>
+            </a:extLst>
+          </p:cNvPr>
+          <p:cNvGraphicFramePr>
+            <a:graphicFrameLocks noGrp="1"/>
+          </p:cNvGraphicFramePr>
+          <p:nvPr>
+            <p:extLst>
+              <p:ext uri="{D42A27DB-BD31-4B8C-83A1-F6EECF244321}">
+                <p14:modId xmlns:p14="http://schemas.microsoft.com/office/powerpoint/2010/main" val="2614243794"/>
+              </p:ext>
+            </p:extLst>
+          </p:nvPr>
+        </p:nvGraphicFramePr>
+        <p:xfrm>
+          <a:off x="973666" y="1710034"/>
+          <a:ext cx="10109199" cy="4541463"/>
+        </p:xfrm>
+        <a:graphic>
+          <a:graphicData uri="http://schemas.openxmlformats.org/drawingml/2006/table">
+            <a:tbl>
+              <a:tblPr>
+                <a:tableStyleId>{5C22544A-7EE6-4342-B048-85BDC9FD1C3A}</a:tableStyleId>
+              </a:tblPr>
+              <a:tblGrid>
+                <a:gridCol w="1865885">
+                  <a:extLst>
+                    <a:ext uri="{9D8B030D-6E8A-4147-A177-3AD203B41FA5}">
+                      <a16:colId xmlns:a16="http://schemas.microsoft.com/office/drawing/2014/main" val="3163305933"/>
+                    </a:ext>
+                  </a:extLst>
+                </a:gridCol>
+                <a:gridCol w="4873581">
+                  <a:extLst>
+                    <a:ext uri="{9D8B030D-6E8A-4147-A177-3AD203B41FA5}">
+                      <a16:colId xmlns:a16="http://schemas.microsoft.com/office/drawing/2014/main" val="812118686"/>
+                    </a:ext>
+                  </a:extLst>
+                </a:gridCol>
+                <a:gridCol w="3369733">
+                  <a:extLst>
+                    <a:ext uri="{9D8B030D-6E8A-4147-A177-3AD203B41FA5}">
+                      <a16:colId xmlns:a16="http://schemas.microsoft.com/office/drawing/2014/main" val="2103490393"/>
+                    </a:ext>
+                  </a:extLst>
+                </a:gridCol>
+              </a:tblGrid>
+              <a:tr h="123442">
+                <a:tc>
+                  <a:txBody>
+                    <a:bodyPr/>
+                    <a:lstStyle/>
+                    <a:p>
+                      <a:pPr>
+                        <a:buNone/>
+                      </a:pPr>
+                      <a:r>
+                        <a:rPr lang="en-US" sz="1100"/>
+                        <a:t>Implementation</a:t>
+                      </a:r>
+                    </a:p>
+                  </a:txBody>
+                  <a:tcPr marL="30861" marR="30861" marT="15430" marB="15430" anchor="ctr"/>
+                </a:tc>
+                <a:tc>
+                  <a:txBody>
+                    <a:bodyPr/>
+                    <a:lstStyle/>
+                    <a:p>
+                      <a:pPr>
+                        <a:buNone/>
+                      </a:pPr>
+                      <a:r>
+                        <a:rPr lang="en-US" sz="1100"/>
+                        <a:t>What was done</a:t>
+                      </a:r>
+                    </a:p>
+                  </a:txBody>
+                  <a:tcPr marL="30861" marR="30861" marT="15430" marB="15430" anchor="ctr"/>
+                </a:tc>
+                <a:tc>
+                  <a:txBody>
+                    <a:bodyPr/>
+                    <a:lstStyle/>
+                    <a:p>
+                      <a:pPr>
+                        <a:buNone/>
+                      </a:pPr>
+                      <a:r>
+                        <a:rPr lang="en-US" sz="1100"/>
+                        <a:t>Code location</a:t>
+                      </a:r>
+                    </a:p>
+                  </a:txBody>
+                  <a:tcPr marL="30861" marR="30861" marT="15430" marB="15430" anchor="ctr"/>
+                </a:tc>
+                <a:extLst>
+                  <a:ext uri="{0D108BD9-81ED-4DB2-BD59-A6C34878D82A}">
+                    <a16:rowId xmlns:a16="http://schemas.microsoft.com/office/drawing/2014/main" val="707311664"/>
+                  </a:ext>
+                </a:extLst>
+              </a:tr>
+              <a:tr h="401187">
+                <a:tc>
+                  <a:txBody>
+                    <a:bodyPr/>
+                    <a:lstStyle/>
+                    <a:p>
+                      <a:pPr>
+                        <a:buNone/>
+                      </a:pPr>
+                      <a:r>
+                        <a:rPr lang="en-US" sz="1100"/>
+                        <a:t>Express API</a:t>
+                      </a:r>
+                    </a:p>
+                  </a:txBody>
+                  <a:tcPr marL="30861" marR="30861" marT="15430" marB="15430" anchor="ctr"/>
+                </a:tc>
+                <a:tc>
+                  <a:txBody>
+                    <a:bodyPr/>
+                    <a:lstStyle/>
+                    <a:p>
+                      <a:pPr>
+                        <a:buNone/>
+                      </a:pPr>
+                      <a:r>
+                        <a:rPr lang="en-US" sz="1100"/>
+                        <a:t>Created an Express server that provides bikeshare data to the React dashboard through REST endpoints.</a:t>
+                      </a:r>
+                    </a:p>
+                  </a:txBody>
+                  <a:tcPr marL="30861" marR="30861" marT="15430" marB="15430" anchor="ctr"/>
+                </a:tc>
+                <a:tc>
+                  <a:txBody>
+                    <a:bodyPr/>
+                    <a:lstStyle/>
+                    <a:p>
+                      <a:pPr>
+                        <a:buNone/>
+                      </a:pPr>
+                      <a:r>
+                        <a:rPr lang="en-US" sz="1100"/>
+                        <a:t>server/index.js</a:t>
+                      </a:r>
+                    </a:p>
+                  </a:txBody>
+                  <a:tcPr marL="30861" marR="30861" marT="15430" marB="15430" anchor="ctr"/>
+                </a:tc>
+                <a:extLst>
+                  <a:ext uri="{0D108BD9-81ED-4DB2-BD59-A6C34878D82A}">
+                    <a16:rowId xmlns:a16="http://schemas.microsoft.com/office/drawing/2014/main" val="2745909174"/>
+                  </a:ext>
+                </a:extLst>
+              </a:tr>
+              <a:tr h="401187">
+                <a:tc>
+                  <a:txBody>
+                    <a:bodyPr/>
+                    <a:lstStyle/>
+                    <a:p>
+                      <a:pPr>
+                        <a:buNone/>
+                      </a:pPr>
+                      <a:r>
+                        <a:rPr lang="en-US" sz="1100"/>
+                        <a:t>Database connection</a:t>
+                      </a:r>
+                    </a:p>
+                  </a:txBody>
+                  <a:tcPr marL="30861" marR="30861" marT="15430" marB="15430" anchor="ctr"/>
+                </a:tc>
+                <a:tc>
+                  <a:txBody>
+                    <a:bodyPr/>
+                    <a:lstStyle/>
+                    <a:p>
+                      <a:pPr>
+                        <a:buNone/>
+                      </a:pPr>
+                      <a:r>
+                        <a:rPr lang="en-US" sz="1100"/>
+                        <a:t>Uses a PostgreSQL connection pool and the DATABASE_URL environment variable to connect to the Dockerized database.</a:t>
+                      </a:r>
+                    </a:p>
+                  </a:txBody>
+                  <a:tcPr marL="30861" marR="30861" marT="15430" marB="15430" anchor="ctr"/>
+                </a:tc>
+                <a:tc>
+                  <a:txBody>
+                    <a:bodyPr/>
+                    <a:lstStyle/>
+                    <a:p>
+                      <a:pPr>
+                        <a:buNone/>
+                      </a:pPr>
+                      <a:r>
+                        <a:rPr lang="en-US" sz="1100"/>
+                        <a:t>server/index.js and compose.yaml</a:t>
+                      </a:r>
+                    </a:p>
+                  </a:txBody>
+                  <a:tcPr marL="30861" marR="30861" marT="15430" marB="15430" anchor="ctr"/>
+                </a:tc>
+                <a:extLst>
+                  <a:ext uri="{0D108BD9-81ED-4DB2-BD59-A6C34878D82A}">
+                    <a16:rowId xmlns:a16="http://schemas.microsoft.com/office/drawing/2014/main" val="2490023531"/>
+                  </a:ext>
+                </a:extLst>
+              </a:tr>
+              <a:tr h="401187">
+                <a:tc>
+                  <a:txBody>
+                    <a:bodyPr/>
+                    <a:lstStyle/>
+                    <a:p>
+                      <a:pPr>
+                        <a:buNone/>
+                      </a:pPr>
+                      <a:r>
+                        <a:rPr lang="en-US" sz="1100"/>
+                        <a:t>Summary endpoint</a:t>
+                      </a:r>
+                    </a:p>
+                  </a:txBody>
+                  <a:tcPr marL="30861" marR="30861" marT="15430" marB="15430" anchor="ctr"/>
+                </a:tc>
+                <a:tc>
+                  <a:txBody>
+                    <a:bodyPr/>
+                    <a:lstStyle/>
+                    <a:p>
+                      <a:pPr>
+                        <a:buNone/>
+                      </a:pPr>
+                      <a:r>
+                        <a:rPr lang="en-US" sz="1100"/>
+                        <a:t>Calculates total stations, available bikes and docks, low-bike stations, empty stations, and offline stations.</a:t>
+                      </a:r>
+                    </a:p>
+                  </a:txBody>
+                  <a:tcPr marL="30861" marR="30861" marT="15430" marB="15430" anchor="ctr"/>
+                </a:tc>
+                <a:tc>
+                  <a:txBody>
+                    <a:bodyPr/>
+                    <a:lstStyle/>
+                    <a:p>
+                      <a:pPr>
+                        <a:buNone/>
+                      </a:pPr>
+                      <a:r>
+                        <a:rPr lang="en-US" sz="1100"/>
+                        <a:t>GET /api/bikeshare/summary in server/index.js</a:t>
+                      </a:r>
+                    </a:p>
+                  </a:txBody>
+                  <a:tcPr marL="30861" marR="30861" marT="15430" marB="15430" anchor="ctr"/>
+                </a:tc>
+                <a:extLst>
+                  <a:ext uri="{0D108BD9-81ED-4DB2-BD59-A6C34878D82A}">
+                    <a16:rowId xmlns:a16="http://schemas.microsoft.com/office/drawing/2014/main" val="1535163541"/>
+                  </a:ext>
+                </a:extLst>
+              </a:tr>
+              <a:tr h="401187">
+                <a:tc>
+                  <a:txBody>
+                    <a:bodyPr/>
+                    <a:lstStyle/>
+                    <a:p>
+                      <a:pPr>
+                        <a:buNone/>
+                      </a:pPr>
+                      <a:r>
+                        <a:rPr lang="en-US" sz="1100"/>
+                        <a:t>Alerts endpoint</a:t>
+                      </a:r>
+                    </a:p>
+                  </a:txBody>
+                  <a:tcPr marL="30861" marR="30861" marT="15430" marB="15430" anchor="ctr"/>
+                </a:tc>
+                <a:tc>
+                  <a:txBody>
+                    <a:bodyPr/>
+                    <a:lstStyle/>
+                    <a:p>
+                      <a:pPr>
+                        <a:buNone/>
+                      </a:pPr>
+                      <a:r>
+                        <a:rPr lang="en-US" sz="1100"/>
+                        <a:t>Returns active warning and critical alerts, ordered by severity and depletion risk, with filtering and pagination.</a:t>
+                      </a:r>
+                    </a:p>
+                  </a:txBody>
+                  <a:tcPr marL="30861" marR="30861" marT="15430" marB="15430" anchor="ctr"/>
+                </a:tc>
+                <a:tc>
+                  <a:txBody>
+                    <a:bodyPr/>
+                    <a:lstStyle/>
+                    <a:p>
+                      <a:pPr>
+                        <a:buNone/>
+                      </a:pPr>
+                      <a:r>
+                        <a:rPr lang="en-US" sz="1100"/>
+                        <a:t>GET /api/bikeshare/alerts in server/index.js</a:t>
+                      </a:r>
+                    </a:p>
+                  </a:txBody>
+                  <a:tcPr marL="30861" marR="30861" marT="15430" marB="15430" anchor="ctr"/>
+                </a:tc>
+                <a:extLst>
+                  <a:ext uri="{0D108BD9-81ED-4DB2-BD59-A6C34878D82A}">
+                    <a16:rowId xmlns:a16="http://schemas.microsoft.com/office/drawing/2014/main" val="502421606"/>
+                  </a:ext>
+                </a:extLst>
+              </a:tr>
+              <a:tr h="401187">
+                <a:tc>
+                  <a:txBody>
+                    <a:bodyPr/>
+                    <a:lstStyle/>
+                    <a:p>
+                      <a:pPr>
+                        <a:buNone/>
+                      </a:pPr>
+                      <a:r>
+                        <a:rPr lang="en-US" sz="1100"/>
+                        <a:t>Map endpoint</a:t>
+                      </a:r>
+                    </a:p>
+                  </a:txBody>
+                  <a:tcPr marL="30861" marR="30861" marT="15430" marB="15430" anchor="ctr"/>
+                </a:tc>
+                <a:tc>
+                  <a:txBody>
+                    <a:bodyPr/>
+                    <a:lstStyle/>
+                    <a:p>
+                      <a:pPr>
+                        <a:buNone/>
+                      </a:pPr>
+                      <a:r>
+                        <a:rPr lang="en-US" sz="1100"/>
+                        <a:t>Returns lightweight station coordinates and current availability for displaying markers on the Leaflet map.</a:t>
+                      </a:r>
+                    </a:p>
+                  </a:txBody>
+                  <a:tcPr marL="30861" marR="30861" marT="15430" marB="15430" anchor="ctr"/>
+                </a:tc>
+                <a:tc>
+                  <a:txBody>
+                    <a:bodyPr/>
+                    <a:lstStyle/>
+                    <a:p>
+                      <a:pPr>
+                        <a:buNone/>
+                      </a:pPr>
+                      <a:r>
+                        <a:rPr lang="en-US" sz="1100"/>
+                        <a:t>GET /api/bikeshare/stations/map in server/index.js</a:t>
+                      </a:r>
+                    </a:p>
+                  </a:txBody>
+                  <a:tcPr marL="30861" marR="30861" marT="15430" marB="15430" anchor="ctr"/>
+                </a:tc>
+                <a:extLst>
+                  <a:ext uri="{0D108BD9-81ED-4DB2-BD59-A6C34878D82A}">
+                    <a16:rowId xmlns:a16="http://schemas.microsoft.com/office/drawing/2014/main" val="3683163184"/>
+                  </a:ext>
+                </a:extLst>
+              </a:tr>
+              <a:tr h="401187">
+                <a:tc>
+                  <a:txBody>
+                    <a:bodyPr/>
+                    <a:lstStyle/>
+                    <a:p>
+                      <a:pPr>
+                        <a:buNone/>
+                      </a:pPr>
+                      <a:r>
+                        <a:rPr lang="en-US" sz="1100"/>
+                        <a:t>Stations endpoint</a:t>
+                      </a:r>
+                    </a:p>
+                  </a:txBody>
+                  <a:tcPr marL="30861" marR="30861" marT="15430" marB="15430" anchor="ctr"/>
+                </a:tc>
+                <a:tc>
+                  <a:txBody>
+                    <a:bodyPr/>
+                    <a:lstStyle/>
+                    <a:p>
+                      <a:pPr>
+                        <a:buNone/>
+                      </a:pPr>
+                      <a:r>
+                        <a:rPr lang="en-US" sz="1100"/>
+                        <a:t>Provides searchable and sortable station inventory, including current bikes, docks, capacity, and operational status.</a:t>
+                      </a:r>
+                    </a:p>
+                  </a:txBody>
+                  <a:tcPr marL="30861" marR="30861" marT="15430" marB="15430" anchor="ctr"/>
+                </a:tc>
+                <a:tc>
+                  <a:txBody>
+                    <a:bodyPr/>
+                    <a:lstStyle/>
+                    <a:p>
+                      <a:pPr>
+                        <a:buNone/>
+                      </a:pPr>
+                      <a:r>
+                        <a:rPr lang="en-US" sz="1100"/>
+                        <a:t>GET /api/bikeshare/stations in server/index.js</a:t>
+                      </a:r>
+                    </a:p>
+                  </a:txBody>
+                  <a:tcPr marL="30861" marR="30861" marT="15430" marB="15430" anchor="ctr"/>
+                </a:tc>
+                <a:extLst>
+                  <a:ext uri="{0D108BD9-81ED-4DB2-BD59-A6C34878D82A}">
+                    <a16:rowId xmlns:a16="http://schemas.microsoft.com/office/drawing/2014/main" val="2369251241"/>
+                  </a:ext>
+                </a:extLst>
+              </a:tr>
+              <a:tr h="401187">
+                <a:tc>
+                  <a:txBody>
+                    <a:bodyPr/>
+                    <a:lstStyle/>
+                    <a:p>
+                      <a:pPr>
+                        <a:buNone/>
+                      </a:pPr>
+                      <a:r>
+                        <a:rPr lang="en-US" sz="1100"/>
+                        <a:t>History endpoint</a:t>
+                      </a:r>
+                    </a:p>
+                  </a:txBody>
+                  <a:tcPr marL="30861" marR="30861" marT="15430" marB="15430" anchor="ctr"/>
+                </a:tc>
+                <a:tc>
+                  <a:txBody>
+                    <a:bodyPr/>
+                    <a:lstStyle/>
+                    <a:p>
+                      <a:pPr>
+                        <a:buNone/>
+                      </a:pPr>
+                      <a:r>
+                        <a:rPr lang="en-US" sz="1100"/>
+                        <a:t>Retrieves timestamped bike and dock availability for a selected station to support the historical chart.</a:t>
+                      </a:r>
+                    </a:p>
+                  </a:txBody>
+                  <a:tcPr marL="30861" marR="30861" marT="15430" marB="15430" anchor="ctr"/>
+                </a:tc>
+                <a:tc>
+                  <a:txBody>
+                    <a:bodyPr/>
+                    <a:lstStyle/>
+                    <a:p>
+                      <a:pPr>
+                        <a:buNone/>
+                      </a:pPr>
+                      <a:r>
+                        <a:rPr lang="en-US" sz="1100"/>
+                        <a:t>GET /api/bikeshare/stations/:stationId/history in server/index.js</a:t>
+                      </a:r>
+                    </a:p>
+                  </a:txBody>
+                  <a:tcPr marL="30861" marR="30861" marT="15430" marB="15430" anchor="ctr"/>
+                </a:tc>
+                <a:extLst>
+                  <a:ext uri="{0D108BD9-81ED-4DB2-BD59-A6C34878D82A}">
+                    <a16:rowId xmlns:a16="http://schemas.microsoft.com/office/drawing/2014/main" val="3982469232"/>
+                  </a:ext>
+                </a:extLst>
+              </a:tr>
+              <a:tr h="401187">
+                <a:tc>
+                  <a:txBody>
+                    <a:bodyPr/>
+                    <a:lstStyle/>
+                    <a:p>
+                      <a:pPr>
+                        <a:buNone/>
+                      </a:pPr>
+                      <a:r>
+                        <a:rPr lang="en-US" sz="1100"/>
+                        <a:t>Input validation</a:t>
+                      </a:r>
+                    </a:p>
+                  </a:txBody>
+                  <a:tcPr marL="30861" marR="30861" marT="15430" marB="15430" anchor="ctr"/>
+                </a:tc>
+                <a:tc>
+                  <a:txBody>
+                    <a:bodyPr/>
+                    <a:lstStyle/>
+                    <a:p>
+                      <a:pPr>
+                        <a:buNone/>
+                      </a:pPr>
+                      <a:r>
+                        <a:rPr lang="en-US" sz="1100"/>
+                        <a:t>Validates pagination limits, offsets, alert severity, station conditions, and sorting options before building queries.</a:t>
+                      </a:r>
+                    </a:p>
+                  </a:txBody>
+                  <a:tcPr marL="30861" marR="30861" marT="15430" marB="15430" anchor="ctr"/>
+                </a:tc>
+                <a:tc>
+                  <a:txBody>
+                    <a:bodyPr/>
+                    <a:lstStyle/>
+                    <a:p>
+                      <a:pPr>
+                        <a:buNone/>
+                      </a:pPr>
+                      <a:r>
+                        <a:rPr lang="en-US" sz="1100"/>
+                        <a:t>server/index.js</a:t>
+                      </a:r>
+                    </a:p>
+                  </a:txBody>
+                  <a:tcPr marL="30861" marR="30861" marT="15430" marB="15430" anchor="ctr"/>
+                </a:tc>
+                <a:extLst>
+                  <a:ext uri="{0D108BD9-81ED-4DB2-BD59-A6C34878D82A}">
+                    <a16:rowId xmlns:a16="http://schemas.microsoft.com/office/drawing/2014/main" val="354831428"/>
+                  </a:ext>
+                </a:extLst>
+              </a:tr>
+              <a:tr h="308606">
+                <a:tc>
+                  <a:txBody>
+                    <a:bodyPr/>
+                    <a:lstStyle/>
+                    <a:p>
+                      <a:pPr>
+                        <a:buNone/>
+                      </a:pPr>
+                      <a:r>
+                        <a:rPr lang="en-US" sz="1100"/>
+                        <a:t>Error handling</a:t>
+                      </a:r>
+                    </a:p>
+                  </a:txBody>
+                  <a:tcPr marL="30861" marR="30861" marT="15430" marB="15430" anchor="ctr"/>
+                </a:tc>
+                <a:tc>
+                  <a:txBody>
+                    <a:bodyPr/>
+                    <a:lstStyle/>
+                    <a:p>
+                      <a:pPr>
+                        <a:buNone/>
+                      </a:pPr>
+                      <a:r>
+                        <a:rPr lang="en-US" sz="1100"/>
+                        <a:t>Catches database failures and returns safe HTTP error responses without exposing internal details.</a:t>
+                      </a:r>
+                    </a:p>
+                  </a:txBody>
+                  <a:tcPr marL="30861" marR="30861" marT="15430" marB="15430" anchor="ctr"/>
+                </a:tc>
+                <a:tc>
+                  <a:txBody>
+                    <a:bodyPr/>
+                    <a:lstStyle/>
+                    <a:p>
+                      <a:pPr>
+                        <a:buNone/>
+                      </a:pPr>
+                      <a:r>
+                        <a:rPr lang="en-US" sz="1100"/>
+                        <a:t>server/index.js</a:t>
+                      </a:r>
+                    </a:p>
+                  </a:txBody>
+                  <a:tcPr marL="30861" marR="30861" marT="15430" marB="15430" anchor="ctr"/>
+                </a:tc>
+                <a:extLst>
+                  <a:ext uri="{0D108BD9-81ED-4DB2-BD59-A6C34878D82A}">
+                    <a16:rowId xmlns:a16="http://schemas.microsoft.com/office/drawing/2014/main" val="1092568120"/>
+                  </a:ext>
+                </a:extLst>
+              </a:tr>
+              <a:tr h="401187">
+                <a:tc>
+                  <a:txBody>
+                    <a:bodyPr/>
+                    <a:lstStyle/>
+                    <a:p>
+                      <a:pPr>
+                        <a:buNone/>
+                      </a:pPr>
+                      <a:r>
+                        <a:rPr lang="en-US" sz="1100"/>
+                        <a:t>Testing</a:t>
+                      </a:r>
+                    </a:p>
+                  </a:txBody>
+                  <a:tcPr marL="30861" marR="30861" marT="15430" marB="15430" anchor="ctr"/>
+                </a:tc>
+                <a:tc>
+                  <a:txBody>
+                    <a:bodyPr/>
+                    <a:lstStyle/>
+                    <a:p>
+                      <a:pPr>
+                        <a:buNone/>
+                      </a:pPr>
+                      <a:r>
+                        <a:rPr lang="en-US" sz="1100"/>
+                        <a:t>Tests validation, sorting, API responses, database failures, alerts, and map data using Node’s built-in test runner.</a:t>
+                      </a:r>
+                    </a:p>
+                  </a:txBody>
+                  <a:tcPr marL="30861" marR="30861" marT="15430" marB="15430" anchor="ctr"/>
+                </a:tc>
+                <a:tc>
+                  <a:txBody>
+                    <a:bodyPr/>
+                    <a:lstStyle/>
+                    <a:p>
+                      <a:pPr>
+                        <a:buNone/>
+                      </a:pPr>
+                      <a:r>
+                        <a:rPr lang="en-US" sz="1100"/>
+                        <a:t>server/index.test.js</a:t>
+                      </a:r>
+                    </a:p>
+                  </a:txBody>
+                  <a:tcPr marL="30861" marR="30861" marT="15430" marB="15430" anchor="ctr"/>
+                </a:tc>
+                <a:extLst>
+                  <a:ext uri="{0D108BD9-81ED-4DB2-BD59-A6C34878D82A}">
+                    <a16:rowId xmlns:a16="http://schemas.microsoft.com/office/drawing/2014/main" val="436553653"/>
+                  </a:ext>
+                </a:extLst>
+              </a:tr>
+              <a:tr h="308606">
+                <a:tc>
+                  <a:txBody>
+                    <a:bodyPr/>
+                    <a:lstStyle/>
+                    <a:p>
+                      <a:pPr>
+                        <a:buNone/>
+                      </a:pPr>
+                      <a:r>
+                        <a:rPr lang="en-US" sz="1100"/>
+                        <a:t>Deployment</a:t>
+                      </a:r>
+                    </a:p>
+                  </a:txBody>
+                  <a:tcPr marL="30861" marR="30861" marT="15430" marB="15430" anchor="ctr"/>
+                </a:tc>
+                <a:tc>
+                  <a:txBody>
+                    <a:bodyPr/>
+                    <a:lstStyle/>
+                    <a:p>
+                      <a:pPr>
+                        <a:buNone/>
+                      </a:pPr>
+                      <a:r>
+                        <a:rPr lang="en-US" sz="1100"/>
+                        <a:t>Packages the API and Node.js dependencies in Docker and exposes it through port 5000.</a:t>
+                      </a:r>
+                    </a:p>
+                  </a:txBody>
+                  <a:tcPr marL="30861" marR="30861" marT="15430" marB="15430" anchor="ctr"/>
+                </a:tc>
+                <a:tc>
+                  <a:txBody>
+                    <a:bodyPr/>
+                    <a:lstStyle/>
+                    <a:p>
+                      <a:pPr>
+                        <a:buNone/>
+                      </a:pPr>
+                      <a:r>
+                        <a:rPr lang="en-US" sz="1100" dirty="0"/>
+                        <a:t>server/</a:t>
+                      </a:r>
+                      <a:r>
+                        <a:rPr lang="en-US" sz="1100" dirty="0" err="1"/>
+                        <a:t>Dockerfile</a:t>
+                      </a:r>
+                      <a:r>
+                        <a:rPr lang="en-US" sz="1100" dirty="0"/>
+                        <a:t>, server/</a:t>
+                      </a:r>
+                      <a:r>
+                        <a:rPr lang="en-US" sz="1100" dirty="0" err="1"/>
+                        <a:t>package.json</a:t>
+                      </a:r>
+                      <a:r>
+                        <a:rPr lang="en-US" sz="1100" dirty="0"/>
+                        <a:t>, and </a:t>
+                      </a:r>
+                      <a:r>
+                        <a:rPr lang="en-US" sz="1100" dirty="0" err="1"/>
+                        <a:t>compose.yaml</a:t>
+                      </a:r>
+                      <a:endParaRPr lang="en-US" sz="1100" dirty="0"/>
+                    </a:p>
+                  </a:txBody>
+                  <a:tcPr marL="30861" marR="30861" marT="15430" marB="15430" anchor="ctr"/>
+                </a:tc>
+                <a:extLst>
+                  <a:ext uri="{0D108BD9-81ED-4DB2-BD59-A6C34878D82A}">
+                    <a16:rowId xmlns:a16="http://schemas.microsoft.com/office/drawing/2014/main" val="3835274177"/>
+                  </a:ext>
+                </a:extLst>
+              </a:tr>
+            </a:tbl>
+          </a:graphicData>
+        </a:graphic>
+      </p:graphicFrame>
+    </p:spTree>
+    <p:extLst>
+      <p:ext uri="{BB962C8B-B14F-4D97-AF65-F5344CB8AC3E}">
+        <p14:creationId xmlns:p14="http://schemas.microsoft.com/office/powerpoint/2010/main" val="69078770"/>
+      </p:ext>
+    </p:extLst>
+  </p:cSld>
+  <p:clrMapOvr>
+    <a:masterClrMapping/>
+  </p:clrMapOvr>
+</p:sld>
+</file>
+
+<file path=ppt/slides/slide12.xml><?xml version="1.0" encoding="utf-8"?>
+<p:sld xmlns:a="http://schemas.openxmlformats.org/drawingml/2006/main" xmlns:r="http://schemas.openxmlformats.org/officeDocument/2006/relationships" xmlns:p="http://schemas.openxmlformats.org/presentationml/2006/main">
+  <p:cSld>
+    <p:spTree>
+      <p:nvGrpSpPr>
+        <p:cNvPr id="1" name="">
+          <a:extLst>
+            <a:ext uri="{FF2B5EF4-FFF2-40B4-BE49-F238E27FC236}">
+              <a16:creationId xmlns:a16="http://schemas.microsoft.com/office/drawing/2014/main" id="{C16E43A6-F04D-47F7-A58E-70B3C98295F9}"/>
+            </a:ext>
+          </a:extLst>
+        </p:cNvPr>
+        <p:cNvGrpSpPr/>
+        <p:nvPr/>
+      </p:nvGrpSpPr>
+      <p:grpSpPr>
+        <a:xfrm>
+          <a:off x="0" y="0"/>
+          <a:ext cx="0" cy="0"/>
+          <a:chOff x="0" y="0"/>
+          <a:chExt cx="0" cy="0"/>
+        </a:xfrm>
+      </p:grpSpPr>
+      <p:sp>
+        <p:nvSpPr>
+          <p:cNvPr id="21" name="Rectangle 20">
+            <a:extLst>
+              <a:ext uri="{FF2B5EF4-FFF2-40B4-BE49-F238E27FC236}">
+                <a16:creationId xmlns:a16="http://schemas.microsoft.com/office/drawing/2014/main" id="{F315090B-1995-4A68-9F99-0EE6A5889F58}"/>
+              </a:ext>
+            </a:extLst>
+          </p:cNvPr>
+          <p:cNvSpPr>
+            <a:spLocks noGrp="1"/>
+          </p:cNvSpPr>
+          <p:nvPr/>
+        </p:nvSpPr>
+        <p:spPr>
+          <a:xfrm>
+            <a:off x="400050" y="276225"/>
+            <a:ext cx="4953000" cy="209550"/>
+          </a:xfrm>
+          <a:prstGeom prst="rect">
+            <a:avLst/>
+          </a:prstGeom>
+        </p:spPr>
+        <p:txBody>
+          <a:bodyPr wrap="square" lIns="0" tIns="0" rIns="0" bIns="0" anchor="t">
+            <a:normAutofit/>
+          </a:bodyPr>
+          <a:lstStyle/>
+          <a:p>
+            <a:pPr algn="l">
+              <a:defRPr sz="975" b="1">
+                <a:solidFill>
+                  <a:srgbClr val="D9232E"/>
+                </a:solidFill>
+                <a:latin typeface="Arial"/>
+                <a:ea typeface="Arial"/>
+                <a:cs typeface="Arial"/>
+              </a:defRPr>
+            </a:pPr>
+            <a:r>
+              <a:t>CAPITAL BIKESHARE OPERATIONS</a:t>
+            </a:r>
+          </a:p>
+        </p:txBody>
+      </p:sp>
+      <p:sp>
+        <p:nvSpPr>
+          <p:cNvPr id="2" name="Rectangle 1">
+            <a:extLst>
+              <a:ext uri="{FF2B5EF4-FFF2-40B4-BE49-F238E27FC236}">
+                <a16:creationId xmlns:a16="http://schemas.microsoft.com/office/drawing/2014/main" id="{2D531190-DE33-F507-CCFA-5A8E45BFE9F3}"/>
+              </a:ext>
+            </a:extLst>
+          </p:cNvPr>
+          <p:cNvSpPr>
+            <a:spLocks noGrp="1"/>
+          </p:cNvSpPr>
+          <p:nvPr/>
+        </p:nvSpPr>
+        <p:spPr>
+          <a:xfrm>
+            <a:off x="400050" y="581025"/>
+            <a:ext cx="11391900" cy="628650"/>
+          </a:xfrm>
+          <a:prstGeom prst="rect">
+            <a:avLst/>
+          </a:prstGeom>
+        </p:spPr>
+        <p:txBody>
+          <a:bodyPr wrap="square" lIns="0" tIns="0" rIns="0" bIns="0" anchor="t">
+            <a:normAutofit/>
+          </a:bodyPr>
+          <a:lstStyle/>
+          <a:p>
+            <a:pPr algn="l">
+              <a:defRPr sz="3000" b="1">
+                <a:solidFill>
+                  <a:srgbClr val="15191D"/>
+                </a:solidFill>
+                <a:latin typeface="Arial"/>
+                <a:ea typeface="Arial"/>
+                <a:cs typeface="Arial"/>
+              </a:defRPr>
+            </a:pPr>
+            <a:r>
+              <a:rPr lang="en-US" dirty="0"/>
+              <a:t>Dashboard(React Front-End) </a:t>
+            </a:r>
+            <a:endParaRPr dirty="0"/>
+          </a:p>
+        </p:txBody>
+      </p:sp>
+      <p:cxnSp>
+        <p:nvCxnSpPr>
+          <p:cNvPr id="23" name="Straight Arrow Connector 22">
+            <a:extLst>
+              <a:ext uri="{FF2B5EF4-FFF2-40B4-BE49-F238E27FC236}">
+                <a16:creationId xmlns:a16="http://schemas.microsoft.com/office/drawing/2014/main" id="{5E44558C-A245-34FA-97CB-B58F4150F7C4}"/>
+              </a:ext>
+            </a:extLst>
+          </p:cNvPr>
+          <p:cNvCxnSpPr/>
+          <p:nvPr/>
+        </p:nvCxnSpPr>
+        <p:spPr>
+          <a:xfrm>
+            <a:off x="400050" y="1304925"/>
+            <a:ext cx="11391900" cy="9525"/>
+          </a:xfrm>
+          <a:prstGeom prst="straightConnector1">
+            <a:avLst/>
+          </a:prstGeom>
+          <a:ln w="9525">
+            <a:solidFill>
+              <a:srgbClr val="C9CED2"/>
+            </a:solidFill>
+            <a:prstDash val="solid"/>
+          </a:ln>
+        </p:spPr>
+      </p:cxnSp>
+      <p:sp>
+        <p:nvSpPr>
+          <p:cNvPr id="5" name="Rectangle: Rounded Corners 4">
+            <a:extLst>
+              <a:ext uri="{FF2B5EF4-FFF2-40B4-BE49-F238E27FC236}">
+                <a16:creationId xmlns:a16="http://schemas.microsoft.com/office/drawing/2014/main" id="{B91D5C29-7470-2013-6E73-A5529DB234B4}"/>
+              </a:ext>
+            </a:extLst>
+          </p:cNvPr>
+          <p:cNvSpPr>
+            <a:spLocks noGrp="1"/>
+          </p:cNvSpPr>
+          <p:nvPr/>
+        </p:nvSpPr>
+        <p:spPr>
+          <a:xfrm>
+            <a:off x="67733" y="2244724"/>
+            <a:ext cx="3776133" cy="2763305"/>
+          </a:xfrm>
+          <a:prstGeom prst="roundRect">
+            <a:avLst>
+              <a:gd name="adj" fmla="val 2797"/>
+            </a:avLst>
+          </a:prstGeom>
+          <a:solidFill>
+            <a:srgbClr val="EAF6FB"/>
+          </a:solidFill>
+          <a:ln w="9525">
+            <a:solidFill>
+              <a:srgbClr val="C9CED2"/>
+            </a:solidFill>
+            <a:prstDash val="solid"/>
+          </a:ln>
+        </p:spPr>
+        <p:txBody>
+          <a:bodyPr/>
+          <a:lstStyle/>
+          <a:p>
+            <a:endParaRPr lang="en-US"/>
+          </a:p>
+        </p:txBody>
+      </p:sp>
+      <p:sp>
+        <p:nvSpPr>
+          <p:cNvPr id="7" name="Rectangle 6">
+            <a:extLst>
+              <a:ext uri="{FF2B5EF4-FFF2-40B4-BE49-F238E27FC236}">
+                <a16:creationId xmlns:a16="http://schemas.microsoft.com/office/drawing/2014/main" id="{1A72D72D-03F4-4D26-A8E7-D05D89EC55DF}"/>
+              </a:ext>
+            </a:extLst>
+          </p:cNvPr>
+          <p:cNvSpPr>
+            <a:spLocks noGrp="1"/>
+          </p:cNvSpPr>
+          <p:nvPr/>
+        </p:nvSpPr>
+        <p:spPr>
+          <a:xfrm>
+            <a:off x="67733" y="2802467"/>
+            <a:ext cx="3776133" cy="1634066"/>
+          </a:xfrm>
+          <a:prstGeom prst="rect">
+            <a:avLst/>
+          </a:prstGeom>
+        </p:spPr>
+        <p:txBody>
+          <a:bodyPr wrap="square" lIns="0" tIns="0" rIns="0" bIns="0" anchor="t">
+            <a:normAutofit lnSpcReduction="10000"/>
+          </a:bodyPr>
+          <a:lstStyle/>
+          <a:p>
+            <a:r>
+              <a:rPr lang="en-US" sz="1100" dirty="0"/>
+              <a:t>The Dashboard features the following:</a:t>
+            </a:r>
+          </a:p>
+          <a:p>
+            <a:endParaRPr lang="en-US" sz="1100" dirty="0"/>
+          </a:p>
+          <a:p>
+            <a:pPr marL="171450" indent="-171450">
+              <a:buFont typeface="Arial" panose="020B0604020202020204" pitchFamily="34" charset="0"/>
+              <a:buChar char="•"/>
+            </a:pPr>
+            <a:r>
+              <a:rPr lang="en-US" sz="1100" dirty="0"/>
+              <a:t>Network summary showing total stations, available bikes, empty stations, and low-bike stations.</a:t>
+            </a:r>
+          </a:p>
+          <a:p>
+            <a:pPr marL="171450" indent="-171450">
+              <a:buFont typeface="Arial" panose="020B0604020202020204" pitchFamily="34" charset="0"/>
+              <a:buChar char="•"/>
+            </a:pPr>
+            <a:r>
+              <a:rPr lang="en-US" sz="1100" dirty="0"/>
+              <a:t>Interactive map with red, yellow, and green markers based on bike availability.</a:t>
+            </a:r>
+          </a:p>
+          <a:p>
+            <a:pPr marL="171450" indent="-171450">
+              <a:buFont typeface="Arial" panose="020B0604020202020204" pitchFamily="34" charset="0"/>
+              <a:buChar char="•"/>
+            </a:pPr>
+            <a:r>
+              <a:rPr lang="en-US" sz="1100" dirty="0"/>
+              <a:t>Active warning and critical depletion alerts.</a:t>
+            </a:r>
+          </a:p>
+          <a:p>
+            <a:pPr marL="171450" indent="-171450">
+              <a:buFont typeface="Arial" panose="020B0604020202020204" pitchFamily="34" charset="0"/>
+              <a:buChar char="•"/>
+            </a:pPr>
+            <a:r>
+              <a:rPr lang="en-US" sz="1100" dirty="0"/>
+              <a:t>Searchable and sortable live station inventory.</a:t>
+            </a:r>
+          </a:p>
+          <a:p>
+            <a:pPr marL="171450" indent="-171450">
+              <a:buFont typeface="Arial" panose="020B0604020202020204" pitchFamily="34" charset="0"/>
+              <a:buChar char="•"/>
+            </a:pPr>
+            <a:r>
+              <a:rPr lang="en-US" sz="1100" dirty="0"/>
+              <a:t>Station details including bikes, docks, capacity, and location.</a:t>
+            </a:r>
+          </a:p>
+          <a:p>
+            <a:pPr marL="171450" indent="-171450">
+              <a:buFont typeface="Arial" panose="020B0604020202020204" pitchFamily="34" charset="0"/>
+              <a:buChar char="•"/>
+            </a:pPr>
+            <a:r>
+              <a:rPr lang="en-US" sz="1100" dirty="0"/>
+              <a:t>Historical availability chart for each selected station.</a:t>
+            </a:r>
+          </a:p>
+        </p:txBody>
+      </p:sp>
+      <p:pic>
+        <p:nvPicPr>
+          <p:cNvPr id="9" name="Picture 8">
+            <a:extLst>
+              <a:ext uri="{FF2B5EF4-FFF2-40B4-BE49-F238E27FC236}">
+                <a16:creationId xmlns:a16="http://schemas.microsoft.com/office/drawing/2014/main" id="{0BB78305-A1FB-4042-D9BE-F7125E0436AE}"/>
+              </a:ext>
+            </a:extLst>
+          </p:cNvPr>
+          <p:cNvPicPr>
+            <a:picLocks noChangeAspect="1"/>
+          </p:cNvPicPr>
+          <p:nvPr/>
+        </p:nvPicPr>
+        <p:blipFill>
+          <a:blip r:embed="rId3">
+            <a:extLst>
+              <a:ext uri="{28A0092B-C50C-407E-A947-70E740481C1C}">
+                <a14:useLocalDpi xmlns:a14="http://schemas.microsoft.com/office/drawing/2010/main" val="0"/>
+              </a:ext>
+            </a:extLst>
+          </a:blip>
+          <a:stretch>
+            <a:fillRect/>
+          </a:stretch>
+        </p:blipFill>
+        <p:spPr>
+          <a:xfrm>
+            <a:off x="3976157" y="1314450"/>
+            <a:ext cx="5608266" cy="3247825"/>
+          </a:xfrm>
+          <a:prstGeom prst="rect">
+            <a:avLst/>
+          </a:prstGeom>
+        </p:spPr>
+      </p:pic>
+      <p:pic>
+        <p:nvPicPr>
+          <p:cNvPr id="4" name="Picture 3">
+            <a:extLst>
+              <a:ext uri="{FF2B5EF4-FFF2-40B4-BE49-F238E27FC236}">
+                <a16:creationId xmlns:a16="http://schemas.microsoft.com/office/drawing/2014/main" id="{83052F48-504B-B89E-C880-25897604BA2D}"/>
+              </a:ext>
+            </a:extLst>
+          </p:cNvPr>
+          <p:cNvPicPr>
+            <a:picLocks noChangeAspect="1"/>
+          </p:cNvPicPr>
+          <p:nvPr/>
+        </p:nvPicPr>
+        <p:blipFill>
+          <a:blip r:embed="rId4">
+            <a:extLst>
+              <a:ext uri="{28A0092B-C50C-407E-A947-70E740481C1C}">
+                <a14:useLocalDpi xmlns:a14="http://schemas.microsoft.com/office/drawing/2010/main" val="0"/>
+              </a:ext>
+            </a:extLst>
+          </a:blip>
+          <a:stretch>
+            <a:fillRect/>
+          </a:stretch>
+        </p:blipFill>
+        <p:spPr>
+          <a:xfrm>
+            <a:off x="6373697" y="3513548"/>
+            <a:ext cx="5750570" cy="2988962"/>
+          </a:xfrm>
+          <a:prstGeom prst="rect">
+            <a:avLst/>
+          </a:prstGeom>
+        </p:spPr>
+      </p:pic>
+    </p:spTree>
+    <p:extLst>
+      <p:ext uri="{BB962C8B-B14F-4D97-AF65-F5344CB8AC3E}">
+        <p14:creationId xmlns:p14="http://schemas.microsoft.com/office/powerpoint/2010/main" val="2844188485"/>
+      </p:ext>
+    </p:extLst>
+  </p:cSld>
+  <p:clrMapOvr>
+    <a:masterClrMapping/>
+  </p:clrMapOvr>
+</p:sld>
+</file>
+
+<file path=ppt/slides/slide13.xml><?xml version="1.0" encoding="utf-8"?>
+<p:sld xmlns:a="http://schemas.openxmlformats.org/drawingml/2006/main" xmlns:r="http://schemas.openxmlformats.org/officeDocument/2006/relationships" xmlns:p="http://schemas.openxmlformats.org/presentationml/2006/main">
+  <p:cSld>
+    <p:bg>
+      <p:bgPr>
+        <a:solidFill>
+          <a:srgbClr val="FFFFFF"/>
+        </a:solidFill>
+        <a:effectLst/>
+      </p:bgPr>
+    </p:bg>
+    <p:spTree>
+      <p:nvGrpSpPr>
+        <p:cNvPr id="1" name=""/>
+        <p:cNvGrpSpPr/>
+        <p:nvPr/>
+      </p:nvGrpSpPr>
+      <p:grpSpPr>
+        <a:xfrm>
+          <a:off x="0" y="0"/>
+          <a:ext cx="0" cy="0"/>
+          <a:chOff x="0" y="0"/>
+          <a:chExt cx="0" cy="0"/>
+        </a:xfrm>
+      </p:grpSpPr>
+      <p:sp>
+        <p:nvSpPr>
+          <p:cNvPr id="21" name="Rectangle 20">
+            <a:extLst>
+              <a:ext uri="{FF2B5EF4-FFF2-40B4-BE49-F238E27FC236}">
+                <a16:creationId xmlns:a16="http://schemas.microsoft.com/office/drawing/2014/main" id="{9B8A19F4-04E5-4FB9-AC53-F5DFC8A2AAEF}"/>
+              </a:ext>
+            </a:extLst>
+          </p:cNvPr>
+          <p:cNvSpPr>
+            <a:spLocks noGrp="1"/>
+          </p:cNvSpPr>
+          <p:nvPr/>
+        </p:nvSpPr>
+        <p:spPr>
+          <a:xfrm>
+            <a:off x="400050" y="276225"/>
+            <a:ext cx="4953000" cy="209550"/>
+          </a:xfrm>
+          <a:prstGeom prst="rect">
+            <a:avLst/>
+          </a:prstGeom>
+        </p:spPr>
+        <p:txBody>
+          <a:bodyPr wrap="square" lIns="0" tIns="0" rIns="0" bIns="0" anchor="t">
+            <a:normAutofit/>
+          </a:bodyPr>
+          <a:lstStyle/>
+          <a:p>
+            <a:pPr algn="l">
+              <a:defRPr sz="975" b="1">
+                <a:solidFill>
+                  <a:srgbClr val="D9232E"/>
+                </a:solidFill>
+                <a:latin typeface="Arial"/>
+                <a:ea typeface="Arial"/>
+                <a:cs typeface="Arial"/>
+              </a:defRPr>
+            </a:pPr>
+            <a:r>
+              <a:t>CAPITAL BIKESHARE OPERATIONS</a:t>
+            </a:r>
+          </a:p>
+        </p:txBody>
+      </p:sp>
+      <p:sp>
+        <p:nvSpPr>
+          <p:cNvPr id="2" name="Rectangle 1">
+            <a:extLst>
+              <a:ext uri="{FF2B5EF4-FFF2-40B4-BE49-F238E27FC236}">
+                <a16:creationId xmlns:a16="http://schemas.microsoft.com/office/drawing/2014/main" id="{98374FC4-9F5E-4CAE-9FDD-E8E8A4E8655A}"/>
+              </a:ext>
+            </a:extLst>
+          </p:cNvPr>
+          <p:cNvSpPr>
+            <a:spLocks noGrp="1"/>
+          </p:cNvSpPr>
+          <p:nvPr/>
+        </p:nvSpPr>
+        <p:spPr>
+          <a:xfrm>
+            <a:off x="400050" y="581025"/>
+            <a:ext cx="11391900" cy="628650"/>
+          </a:xfrm>
+          <a:prstGeom prst="rect">
+            <a:avLst/>
+          </a:prstGeom>
+        </p:spPr>
+        <p:txBody>
+          <a:bodyPr wrap="square" lIns="0" tIns="0" rIns="0" bIns="0" anchor="t">
+            <a:normAutofit/>
+          </a:bodyPr>
+          <a:lstStyle/>
+          <a:p>
+            <a:pPr algn="l">
+              <a:defRPr sz="3000" b="1">
+                <a:solidFill>
+                  <a:srgbClr val="15191D"/>
+                </a:solidFill>
+                <a:latin typeface="Arial"/>
+                <a:ea typeface="Arial"/>
+                <a:cs typeface="Arial"/>
+              </a:defRPr>
+            </a:pPr>
+            <a:r>
+              <a:rPr lang="en-US" dirty="0"/>
+              <a:t>Docker Configuration</a:t>
+            </a:r>
+            <a:endParaRPr dirty="0"/>
+          </a:p>
+        </p:txBody>
+      </p:sp>
+      <p:cxnSp>
+        <p:nvCxnSpPr>
+          <p:cNvPr id="23" name="Straight Arrow Connector 22"/>
+          <p:cNvCxnSpPr/>
+          <p:nvPr/>
+        </p:nvCxnSpPr>
+        <p:spPr>
+          <a:xfrm>
+            <a:off x="400050" y="1304925"/>
+            <a:ext cx="11391900" cy="9525"/>
+          </a:xfrm>
+          <a:prstGeom prst="straightConnector1">
+            <a:avLst/>
+          </a:prstGeom>
+          <a:ln w="9525">
+            <a:solidFill>
+              <a:srgbClr val="C9CED2"/>
+            </a:solidFill>
+            <a:prstDash val="solid"/>
+          </a:ln>
+        </p:spPr>
+      </p:cxnSp>
+      <p:sp>
+        <p:nvSpPr>
+          <p:cNvPr id="5" name="Rectangle: Rounded Corners 4">
+            <a:extLst>
+              <a:ext uri="{FF2B5EF4-FFF2-40B4-BE49-F238E27FC236}">
+                <a16:creationId xmlns:a16="http://schemas.microsoft.com/office/drawing/2014/main" id="{D35044B4-CED6-4F97-B68B-C99A645A61C8}"/>
+              </a:ext>
+            </a:extLst>
+          </p:cNvPr>
+          <p:cNvSpPr>
+            <a:spLocks noGrp="1"/>
+          </p:cNvSpPr>
+          <p:nvPr/>
+        </p:nvSpPr>
+        <p:spPr>
+          <a:xfrm>
+            <a:off x="67733" y="2244724"/>
+            <a:ext cx="3776133" cy="2763305"/>
+          </a:xfrm>
+          <a:prstGeom prst="roundRect">
+            <a:avLst>
+              <a:gd name="adj" fmla="val 2797"/>
+            </a:avLst>
+          </a:prstGeom>
+          <a:solidFill>
+            <a:srgbClr val="EAF6FB"/>
+          </a:solidFill>
+          <a:ln w="9525">
+            <a:solidFill>
+              <a:srgbClr val="C9CED2"/>
+            </a:solidFill>
+            <a:prstDash val="solid"/>
+          </a:ln>
+        </p:spPr>
+        <p:txBody>
+          <a:bodyPr/>
+          <a:lstStyle/>
+          <a:p>
+            <a:endParaRPr lang="en-US"/>
+          </a:p>
+        </p:txBody>
+      </p:sp>
+      <p:sp>
+        <p:nvSpPr>
+          <p:cNvPr id="7" name="Rectangle 6">
+            <a:extLst>
+              <a:ext uri="{FF2B5EF4-FFF2-40B4-BE49-F238E27FC236}">
+                <a16:creationId xmlns:a16="http://schemas.microsoft.com/office/drawing/2014/main" id="{AE2D5A61-9CC2-494F-8932-CB1E3ED26C2C}"/>
+              </a:ext>
+            </a:extLst>
+          </p:cNvPr>
+          <p:cNvSpPr>
+            <a:spLocks noGrp="1"/>
+          </p:cNvSpPr>
+          <p:nvPr/>
+        </p:nvSpPr>
+        <p:spPr>
+          <a:xfrm>
+            <a:off x="281516" y="2349500"/>
+            <a:ext cx="3562350" cy="2658529"/>
+          </a:xfrm>
+          <a:prstGeom prst="rect">
+            <a:avLst/>
+          </a:prstGeom>
+        </p:spPr>
+        <p:txBody>
+          <a:bodyPr wrap="square" lIns="0" tIns="0" rIns="0" bIns="0" anchor="t">
+            <a:normAutofit fontScale="92500"/>
+          </a:bodyPr>
+          <a:lstStyle/>
+          <a:p>
+            <a:r>
+              <a:rPr lang="en-US" sz="1100" dirty="0"/>
+              <a:t>Complete application running as one Docker Compose project. Docker Compose creates and connects nine containers, with each container responsible for one part of the system.</a:t>
+            </a:r>
+          </a:p>
+          <a:p>
+            <a:endParaRPr lang="en-US" sz="1100" dirty="0"/>
+          </a:p>
+          <a:p>
+            <a:pPr marL="285750" lvl="0" indent="-285750">
+              <a:buFont typeface="Arial" panose="020B0604020202020204" pitchFamily="34" charset="0"/>
+              <a:buChar char="•"/>
+            </a:pPr>
+            <a:r>
+              <a:rPr lang="en-US" sz="1100" b="1" dirty="0"/>
+              <a:t>client-1</a:t>
+            </a:r>
+            <a:r>
+              <a:rPr lang="en-US" sz="1100" dirty="0"/>
+              <a:t>: Serves the React dashboard on port 5173.</a:t>
+            </a:r>
+          </a:p>
+          <a:p>
+            <a:pPr marL="285750" lvl="0" indent="-285750">
+              <a:buFont typeface="Arial" panose="020B0604020202020204" pitchFamily="34" charset="0"/>
+              <a:buChar char="•"/>
+            </a:pPr>
+            <a:r>
+              <a:rPr lang="en-US" sz="1100" b="1" dirty="0"/>
+              <a:t>server-1</a:t>
+            </a:r>
+            <a:r>
+              <a:rPr lang="en-US" sz="1100" dirty="0"/>
+              <a:t>: Provides the Express API on port 5000.</a:t>
+            </a:r>
+          </a:p>
+          <a:p>
+            <a:pPr marL="285750" lvl="0" indent="-285750">
+              <a:buFont typeface="Arial" panose="020B0604020202020204" pitchFamily="34" charset="0"/>
+              <a:buChar char="•"/>
+            </a:pPr>
+            <a:r>
+              <a:rPr lang="en-US" sz="1100" b="1" dirty="0"/>
+              <a:t>db-1</a:t>
+            </a:r>
+            <a:r>
+              <a:rPr lang="en-US" sz="1100" dirty="0"/>
+              <a:t>: Runs PostgreSQL 18. Port 5433 on the host maps to PostgreSQL's internal port 5432.</a:t>
+            </a:r>
+          </a:p>
+          <a:p>
+            <a:pPr marL="285750" lvl="0" indent="-285750">
+              <a:buFont typeface="Arial" panose="020B0604020202020204" pitchFamily="34" charset="0"/>
+              <a:buChar char="•"/>
+            </a:pPr>
+            <a:r>
+              <a:rPr lang="en-US" sz="1100" b="1" dirty="0"/>
+              <a:t>airflow-1</a:t>
+            </a:r>
+            <a:r>
+              <a:rPr lang="en-US" sz="1100" dirty="0"/>
+              <a:t>: Schedules and monitors the ETL pipeline through port 8080.</a:t>
+            </a:r>
+          </a:p>
+          <a:p>
+            <a:pPr marL="285750" lvl="0" indent="-285750">
+              <a:buFont typeface="Arial" panose="020B0604020202020204" pitchFamily="34" charset="0"/>
+              <a:buChar char="•"/>
+            </a:pPr>
+            <a:r>
+              <a:rPr lang="en-US" sz="1100" b="1" dirty="0"/>
+              <a:t>kafka-1</a:t>
+            </a:r>
+            <a:r>
+              <a:rPr lang="en-US" sz="1100" dirty="0"/>
+              <a:t>: Runs the Kafka broker and exposes port 9092.</a:t>
+            </a:r>
+          </a:p>
+          <a:p>
+            <a:pPr marL="285750" lvl="0" indent="-285750">
+              <a:buFont typeface="Arial" panose="020B0604020202020204" pitchFamily="34" charset="0"/>
+              <a:buChar char="•"/>
+            </a:pPr>
+            <a:r>
+              <a:rPr lang="en-US" sz="1100" b="1" dirty="0"/>
+              <a:t>station-producer-1</a:t>
+            </a:r>
+            <a:r>
+              <a:rPr lang="en-US" sz="1100" dirty="0"/>
+              <a:t>: Fetches station data and publishes new observations to Kafka.</a:t>
+            </a:r>
+          </a:p>
+          <a:p>
+            <a:pPr marL="285750" lvl="0" indent="-285750">
+              <a:buFont typeface="Arial" panose="020B0604020202020204" pitchFamily="34" charset="0"/>
+              <a:buChar char="•"/>
+            </a:pPr>
+            <a:r>
+              <a:rPr lang="en-US" sz="1100" b="1" dirty="0"/>
+              <a:t>alert-consumer-1</a:t>
+            </a:r>
+            <a:r>
+              <a:rPr lang="en-US" sz="1100" dirty="0"/>
+              <a:t>: Consumes Kafka events, detects depletion risks, and stores alerts in PostgreSQL.</a:t>
+            </a:r>
+          </a:p>
+          <a:p>
+            <a:pPr marL="285750" lvl="0" indent="-285750">
+              <a:buFont typeface="Arial" panose="020B0604020202020204" pitchFamily="34" charset="0"/>
+              <a:buChar char="•"/>
+            </a:pPr>
+            <a:r>
+              <a:rPr lang="en-US" sz="1100" b="1" dirty="0"/>
+              <a:t>kafka-init-1</a:t>
+            </a:r>
+            <a:r>
+              <a:rPr lang="en-US" sz="1100" dirty="0"/>
+              <a:t>: Creates the station-status topic and then exits.</a:t>
+            </a:r>
+          </a:p>
+          <a:p>
+            <a:pPr marL="285750" lvl="0" indent="-285750">
+              <a:buFont typeface="Arial" panose="020B0604020202020204" pitchFamily="34" charset="0"/>
+              <a:buChar char="•"/>
+            </a:pPr>
+            <a:r>
+              <a:rPr lang="en-US" sz="1100" b="1" dirty="0"/>
+              <a:t>db-schema-1</a:t>
+            </a:r>
+            <a:r>
+              <a:rPr lang="en-US" sz="1100" dirty="0"/>
+              <a:t>: Applies the database schema and then exits.</a:t>
+            </a:r>
+          </a:p>
+        </p:txBody>
+      </p:sp>
+      <p:pic>
+        <p:nvPicPr>
+          <p:cNvPr id="4" name="Picture 3">
+            <a:extLst>
+              <a:ext uri="{FF2B5EF4-FFF2-40B4-BE49-F238E27FC236}">
+                <a16:creationId xmlns:a16="http://schemas.microsoft.com/office/drawing/2014/main" id="{FF4C7546-3A47-CA8E-3FA0-958B348037C6}"/>
+              </a:ext>
+            </a:extLst>
+          </p:cNvPr>
+          <p:cNvPicPr>
+            <a:picLocks noChangeAspect="1"/>
+          </p:cNvPicPr>
+          <p:nvPr/>
+        </p:nvPicPr>
+        <p:blipFill>
+          <a:blip r:embed="rId3">
+            <a:extLst>
+              <a:ext uri="{28A0092B-C50C-407E-A947-70E740481C1C}">
+                <a14:useLocalDpi xmlns:a14="http://schemas.microsoft.com/office/drawing/2010/main" val="0"/>
+              </a:ext>
+            </a:extLst>
+          </a:blip>
+          <a:stretch>
+            <a:fillRect/>
+          </a:stretch>
+        </p:blipFill>
+        <p:spPr>
+          <a:xfrm>
+            <a:off x="3914038" y="1382182"/>
+            <a:ext cx="8277961" cy="4888186"/>
+          </a:xfrm>
+          <a:prstGeom prst="rect">
+            <a:avLst/>
+          </a:prstGeom>
+        </p:spPr>
+      </p:pic>
+    </p:spTree>
+    <p:extLst>
+      <p:ext uri="{BB962C8B-B14F-4D97-AF65-F5344CB8AC3E}">
+        <p14:creationId xmlns:p14="http://schemas.microsoft.com/office/powerpoint/2010/main" val="180954338"/>
+      </p:ext>
+    </p:extLst>
+  </p:cSld>
+  <p:clrMapOvr>
+    <a:masterClrMapping/>
+  </p:clrMapOvr>
+</p:sld>
+</file>
+
+<file path=ppt/slides/slide14.xml><?xml version="1.0" encoding="utf-8"?>
+<p:sld xmlns:a="http://schemas.openxmlformats.org/drawingml/2006/main" xmlns:r="http://schemas.openxmlformats.org/officeDocument/2006/relationships" xmlns:p="http://schemas.openxmlformats.org/presentationml/2006/main">
+  <p:cSld>
+    <p:spTree>
+      <p:nvGrpSpPr>
+        <p:cNvPr id="1" name="">
+          <a:extLst>
+            <a:ext uri="{FF2B5EF4-FFF2-40B4-BE49-F238E27FC236}">
+              <a16:creationId xmlns:a16="http://schemas.microsoft.com/office/drawing/2014/main" id="{574D7688-CBA9-ADED-21B0-25ABBFFC22DC}"/>
+            </a:ext>
+          </a:extLst>
+        </p:cNvPr>
+        <p:cNvGrpSpPr/>
+        <p:nvPr/>
+      </p:nvGrpSpPr>
+      <p:grpSpPr>
+        <a:xfrm>
+          <a:off x="0" y="0"/>
+          <a:ext cx="0" cy="0"/>
+          <a:chOff x="0" y="0"/>
+          <a:chExt cx="0" cy="0"/>
+        </a:xfrm>
+      </p:grpSpPr>
+      <p:sp>
+        <p:nvSpPr>
+          <p:cNvPr id="2" name="Rectangle 1">
+            <a:extLst>
+              <a:ext uri="{FF2B5EF4-FFF2-40B4-BE49-F238E27FC236}">
+                <a16:creationId xmlns:a16="http://schemas.microsoft.com/office/drawing/2014/main" id="{1DBC91FF-A782-C960-3D7B-391A76E72E4C}"/>
+              </a:ext>
+            </a:extLst>
+          </p:cNvPr>
+          <p:cNvSpPr>
+            <a:spLocks noGrp="1"/>
+          </p:cNvSpPr>
+          <p:nvPr/>
+        </p:nvSpPr>
+        <p:spPr>
+          <a:xfrm>
+            <a:off x="1888067" y="3149070"/>
+            <a:ext cx="7987211" cy="1660525"/>
+          </a:xfrm>
+          <a:prstGeom prst="rect">
+            <a:avLst/>
+          </a:prstGeom>
+        </p:spPr>
+        <p:txBody>
+          <a:bodyPr wrap="square" lIns="0" tIns="0" rIns="0" bIns="0" anchor="t">
+            <a:normAutofit/>
+          </a:bodyPr>
+          <a:lstStyle/>
+          <a:p>
+            <a:pPr algn="ctr">
+              <a:defRPr sz="3000" b="1">
+                <a:solidFill>
+                  <a:srgbClr val="15191D"/>
+                </a:solidFill>
+                <a:latin typeface="Arial"/>
+                <a:ea typeface="Arial"/>
+                <a:cs typeface="Arial"/>
+              </a:defRPr>
+            </a:pPr>
+            <a:r>
+              <a:rPr lang="en-US" sz="4800" dirty="0"/>
+              <a:t>The End. Thank you</a:t>
+            </a:r>
+            <a:endParaRPr sz="4800" dirty="0"/>
+          </a:p>
+        </p:txBody>
+      </p:sp>
+    </p:spTree>
+    <p:extLst>
+      <p:ext uri="{BB962C8B-B14F-4D97-AF65-F5344CB8AC3E}">
+        <p14:creationId xmlns:p14="http://schemas.microsoft.com/office/powerpoint/2010/main" val="1253824190"/>
+      </p:ext>
+    </p:extLst>
+  </p:cSld>
+  <p:clrMapOvr>
+    <a:masterClrMapping/>
+  </p:clrMapOvr>
+</p:sld>
+</file>
+
 <file path=ppt/slides/slide2.xml><?xml version="1.0" encoding="utf-8"?>
 <p:sld xmlns:a="http://schemas.openxmlformats.org/drawingml/2006/main" xmlns:r="http://schemas.openxmlformats.org/officeDocument/2006/relationships" xmlns:p="http://schemas.openxmlformats.org/presentationml/2006/main">
   <p:cSld>
@@ -2265,7 +6096,7 @@
         </p:nvSpPr>
         <p:spPr>
           <a:xfrm>
-            <a:off x="5886450" y="2119313"/>
+            <a:off x="5886450" y="2219324"/>
             <a:ext cx="1581150" cy="457200"/>
           </a:xfrm>
           <a:prstGeom prst="rect">
@@ -2289,8 +6120,9 @@
               </a:defRPr>
             </a:pPr>
             <a:r>
+              <a:rPr dirty="0"/>
               <a:t>PostgreSQL
-history</a:t>
+</a:t>
             </a:r>
           </a:p>
         </p:txBody>
@@ -2377,9 +6209,34 @@
               </a:defRPr>
             </a:pPr>
             <a:r>
+              <a:rPr lang="en-US" dirty="0"/>
+              <a:t>Express</a:t>
+            </a:r>
+            <a:r>
               <a:rPr dirty="0"/>
-              <a:t>Node API</a:t>
+              <a:t> API</a:t>
             </a:r>
+            <a:r>
+              <a:rPr lang="en-US" dirty="0"/>
+              <a:t> </a:t>
+            </a:r>
+          </a:p>
+          <a:p>
+            <a:pPr algn="ctr">
+              <a:defRPr sz="1500" b="1">
+                <a:solidFill>
+                  <a:srgbClr val="15191D"/>
+                </a:solidFill>
+                <a:latin typeface="Arial"/>
+                <a:ea typeface="Arial"/>
+                <a:cs typeface="Arial"/>
+              </a:defRPr>
+            </a:pPr>
+            <a:r>
+              <a:rPr lang="en-US" dirty="0"/>
+              <a:t>(Back-End)</a:t>
+            </a:r>
+            <a:endParaRPr dirty="0"/>
           </a:p>
         </p:txBody>
       </p:sp>
@@ -2441,8 +6298,8 @@
         </p:nvSpPr>
         <p:spPr>
           <a:xfrm>
-            <a:off x="10496550" y="2119313"/>
-            <a:ext cx="1581150" cy="457200"/>
+            <a:off x="10439400" y="2119313"/>
+            <a:ext cx="1695450" cy="628645"/>
           </a:xfrm>
           <a:prstGeom prst="rect">
             <a:avLst/>
@@ -2450,7 +6307,7 @@
         </p:spPr>
         <p:txBody>
           <a:bodyPr wrap="square" lIns="0" tIns="0" rIns="0" bIns="0" anchor="ctr">
-            <a:normAutofit/>
+            <a:normAutofit fontScale="92500" lnSpcReduction="10000"/>
           </a:bodyPr>
           <a:lstStyle/>
           <a:p>
@@ -2465,9 +6322,43 @@
               </a:defRPr>
             </a:pPr>
             <a:r>
+              <a:rPr dirty="0"/>
               <a:t>React
-dashboard</a:t>
+</a:t>
             </a:r>
+            <a:r>
+              <a:rPr lang="en-US" dirty="0"/>
+              <a:t>Dashboard</a:t>
+            </a:r>
+          </a:p>
+          <a:p>
+            <a:pPr algn="ctr">
+              <a:defRPr sz="1500" b="1">
+                <a:solidFill>
+                  <a:srgbClr val="15191D"/>
+                </a:solidFill>
+                <a:latin typeface="Arial"/>
+                <a:ea typeface="Arial"/>
+                <a:cs typeface="Arial"/>
+              </a:defRPr>
+            </a:pPr>
+            <a:r>
+              <a:rPr lang="en-US" dirty="0"/>
+              <a:t>(Front-End)</a:t>
+            </a:r>
+          </a:p>
+          <a:p>
+            <a:pPr algn="ctr">
+              <a:defRPr sz="1500" b="1">
+                <a:solidFill>
+                  <a:srgbClr val="15191D"/>
+                </a:solidFill>
+                <a:latin typeface="Arial"/>
+                <a:ea typeface="Arial"/>
+                <a:cs typeface="Arial"/>
+              </a:defRPr>
+            </a:pPr>
+            <a:endParaRPr dirty="0"/>
           </a:p>
         </p:txBody>
       </p:sp>
@@ -3258,17 +7149,15 @@
 <file path=ppt/slides/slide3.xml><?xml version="1.0" encoding="utf-8"?>
 <p:sld xmlns:a="http://schemas.openxmlformats.org/drawingml/2006/main" xmlns:r="http://schemas.openxmlformats.org/officeDocument/2006/relationships" xmlns:p="http://schemas.openxmlformats.org/presentationml/2006/main">
   <p:cSld>
-    <p:bg>
-      <p:bgPr>
-        <a:solidFill>
-          <a:srgbClr val="FFFFFF"/>
-        </a:solidFill>
-        <a:effectLst/>
-      </p:bgPr>
-    </p:bg>
     <p:spTree>
       <p:nvGrpSpPr>
-        <p:cNvPr id="1" name=""/>
+        <p:cNvPr id="1" name="">
+          <a:extLst>
+            <a:ext uri="{FF2B5EF4-FFF2-40B4-BE49-F238E27FC236}">
+              <a16:creationId xmlns:a16="http://schemas.microsoft.com/office/drawing/2014/main" id="{8D6F837C-207C-789A-02F9-2A727B0C1087}"/>
+            </a:ext>
+          </a:extLst>
+        </p:cNvPr>
         <p:cNvGrpSpPr/>
         <p:nvPr/>
       </p:nvGrpSpPr>
@@ -3282,10 +7171,10 @@
       </p:grpSpPr>
       <p:sp>
         <p:nvSpPr>
-          <p:cNvPr id="21" name="Rectangle 20">
-            <a:extLst>
-              <a:ext uri="{FF2B5EF4-FFF2-40B4-BE49-F238E27FC236}">
-                <a16:creationId xmlns:a16="http://schemas.microsoft.com/office/drawing/2014/main" id="{9B8A19F4-04E5-4FB9-AC53-F5DFC8A2AAEF}"/>
+          <p:cNvPr id="32" name="Rectangle 31">
+            <a:extLst>
+              <a:ext uri="{FF2B5EF4-FFF2-40B4-BE49-F238E27FC236}">
+                <a16:creationId xmlns:a16="http://schemas.microsoft.com/office/drawing/2014/main" id="{660AE8A2-1511-4756-47AD-F51D801009D6}"/>
               </a:ext>
             </a:extLst>
           </p:cNvPr>
@@ -3330,7 +7219,7 @@
           <p:cNvPr id="2" name="Rectangle 1">
             <a:extLst>
               <a:ext uri="{FF2B5EF4-FFF2-40B4-BE49-F238E27FC236}">
-                <a16:creationId xmlns:a16="http://schemas.microsoft.com/office/drawing/2014/main" id="{98374FC4-9F5E-4CAE-9FDD-E8E8A4E8655A}"/>
+                <a16:creationId xmlns:a16="http://schemas.microsoft.com/office/drawing/2014/main" id="{61AF15BC-D6D9-9C64-A379-B2A2A2702D22}"/>
               </a:ext>
             </a:extLst>
           </p:cNvPr>
@@ -3350,12 +7239,12 @@
         </p:spPr>
         <p:txBody>
           <a:bodyPr wrap="square" lIns="0" tIns="0" rIns="0" bIns="0" anchor="t">
-            <a:normAutofit/>
+            <a:normAutofit fontScale="96455"/>
           </a:bodyPr>
           <a:lstStyle/>
           <a:p>
-            <a:pPr algn="l">
-              <a:defRPr sz="3000" b="1">
+            <a:pPr>
+              <a:defRPr sz="3600" b="1">
                 <a:solidFill>
                   <a:srgbClr val="15191D"/>
                 </a:solidFill>
@@ -3365,8 +7254,13 @@
               </a:defRPr>
             </a:pPr>
             <a:r>
-              <a:rPr lang="en-US" dirty="0"/>
-              <a:t>Docker Configuration</a:t>
+              <a:rPr lang="en-US" sz="3600" b="1" dirty="0">
+                <a:solidFill>
+                  <a:srgbClr val="15191D"/>
+                </a:solidFill>
+                <a:latin typeface="Arial"/>
+              </a:rPr>
+              <a:t>Project Structure and Component Responsibilities</a:t>
             </a:r>
             <a:endParaRPr dirty="0"/>
           </a:p>
@@ -3374,7 +7268,13 @@
       </p:sp>
       <p:cxnSp>
         <p:nvCxnSpPr>
-          <p:cNvPr id="23" name="Straight Arrow Connector 22"/>
+          <p:cNvPr id="34" name="Straight Arrow Connector 33">
+            <a:extLst>
+              <a:ext uri="{FF2B5EF4-FFF2-40B4-BE49-F238E27FC236}">
+                <a16:creationId xmlns:a16="http://schemas.microsoft.com/office/drawing/2014/main" id="{EF46D887-5521-7BAC-0168-64742EA6C36C}"/>
+              </a:ext>
+            </a:extLst>
+          </p:cNvPr>
           <p:cNvCxnSpPr/>
           <p:nvPr/>
         </p:nvCxnSpPr>
@@ -3394,12 +7294,484 @@
           </a:ln>
         </p:spPr>
       </p:cxnSp>
-      <p:sp>
-        <p:nvSpPr>
-          <p:cNvPr id="5" name="Rectangle: Rounded Corners 4">
-            <a:extLst>
-              <a:ext uri="{FF2B5EF4-FFF2-40B4-BE49-F238E27FC236}">
-                <a16:creationId xmlns:a16="http://schemas.microsoft.com/office/drawing/2014/main" id="{D35044B4-CED6-4F97-B68B-C99A645A61C8}"/>
+      <p:graphicFrame>
+        <p:nvGraphicFramePr>
+          <p:cNvPr id="5" name="Table 4">
+            <a:extLst>
+              <a:ext uri="{FF2B5EF4-FFF2-40B4-BE49-F238E27FC236}">
+                <a16:creationId xmlns:a16="http://schemas.microsoft.com/office/drawing/2014/main" id="{0E13C1AC-11D0-4D70-23E6-042B19C226F4}"/>
+              </a:ext>
+            </a:extLst>
+          </p:cNvPr>
+          <p:cNvGraphicFramePr>
+            <a:graphicFrameLocks noGrp="1"/>
+          </p:cNvGraphicFramePr>
+          <p:nvPr/>
+        </p:nvGraphicFramePr>
+        <p:xfrm>
+          <a:off x="1994329" y="1825625"/>
+          <a:ext cx="8203341" cy="4351338"/>
+        </p:xfrm>
+        <a:graphic>
+          <a:graphicData uri="http://schemas.openxmlformats.org/drawingml/2006/table">
+            <a:tbl>
+              <a:tblPr>
+                <a:tableStyleId>{5C22544A-7EE6-4342-B048-85BDC9FD1C3A}</a:tableStyleId>
+              </a:tblPr>
+              <a:tblGrid>
+                <a:gridCol w="2734447">
+                  <a:extLst>
+                    <a:ext uri="{9D8B030D-6E8A-4147-A177-3AD203B41FA5}">
+                      <a16:colId xmlns:a16="http://schemas.microsoft.com/office/drawing/2014/main" val="986536464"/>
+                    </a:ext>
+                  </a:extLst>
+                </a:gridCol>
+                <a:gridCol w="2734447">
+                  <a:extLst>
+                    <a:ext uri="{9D8B030D-6E8A-4147-A177-3AD203B41FA5}">
+                      <a16:colId xmlns:a16="http://schemas.microsoft.com/office/drawing/2014/main" val="3523680562"/>
+                    </a:ext>
+                  </a:extLst>
+                </a:gridCol>
+                <a:gridCol w="2734447">
+                  <a:extLst>
+                    <a:ext uri="{9D8B030D-6E8A-4147-A177-3AD203B41FA5}">
+                      <a16:colId xmlns:a16="http://schemas.microsoft.com/office/drawing/2014/main" val="3727476819"/>
+                    </a:ext>
+                  </a:extLst>
+                </a:gridCol>
+              </a:tblGrid>
+              <a:tr h="285334">
+                <a:tc>
+                  <a:txBody>
+                    <a:bodyPr/>
+                    <a:lstStyle/>
+                    <a:p>
+                      <a:pPr>
+                        <a:buNone/>
+                      </a:pPr>
+                      <a:r>
+                        <a:rPr lang="en-US" sz="1400"/>
+                        <a:t>Component</a:t>
+                      </a:r>
+                    </a:p>
+                  </a:txBody>
+                  <a:tcPr marL="71333" marR="71333" marT="35667" marB="35667" anchor="ctr"/>
+                </a:tc>
+                <a:tc>
+                  <a:txBody>
+                    <a:bodyPr/>
+                    <a:lstStyle/>
+                    <a:p>
+                      <a:pPr>
+                        <a:buNone/>
+                      </a:pPr>
+                      <a:r>
+                        <a:rPr lang="en-US" sz="1400"/>
+                        <a:t>Folder</a:t>
+                      </a:r>
+                    </a:p>
+                  </a:txBody>
+                  <a:tcPr marL="71333" marR="71333" marT="35667" marB="35667" anchor="ctr"/>
+                </a:tc>
+                <a:tc>
+                  <a:txBody>
+                    <a:bodyPr/>
+                    <a:lstStyle/>
+                    <a:p>
+                      <a:pPr>
+                        <a:buNone/>
+                      </a:pPr>
+                      <a:r>
+                        <a:rPr lang="en-US" sz="1400"/>
+                        <a:t>Responsibility</a:t>
+                      </a:r>
+                    </a:p>
+                  </a:txBody>
+                  <a:tcPr marL="71333" marR="71333" marT="35667" marB="35667" anchor="ctr"/>
+                </a:tc>
+                <a:extLst>
+                  <a:ext uri="{0D108BD9-81ED-4DB2-BD59-A6C34878D82A}">
+                    <a16:rowId xmlns:a16="http://schemas.microsoft.com/office/drawing/2014/main" val="2449423869"/>
+                  </a:ext>
+                </a:extLst>
+              </a:tr>
+              <a:tr h="713334">
+                <a:tc>
+                  <a:txBody>
+                    <a:bodyPr/>
+                    <a:lstStyle/>
+                    <a:p>
+                      <a:pPr>
+                        <a:buNone/>
+                      </a:pPr>
+                      <a:r>
+                        <a:rPr lang="en-US" sz="1400"/>
+                        <a:t>Frontend</a:t>
+                      </a:r>
+                    </a:p>
+                  </a:txBody>
+                  <a:tcPr marL="71333" marR="71333" marT="35667" marB="35667" anchor="ctr"/>
+                </a:tc>
+                <a:tc>
+                  <a:txBody>
+                    <a:bodyPr/>
+                    <a:lstStyle/>
+                    <a:p>
+                      <a:pPr>
+                        <a:buNone/>
+                      </a:pPr>
+                      <a:r>
+                        <a:rPr lang="en-US" sz="1400"/>
+                        <a:t>client/</a:t>
+                      </a:r>
+                    </a:p>
+                  </a:txBody>
+                  <a:tcPr marL="71333" marR="71333" marT="35667" marB="35667" anchor="ctr"/>
+                </a:tc>
+                <a:tc>
+                  <a:txBody>
+                    <a:bodyPr/>
+                    <a:lstStyle/>
+                    <a:p>
+                      <a:pPr>
+                        <a:buNone/>
+                      </a:pPr>
+                      <a:r>
+                        <a:rPr lang="en-US" sz="1400"/>
+                        <a:t>React and Leaflet dashboard for station inventory, maps, alerts, and history.</a:t>
+                      </a:r>
+                    </a:p>
+                  </a:txBody>
+                  <a:tcPr marL="71333" marR="71333" marT="35667" marB="35667" anchor="ctr"/>
+                </a:tc>
+                <a:extLst>
+                  <a:ext uri="{0D108BD9-81ED-4DB2-BD59-A6C34878D82A}">
+                    <a16:rowId xmlns:a16="http://schemas.microsoft.com/office/drawing/2014/main" val="1062372333"/>
+                  </a:ext>
+                </a:extLst>
+              </a:tr>
+              <a:tr h="713334">
+                <a:tc>
+                  <a:txBody>
+                    <a:bodyPr/>
+                    <a:lstStyle/>
+                    <a:p>
+                      <a:pPr>
+                        <a:buNone/>
+                      </a:pPr>
+                      <a:r>
+                        <a:rPr lang="en-US" sz="1400"/>
+                        <a:t>Backend</a:t>
+                      </a:r>
+                    </a:p>
+                  </a:txBody>
+                  <a:tcPr marL="71333" marR="71333" marT="35667" marB="35667" anchor="ctr"/>
+                </a:tc>
+                <a:tc>
+                  <a:txBody>
+                    <a:bodyPr/>
+                    <a:lstStyle/>
+                    <a:p>
+                      <a:pPr>
+                        <a:buNone/>
+                      </a:pPr>
+                      <a:r>
+                        <a:rPr lang="en-US" sz="1400"/>
+                        <a:t>server/</a:t>
+                      </a:r>
+                    </a:p>
+                  </a:txBody>
+                  <a:tcPr marL="71333" marR="71333" marT="35667" marB="35667" anchor="ctr"/>
+                </a:tc>
+                <a:tc>
+                  <a:txBody>
+                    <a:bodyPr/>
+                    <a:lstStyle/>
+                    <a:p>
+                      <a:pPr>
+                        <a:buNone/>
+                      </a:pPr>
+                      <a:r>
+                        <a:rPr lang="en-US" sz="1400"/>
+                        <a:t>Express API that retrieves PostgreSQL data and provides it to the frontend.</a:t>
+                      </a:r>
+                    </a:p>
+                  </a:txBody>
+                  <a:tcPr marL="71333" marR="71333" marT="35667" marB="35667" anchor="ctr"/>
+                </a:tc>
+                <a:extLst>
+                  <a:ext uri="{0D108BD9-81ED-4DB2-BD59-A6C34878D82A}">
+                    <a16:rowId xmlns:a16="http://schemas.microsoft.com/office/drawing/2014/main" val="663500591"/>
+                  </a:ext>
+                </a:extLst>
+              </a:tr>
+              <a:tr h="499334">
+                <a:tc>
+                  <a:txBody>
+                    <a:bodyPr/>
+                    <a:lstStyle/>
+                    <a:p>
+                      <a:pPr>
+                        <a:buNone/>
+                      </a:pPr>
+                      <a:r>
+                        <a:rPr lang="en-US" sz="1400"/>
+                        <a:t>Database</a:t>
+                      </a:r>
+                    </a:p>
+                  </a:txBody>
+                  <a:tcPr marL="71333" marR="71333" marT="35667" marB="35667" anchor="ctr"/>
+                </a:tc>
+                <a:tc>
+                  <a:txBody>
+                    <a:bodyPr/>
+                    <a:lstStyle/>
+                    <a:p>
+                      <a:pPr>
+                        <a:buNone/>
+                      </a:pPr>
+                      <a:r>
+                        <a:rPr lang="en-US" sz="1400"/>
+                        <a:t>database/</a:t>
+                      </a:r>
+                    </a:p>
+                  </a:txBody>
+                  <a:tcPr marL="71333" marR="71333" marT="35667" marB="35667" anchor="ctr"/>
+                </a:tc>
+                <a:tc>
+                  <a:txBody>
+                    <a:bodyPr/>
+                    <a:lstStyle/>
+                    <a:p>
+                      <a:pPr>
+                        <a:buNone/>
+                      </a:pPr>
+                      <a:r>
+                        <a:rPr lang="en-US" sz="1400"/>
+                        <a:t>PostgreSQL schema for raw data, stations, status history, and alerts.</a:t>
+                      </a:r>
+                    </a:p>
+                  </a:txBody>
+                  <a:tcPr marL="71333" marR="71333" marT="35667" marB="35667" anchor="ctr"/>
+                </a:tc>
+                <a:extLst>
+                  <a:ext uri="{0D108BD9-81ED-4DB2-BD59-A6C34878D82A}">
+                    <a16:rowId xmlns:a16="http://schemas.microsoft.com/office/drawing/2014/main" val="1007257302"/>
+                  </a:ext>
+                </a:extLst>
+              </a:tr>
+              <a:tr h="713334">
+                <a:tc>
+                  <a:txBody>
+                    <a:bodyPr/>
+                    <a:lstStyle/>
+                    <a:p>
+                      <a:pPr>
+                        <a:buNone/>
+                      </a:pPr>
+                      <a:r>
+                        <a:rPr lang="en-US" sz="1400"/>
+                        <a:t>Data pipeline</a:t>
+                      </a:r>
+                    </a:p>
+                  </a:txBody>
+                  <a:tcPr marL="71333" marR="71333" marT="35667" marB="35667" anchor="ctr"/>
+                </a:tc>
+                <a:tc>
+                  <a:txBody>
+                    <a:bodyPr/>
+                    <a:lstStyle/>
+                    <a:p>
+                      <a:pPr>
+                        <a:buNone/>
+                      </a:pPr>
+                      <a:r>
+                        <a:rPr lang="en-US" sz="1400"/>
+                        <a:t>pipeline/</a:t>
+                      </a:r>
+                    </a:p>
+                  </a:txBody>
+                  <a:tcPr marL="71333" marR="71333" marT="35667" marB="35667" anchor="ctr"/>
+                </a:tc>
+                <a:tc>
+                  <a:txBody>
+                    <a:bodyPr/>
+                    <a:lstStyle/>
+                    <a:p>
+                      <a:pPr>
+                        <a:buNone/>
+                      </a:pPr>
+                      <a:r>
+                        <a:rPr lang="en-US" sz="1400"/>
+                        <a:t>Python code for extracting, cleaning, validating, and loading bikeshare data.</a:t>
+                      </a:r>
+                    </a:p>
+                  </a:txBody>
+                  <a:tcPr marL="71333" marR="71333" marT="35667" marB="35667" anchor="ctr"/>
+                </a:tc>
+                <a:extLst>
+                  <a:ext uri="{0D108BD9-81ED-4DB2-BD59-A6C34878D82A}">
+                    <a16:rowId xmlns:a16="http://schemas.microsoft.com/office/drawing/2014/main" val="3565887584"/>
+                  </a:ext>
+                </a:extLst>
+              </a:tr>
+              <a:tr h="713334">
+                <a:tc>
+                  <a:txBody>
+                    <a:bodyPr/>
+                    <a:lstStyle/>
+                    <a:p>
+                      <a:pPr>
+                        <a:buNone/>
+                      </a:pPr>
+                      <a:r>
+                        <a:rPr lang="en-US" sz="1400"/>
+                        <a:t>Orchestration</a:t>
+                      </a:r>
+                    </a:p>
+                  </a:txBody>
+                  <a:tcPr marL="71333" marR="71333" marT="35667" marB="35667" anchor="ctr"/>
+                </a:tc>
+                <a:tc>
+                  <a:txBody>
+                    <a:bodyPr/>
+                    <a:lstStyle/>
+                    <a:p>
+                      <a:pPr>
+                        <a:buNone/>
+                      </a:pPr>
+                      <a:r>
+                        <a:rPr lang="en-US" sz="1400"/>
+                        <a:t>airflow/</a:t>
+                      </a:r>
+                    </a:p>
+                  </a:txBody>
+                  <a:tcPr marL="71333" marR="71333" marT="35667" marB="35667" anchor="ctr"/>
+                </a:tc>
+                <a:tc>
+                  <a:txBody>
+                    <a:bodyPr/>
+                    <a:lstStyle/>
+                    <a:p>
+                      <a:pPr>
+                        <a:buNone/>
+                      </a:pPr>
+                      <a:r>
+                        <a:rPr lang="en-US" sz="1400"/>
+                        <a:t>Airflow DAG that schedules and monitors the ETL pipeline every five minutes.</a:t>
+                      </a:r>
+                    </a:p>
+                  </a:txBody>
+                  <a:tcPr marL="71333" marR="71333" marT="35667" marB="35667" anchor="ctr"/>
+                </a:tc>
+                <a:extLst>
+                  <a:ext uri="{0D108BD9-81ED-4DB2-BD59-A6C34878D82A}">
+                    <a16:rowId xmlns:a16="http://schemas.microsoft.com/office/drawing/2014/main" val="2314163143"/>
+                  </a:ext>
+                </a:extLst>
+              </a:tr>
+              <a:tr h="713334">
+                <a:tc>
+                  <a:txBody>
+                    <a:bodyPr/>
+                    <a:lstStyle/>
+                    <a:p>
+                      <a:pPr>
+                        <a:buNone/>
+                      </a:pPr>
+                      <a:r>
+                        <a:rPr lang="en-US" sz="1400"/>
+                        <a:t>Event streaming</a:t>
+                      </a:r>
+                    </a:p>
+                  </a:txBody>
+                  <a:tcPr marL="71333" marR="71333" marT="35667" marB="35667" anchor="ctr"/>
+                </a:tc>
+                <a:tc>
+                  <a:txBody>
+                    <a:bodyPr/>
+                    <a:lstStyle/>
+                    <a:p>
+                      <a:pPr>
+                        <a:buNone/>
+                      </a:pPr>
+                      <a:r>
+                        <a:rPr lang="en-US" sz="1400" dirty="0"/>
+                        <a:t>streaming/</a:t>
+                      </a:r>
+                    </a:p>
+                  </a:txBody>
+                  <a:tcPr marL="71333" marR="71333" marT="35667" marB="35667" anchor="ctr"/>
+                </a:tc>
+                <a:tc>
+                  <a:txBody>
+                    <a:bodyPr/>
+                    <a:lstStyle/>
+                    <a:p>
+                      <a:pPr>
+                        <a:buNone/>
+                      </a:pPr>
+                      <a:r>
+                        <a:rPr lang="en-US" sz="1400" dirty="0"/>
+                        <a:t>Kafka producer, alert consumer, depletion-detection rules, and tests.</a:t>
+                      </a:r>
+                    </a:p>
+                  </a:txBody>
+                  <a:tcPr marL="71333" marR="71333" marT="35667" marB="35667" anchor="ctr"/>
+                </a:tc>
+                <a:extLst>
+                  <a:ext uri="{0D108BD9-81ED-4DB2-BD59-A6C34878D82A}">
+                    <a16:rowId xmlns:a16="http://schemas.microsoft.com/office/drawing/2014/main" val="4139485517"/>
+                  </a:ext>
+                </a:extLst>
+              </a:tr>
+            </a:tbl>
+          </a:graphicData>
+        </a:graphic>
+      </p:graphicFrame>
+    </p:spTree>
+    <p:extLst>
+      <p:ext uri="{BB962C8B-B14F-4D97-AF65-F5344CB8AC3E}">
+        <p14:creationId xmlns:p14="http://schemas.microsoft.com/office/powerpoint/2010/main" val="1661983185"/>
+      </p:ext>
+    </p:extLst>
+  </p:cSld>
+  <p:clrMapOvr>
+    <a:masterClrMapping/>
+  </p:clrMapOvr>
+</p:sld>
+</file>
+
+<file path=ppt/slides/slide4.xml><?xml version="1.0" encoding="utf-8"?>
+<p:sld xmlns:a="http://schemas.openxmlformats.org/drawingml/2006/main" xmlns:r="http://schemas.openxmlformats.org/officeDocument/2006/relationships" xmlns:p="http://schemas.openxmlformats.org/presentationml/2006/main">
+  <p:cSld>
+    <p:spTree>
+      <p:nvGrpSpPr>
+        <p:cNvPr id="1" name="">
+          <a:extLst>
+            <a:ext uri="{FF2B5EF4-FFF2-40B4-BE49-F238E27FC236}">
+              <a16:creationId xmlns:a16="http://schemas.microsoft.com/office/drawing/2014/main" id="{7C5B9979-7A77-0009-71C0-B49CBFBF8F91}"/>
+            </a:ext>
+          </a:extLst>
+        </p:cNvPr>
+        <p:cNvGrpSpPr/>
+        <p:nvPr/>
+      </p:nvGrpSpPr>
+      <p:grpSpPr>
+        <a:xfrm>
+          <a:off x="0" y="0"/>
+          <a:ext cx="0" cy="0"/>
+          <a:chOff x="0" y="0"/>
+          <a:chExt cx="0" cy="0"/>
+        </a:xfrm>
+      </p:grpSpPr>
+      <p:sp>
+        <p:nvSpPr>
+          <p:cNvPr id="32" name="Rectangle 31">
+            <a:extLst>
+              <a:ext uri="{FF2B5EF4-FFF2-40B4-BE49-F238E27FC236}">
+                <a16:creationId xmlns:a16="http://schemas.microsoft.com/office/drawing/2014/main" id="{15B2789E-6980-1D1F-0968-A8B12995FC52}"/>
               </a:ext>
             </a:extLst>
           </p:cNvPr>
@@ -3410,8 +7782,133 @@
         </p:nvSpPr>
         <p:spPr>
           <a:xfrm>
-            <a:off x="67733" y="2244724"/>
-            <a:ext cx="3776133" cy="2763305"/>
+            <a:off x="400050" y="276225"/>
+            <a:ext cx="4953000" cy="209550"/>
+          </a:xfrm>
+          <a:prstGeom prst="rect">
+            <a:avLst/>
+          </a:prstGeom>
+        </p:spPr>
+        <p:txBody>
+          <a:bodyPr wrap="square" lIns="0" tIns="0" rIns="0" bIns="0" anchor="t">
+            <a:normAutofit/>
+          </a:bodyPr>
+          <a:lstStyle/>
+          <a:p>
+            <a:pPr algn="l">
+              <a:defRPr sz="975" b="1">
+                <a:solidFill>
+                  <a:srgbClr val="D9232E"/>
+                </a:solidFill>
+                <a:latin typeface="Arial"/>
+                <a:ea typeface="Arial"/>
+                <a:cs typeface="Arial"/>
+              </a:defRPr>
+            </a:pPr>
+            <a:r>
+              <a:t>CAPITAL BIKESHARE OPERATIONS</a:t>
+            </a:r>
+          </a:p>
+        </p:txBody>
+      </p:sp>
+      <p:sp>
+        <p:nvSpPr>
+          <p:cNvPr id="2" name="Rectangle 1">
+            <a:extLst>
+              <a:ext uri="{FF2B5EF4-FFF2-40B4-BE49-F238E27FC236}">
+                <a16:creationId xmlns:a16="http://schemas.microsoft.com/office/drawing/2014/main" id="{97FA94B9-42AA-680D-F18E-A9D4E0505ADD}"/>
+              </a:ext>
+            </a:extLst>
+          </p:cNvPr>
+          <p:cNvSpPr>
+            <a:spLocks noGrp="1"/>
+          </p:cNvSpPr>
+          <p:nvPr/>
+        </p:nvSpPr>
+        <p:spPr>
+          <a:xfrm>
+            <a:off x="400050" y="581025"/>
+            <a:ext cx="11391900" cy="628650"/>
+          </a:xfrm>
+          <a:prstGeom prst="rect">
+            <a:avLst/>
+          </a:prstGeom>
+        </p:spPr>
+        <p:txBody>
+          <a:bodyPr wrap="square" lIns="0" tIns="0" rIns="0" bIns="0" anchor="t">
+            <a:normAutofit fontScale="96455"/>
+          </a:bodyPr>
+          <a:lstStyle/>
+          <a:p>
+            <a:pPr>
+              <a:defRPr sz="3600" b="1">
+                <a:solidFill>
+                  <a:srgbClr val="15191D"/>
+                </a:solidFill>
+                <a:latin typeface="Arial"/>
+                <a:ea typeface="Arial"/>
+                <a:cs typeface="Arial"/>
+              </a:defRPr>
+            </a:pPr>
+            <a:r>
+              <a:rPr lang="en-US" sz="3600" b="1" dirty="0">
+                <a:solidFill>
+                  <a:srgbClr val="15191D"/>
+                </a:solidFill>
+                <a:latin typeface="Arial"/>
+              </a:rPr>
+              <a:t>Capital Bikeshare GBFS API</a:t>
+            </a:r>
+            <a:endParaRPr dirty="0"/>
+          </a:p>
+        </p:txBody>
+      </p:sp>
+      <p:cxnSp>
+        <p:nvCxnSpPr>
+          <p:cNvPr id="34" name="Straight Arrow Connector 33">
+            <a:extLst>
+              <a:ext uri="{FF2B5EF4-FFF2-40B4-BE49-F238E27FC236}">
+                <a16:creationId xmlns:a16="http://schemas.microsoft.com/office/drawing/2014/main" id="{0CB6461C-1753-E315-D740-71ECEF25E76C}"/>
+              </a:ext>
+            </a:extLst>
+          </p:cNvPr>
+          <p:cNvCxnSpPr/>
+          <p:nvPr/>
+        </p:nvCxnSpPr>
+        <p:spPr>
+          <a:xfrm>
+            <a:off x="400050" y="1304925"/>
+            <a:ext cx="11391900" cy="9525"/>
+          </a:xfrm>
+          <a:prstGeom prst="straightConnector1">
+            <a:avLst/>
+          </a:prstGeom>
+          <a:ln w="9525">
+            <a:solidFill>
+              <a:srgbClr val="C9CED2"/>
+            </a:solidFill>
+            <a:prstDash val="solid"/>
+          </a:ln>
+        </p:spPr>
+      </p:cxnSp>
+      <p:sp>
+        <p:nvSpPr>
+          <p:cNvPr id="4" name="Rectangle: Rounded Corners 3">
+            <a:extLst>
+              <a:ext uri="{FF2B5EF4-FFF2-40B4-BE49-F238E27FC236}">
+                <a16:creationId xmlns:a16="http://schemas.microsoft.com/office/drawing/2014/main" id="{7722EF48-D551-B54B-F34E-8EBE1288320E}"/>
+              </a:ext>
+            </a:extLst>
+          </p:cNvPr>
+          <p:cNvSpPr>
+            <a:spLocks noGrp="1"/>
+          </p:cNvSpPr>
+          <p:nvPr/>
+        </p:nvSpPr>
+        <p:spPr>
+          <a:xfrm>
+            <a:off x="689948" y="1618922"/>
+            <a:ext cx="10618258" cy="512564"/>
           </a:xfrm>
           <a:prstGeom prst="roundRect">
             <a:avLst>
@@ -3441,7 +7938,7 @@
           <p:cNvPr id="7" name="Rectangle 6">
             <a:extLst>
               <a:ext uri="{FF2B5EF4-FFF2-40B4-BE49-F238E27FC236}">
-                <a16:creationId xmlns:a16="http://schemas.microsoft.com/office/drawing/2014/main" id="{AE2D5A61-9CC2-494F-8932-CB1E3ED26C2C}"/>
+                <a16:creationId xmlns:a16="http://schemas.microsoft.com/office/drawing/2014/main" id="{56DB4954-9AD1-4B48-4A13-B3A5FD21FF93}"/>
               </a:ext>
             </a:extLst>
           </p:cNvPr>
@@ -3452,245 +7949,8 @@
         </p:nvSpPr>
         <p:spPr>
           <a:xfrm>
-            <a:off x="281516" y="2349500"/>
-            <a:ext cx="3562350" cy="2658529"/>
-          </a:xfrm>
-          <a:prstGeom prst="rect">
-            <a:avLst/>
-          </a:prstGeom>
-        </p:spPr>
-        <p:txBody>
-          <a:bodyPr wrap="square" lIns="0" tIns="0" rIns="0" bIns="0" anchor="t">
-            <a:normAutofit fontScale="92500"/>
-          </a:bodyPr>
-          <a:lstStyle/>
-          <a:p>
-            <a:r>
-              <a:rPr lang="en-US" sz="1100" dirty="0"/>
-              <a:t>Complete application running as one Docker Compose project. Docker Compose creates and connects nine containers, with each container responsible for one part of the system.</a:t>
-            </a:r>
-          </a:p>
-          <a:p>
-            <a:endParaRPr lang="en-US" sz="1100" dirty="0"/>
-          </a:p>
-          <a:p>
-            <a:pPr marL="285750" lvl="0" indent="-285750">
-              <a:buFont typeface="Arial" panose="020B0604020202020204" pitchFamily="34" charset="0"/>
-              <a:buChar char="•"/>
-            </a:pPr>
-            <a:r>
-              <a:rPr lang="en-US" sz="1100" b="1" dirty="0"/>
-              <a:t>client-1</a:t>
-            </a:r>
-            <a:r>
-              <a:rPr lang="en-US" sz="1100" dirty="0"/>
-              <a:t>: Serves the React dashboard on port 5173.</a:t>
-            </a:r>
-          </a:p>
-          <a:p>
-            <a:pPr marL="285750" lvl="0" indent="-285750">
-              <a:buFont typeface="Arial" panose="020B0604020202020204" pitchFamily="34" charset="0"/>
-              <a:buChar char="•"/>
-            </a:pPr>
-            <a:r>
-              <a:rPr lang="en-US" sz="1100" b="1" dirty="0"/>
-              <a:t>server-1</a:t>
-            </a:r>
-            <a:r>
-              <a:rPr lang="en-US" sz="1100" dirty="0"/>
-              <a:t>: Provides the Express API on port 5000.</a:t>
-            </a:r>
-          </a:p>
-          <a:p>
-            <a:pPr marL="285750" lvl="0" indent="-285750">
-              <a:buFont typeface="Arial" panose="020B0604020202020204" pitchFamily="34" charset="0"/>
-              <a:buChar char="•"/>
-            </a:pPr>
-            <a:r>
-              <a:rPr lang="en-US" sz="1100" b="1" dirty="0"/>
-              <a:t>db-1</a:t>
-            </a:r>
-            <a:r>
-              <a:rPr lang="en-US" sz="1100" dirty="0"/>
-              <a:t>: Runs PostgreSQL 18. Port 5433 on the host maps to PostgreSQL's internal port 5432.</a:t>
-            </a:r>
-          </a:p>
-          <a:p>
-            <a:pPr marL="285750" lvl="0" indent="-285750">
-              <a:buFont typeface="Arial" panose="020B0604020202020204" pitchFamily="34" charset="0"/>
-              <a:buChar char="•"/>
-            </a:pPr>
-            <a:r>
-              <a:rPr lang="en-US" sz="1100" b="1" dirty="0"/>
-              <a:t>airflow-1</a:t>
-            </a:r>
-            <a:r>
-              <a:rPr lang="en-US" sz="1100" dirty="0"/>
-              <a:t>: Schedules and monitors the ETL pipeline through port 8080.</a:t>
-            </a:r>
-          </a:p>
-          <a:p>
-            <a:pPr marL="285750" lvl="0" indent="-285750">
-              <a:buFont typeface="Arial" panose="020B0604020202020204" pitchFamily="34" charset="0"/>
-              <a:buChar char="•"/>
-            </a:pPr>
-            <a:r>
-              <a:rPr lang="en-US" sz="1100" b="1" dirty="0"/>
-              <a:t>kafka-1</a:t>
-            </a:r>
-            <a:r>
-              <a:rPr lang="en-US" sz="1100" dirty="0"/>
-              <a:t>: Runs the Kafka broker and exposes port 9092.</a:t>
-            </a:r>
-          </a:p>
-          <a:p>
-            <a:pPr marL="285750" lvl="0" indent="-285750">
-              <a:buFont typeface="Arial" panose="020B0604020202020204" pitchFamily="34" charset="0"/>
-              <a:buChar char="•"/>
-            </a:pPr>
-            <a:r>
-              <a:rPr lang="en-US" sz="1100" b="1" dirty="0"/>
-              <a:t>station-producer-1</a:t>
-            </a:r>
-            <a:r>
-              <a:rPr lang="en-US" sz="1100" dirty="0"/>
-              <a:t>: Fetches station data and publishes new observations to Kafka.</a:t>
-            </a:r>
-          </a:p>
-          <a:p>
-            <a:pPr marL="285750" lvl="0" indent="-285750">
-              <a:buFont typeface="Arial" panose="020B0604020202020204" pitchFamily="34" charset="0"/>
-              <a:buChar char="•"/>
-            </a:pPr>
-            <a:r>
-              <a:rPr lang="en-US" sz="1100" b="1" dirty="0"/>
-              <a:t>alert-consumer-1</a:t>
-            </a:r>
-            <a:r>
-              <a:rPr lang="en-US" sz="1100" dirty="0"/>
-              <a:t>: Consumes Kafka events, detects depletion risks, and stores alerts in PostgreSQL.</a:t>
-            </a:r>
-          </a:p>
-          <a:p>
-            <a:pPr marL="285750" lvl="0" indent="-285750">
-              <a:buFont typeface="Arial" panose="020B0604020202020204" pitchFamily="34" charset="0"/>
-              <a:buChar char="•"/>
-            </a:pPr>
-            <a:r>
-              <a:rPr lang="en-US" sz="1100" b="1" dirty="0"/>
-              <a:t>kafka-init-1</a:t>
-            </a:r>
-            <a:r>
-              <a:rPr lang="en-US" sz="1100" dirty="0"/>
-              <a:t>: Creates the station-status topic and then exits.</a:t>
-            </a:r>
-          </a:p>
-          <a:p>
-            <a:pPr marL="285750" lvl="0" indent="-285750">
-              <a:buFont typeface="Arial" panose="020B0604020202020204" pitchFamily="34" charset="0"/>
-              <a:buChar char="•"/>
-            </a:pPr>
-            <a:r>
-              <a:rPr lang="en-US" sz="1100" b="1" dirty="0"/>
-              <a:t>db-schema-1</a:t>
-            </a:r>
-            <a:r>
-              <a:rPr lang="en-US" sz="1100" dirty="0"/>
-              <a:t>: Applies the database schema and then exits.</a:t>
-            </a:r>
-          </a:p>
-        </p:txBody>
-      </p:sp>
-      <p:pic>
-        <p:nvPicPr>
-          <p:cNvPr id="4" name="Picture 3">
-            <a:extLst>
-              <a:ext uri="{FF2B5EF4-FFF2-40B4-BE49-F238E27FC236}">
-                <a16:creationId xmlns:a16="http://schemas.microsoft.com/office/drawing/2014/main" id="{FF4C7546-3A47-CA8E-3FA0-958B348037C6}"/>
-              </a:ext>
-            </a:extLst>
-          </p:cNvPr>
-          <p:cNvPicPr>
-            <a:picLocks noChangeAspect="1"/>
-          </p:cNvPicPr>
-          <p:nvPr/>
-        </p:nvPicPr>
-        <p:blipFill>
-          <a:blip r:embed="rId3">
-            <a:extLst>
-              <a:ext uri="{28A0092B-C50C-407E-A947-70E740481C1C}">
-                <a14:useLocalDpi xmlns:a14="http://schemas.microsoft.com/office/drawing/2010/main" val="0"/>
-              </a:ext>
-            </a:extLst>
-          </a:blip>
-          <a:stretch>
-            <a:fillRect/>
-          </a:stretch>
-        </p:blipFill>
-        <p:spPr>
-          <a:xfrm>
-            <a:off x="3914038" y="1382182"/>
-            <a:ext cx="8277961" cy="4888186"/>
-          </a:xfrm>
-          <a:prstGeom prst="rect">
-            <a:avLst/>
-          </a:prstGeom>
-        </p:spPr>
-      </p:pic>
-    </p:spTree>
-    <p:extLst>
-      <p:ext uri="{BB962C8B-B14F-4D97-AF65-F5344CB8AC3E}">
-        <p14:creationId xmlns:p14="http://schemas.microsoft.com/office/powerpoint/2010/main" val="180954338"/>
-      </p:ext>
-    </p:extLst>
-  </p:cSld>
-  <p:clrMapOvr>
-    <a:masterClrMapping/>
-  </p:clrMapOvr>
-</p:sld>
-</file>
-
-<file path=ppt/slides/slide4.xml><?xml version="1.0" encoding="utf-8"?>
-<p:sld xmlns:a="http://schemas.openxmlformats.org/drawingml/2006/main" xmlns:r="http://schemas.openxmlformats.org/officeDocument/2006/relationships" xmlns:p="http://schemas.openxmlformats.org/presentationml/2006/main">
-  <p:cSld>
-    <p:spTree>
-      <p:nvGrpSpPr>
-        <p:cNvPr id="1" name="">
-          <a:extLst>
-            <a:ext uri="{FF2B5EF4-FFF2-40B4-BE49-F238E27FC236}">
-              <a16:creationId xmlns:a16="http://schemas.microsoft.com/office/drawing/2014/main" id="{1B287D04-6CD9-A964-AD4D-40CA6F157E7E}"/>
-            </a:ext>
-          </a:extLst>
-        </p:cNvPr>
-        <p:cNvGrpSpPr/>
-        <p:nvPr/>
-      </p:nvGrpSpPr>
-      <p:grpSpPr>
-        <a:xfrm>
-          <a:off x="0" y="0"/>
-          <a:ext cx="0" cy="0"/>
-          <a:chOff x="0" y="0"/>
-          <a:chExt cx="0" cy="0"/>
-        </a:xfrm>
-      </p:grpSpPr>
-      <p:sp>
-        <p:nvSpPr>
-          <p:cNvPr id="21" name="Rectangle 20">
-            <a:extLst>
-              <a:ext uri="{FF2B5EF4-FFF2-40B4-BE49-F238E27FC236}">
-                <a16:creationId xmlns:a16="http://schemas.microsoft.com/office/drawing/2014/main" id="{9DD936DF-D511-C3B8-5929-82B333B5D261}"/>
-              </a:ext>
-            </a:extLst>
-          </p:cNvPr>
-          <p:cNvSpPr>
-            <a:spLocks noGrp="1"/>
-          </p:cNvSpPr>
-          <p:nvPr/>
-        </p:nvSpPr>
-        <p:spPr>
-          <a:xfrm>
-            <a:off x="400050" y="276225"/>
-            <a:ext cx="4953000" cy="209550"/>
+            <a:off x="883794" y="1723696"/>
+            <a:ext cx="11308206" cy="1827672"/>
           </a:xfrm>
           <a:prstGeom prst="rect">
             <a:avLst/>
@@ -3702,286 +7962,381 @@
           </a:bodyPr>
           <a:lstStyle/>
           <a:p>
-            <a:pPr algn="l">
-              <a:defRPr sz="975" b="1">
-                <a:solidFill>
-                  <a:srgbClr val="D9232E"/>
-                </a:solidFill>
-                <a:latin typeface="Arial"/>
-                <a:ea typeface="Arial"/>
-                <a:cs typeface="Arial"/>
-              </a:defRPr>
-            </a:pPr>
             <a:r>
-              <a:t>CAPITAL BIKESHARE OPERATIONS</a:t>
-            </a:r>
-          </a:p>
-        </p:txBody>
-      </p:sp>
-      <p:sp>
-        <p:nvSpPr>
-          <p:cNvPr id="2" name="Rectangle 1">
-            <a:extLst>
-              <a:ext uri="{FF2B5EF4-FFF2-40B4-BE49-F238E27FC236}">
-                <a16:creationId xmlns:a16="http://schemas.microsoft.com/office/drawing/2014/main" id="{1A12BDF5-05FD-F4FB-E076-3235E3498724}"/>
-              </a:ext>
-            </a:extLst>
-          </p:cNvPr>
-          <p:cNvSpPr>
-            <a:spLocks noGrp="1"/>
-          </p:cNvSpPr>
-          <p:nvPr/>
-        </p:nvSpPr>
-        <p:spPr>
-          <a:xfrm>
-            <a:off x="400050" y="581025"/>
-            <a:ext cx="11391900" cy="628650"/>
-          </a:xfrm>
-          <a:prstGeom prst="rect">
-            <a:avLst/>
-          </a:prstGeom>
-        </p:spPr>
-        <p:txBody>
-          <a:bodyPr wrap="square" lIns="0" tIns="0" rIns="0" bIns="0" anchor="t">
-            <a:normAutofit/>
-          </a:bodyPr>
-          <a:lstStyle/>
-          <a:p>
-            <a:pPr algn="l">
-              <a:defRPr sz="3000" b="1">
-                <a:solidFill>
-                  <a:srgbClr val="15191D"/>
-                </a:solidFill>
-                <a:latin typeface="Arial"/>
-                <a:ea typeface="Arial"/>
-                <a:cs typeface="Arial"/>
-              </a:defRPr>
-            </a:pPr>
-            <a:r>
-              <a:rPr lang="en-US" dirty="0"/>
-              <a:t>PostgreSQL </a:t>
-            </a:r>
-            <a:endParaRPr dirty="0"/>
-          </a:p>
-        </p:txBody>
-      </p:sp>
-      <p:cxnSp>
-        <p:nvCxnSpPr>
-          <p:cNvPr id="23" name="Straight Arrow Connector 22">
-            <a:extLst>
-              <a:ext uri="{FF2B5EF4-FFF2-40B4-BE49-F238E27FC236}">
-                <a16:creationId xmlns:a16="http://schemas.microsoft.com/office/drawing/2014/main" id="{701F63C5-42E4-28C9-4055-77EAA8DE539C}"/>
-              </a:ext>
-            </a:extLst>
-          </p:cNvPr>
-          <p:cNvCxnSpPr/>
-          <p:nvPr/>
-        </p:nvCxnSpPr>
-        <p:spPr>
-          <a:xfrm>
-            <a:off x="400050" y="1304925"/>
-            <a:ext cx="11391900" cy="9525"/>
-          </a:xfrm>
-          <a:prstGeom prst="straightConnector1">
-            <a:avLst/>
-          </a:prstGeom>
-          <a:ln w="9525">
-            <a:solidFill>
-              <a:srgbClr val="C9CED2"/>
-            </a:solidFill>
-            <a:prstDash val="solid"/>
-          </a:ln>
-        </p:spPr>
-      </p:cxnSp>
-      <p:sp>
-        <p:nvSpPr>
-          <p:cNvPr id="5" name="Rectangle: Rounded Corners 4">
-            <a:extLst>
-              <a:ext uri="{FF2B5EF4-FFF2-40B4-BE49-F238E27FC236}">
-                <a16:creationId xmlns:a16="http://schemas.microsoft.com/office/drawing/2014/main" id="{5CF4D5AD-B99B-B502-A28C-4BD718B1C6E9}"/>
-              </a:ext>
-            </a:extLst>
-          </p:cNvPr>
-          <p:cNvSpPr>
-            <a:spLocks noGrp="1"/>
-          </p:cNvSpPr>
-          <p:nvPr/>
-        </p:nvSpPr>
-        <p:spPr>
-          <a:xfrm>
-            <a:off x="67733" y="2244724"/>
-            <a:ext cx="3776133" cy="2763305"/>
-          </a:xfrm>
-          <a:prstGeom prst="roundRect">
-            <a:avLst>
-              <a:gd name="adj" fmla="val 2797"/>
-            </a:avLst>
-          </a:prstGeom>
-          <a:solidFill>
-            <a:srgbClr val="EAF6FB"/>
-          </a:solidFill>
-          <a:ln w="9525">
-            <a:solidFill>
-              <a:srgbClr val="C9CED2"/>
-            </a:solidFill>
-            <a:prstDash val="solid"/>
-          </a:ln>
-        </p:spPr>
-        <p:txBody>
-          <a:bodyPr/>
-          <a:lstStyle/>
-          <a:p>
-            <a:endParaRPr lang="en-US"/>
-          </a:p>
-        </p:txBody>
-      </p:sp>
-      <p:sp>
-        <p:nvSpPr>
-          <p:cNvPr id="7" name="Rectangle 6">
-            <a:extLst>
-              <a:ext uri="{FF2B5EF4-FFF2-40B4-BE49-F238E27FC236}">
-                <a16:creationId xmlns:a16="http://schemas.microsoft.com/office/drawing/2014/main" id="{FCB58224-75D0-3C97-FB03-4C89226327F2}"/>
-              </a:ext>
-            </a:extLst>
-          </p:cNvPr>
-          <p:cNvSpPr>
-            <a:spLocks noGrp="1"/>
-          </p:cNvSpPr>
-          <p:nvPr/>
-        </p:nvSpPr>
-        <p:spPr>
-          <a:xfrm>
-            <a:off x="135467" y="2667000"/>
-            <a:ext cx="3547533" cy="1820333"/>
-          </a:xfrm>
-          <a:prstGeom prst="rect">
-            <a:avLst/>
-          </a:prstGeom>
-        </p:spPr>
-        <p:txBody>
-          <a:bodyPr wrap="square" lIns="0" tIns="0" rIns="0" bIns="0" anchor="t">
-            <a:normAutofit/>
-          </a:bodyPr>
-          <a:lstStyle/>
-          <a:p>
-            <a:r>
-              <a:rPr lang="en-US" sz="1100" dirty="0"/>
-              <a:t>The PostgreSQL schema contains:</a:t>
-            </a:r>
-          </a:p>
-          <a:p>
-            <a:pPr marL="171450" indent="-171450">
-              <a:buFont typeface="Arial" panose="020B0604020202020204" pitchFamily="34" charset="0"/>
-              <a:buChar char="•"/>
-            </a:pPr>
-            <a:r>
-              <a:rPr lang="en-US" sz="1100" b="1" dirty="0" err="1"/>
-              <a:t>gbfs_raw_data</a:t>
+              <a:rPr lang="en-US" sz="1400" dirty="0"/>
+              <a:t>The project uses the </a:t>
             </a:r>
             <a:r>
-              <a:rPr lang="en-US" sz="1100" b="1" dirty="0"/>
-              <a:t> </a:t>
+              <a:rPr lang="en-US" sz="1400" b="1" dirty="0"/>
+              <a:t>Capital Bikeshare General Bikeshare Feed Specification (GBFS) API</a:t>
             </a:r>
             <a:r>
-              <a:rPr lang="en-US" sz="1100" dirty="0"/>
-              <a:t>– stores the original API responses.</a:t>
+              <a:rPr lang="en-US" sz="1400" dirty="0"/>
+              <a:t>. </a:t>
             </a:r>
           </a:p>
-          <a:p>
-            <a:pPr marL="171450" indent="-171450">
-              <a:buFont typeface="Arial" panose="020B0604020202020204" pitchFamily="34" charset="0"/>
-              <a:buChar char="•"/>
-            </a:pPr>
-            <a:r>
-              <a:rPr lang="en-US" sz="1100" b="1" dirty="0"/>
-              <a:t>stations</a:t>
-            </a:r>
-            <a:r>
-              <a:rPr lang="en-US" sz="1100" dirty="0"/>
-              <a:t> – stores cleaned station names, locations, and capacities.</a:t>
-            </a:r>
-          </a:p>
-          <a:p>
-            <a:pPr marL="171450" indent="-171450">
-              <a:buFont typeface="Arial" panose="020B0604020202020204" pitchFamily="34" charset="0"/>
-              <a:buChar char="•"/>
-            </a:pPr>
-            <a:r>
-              <a:rPr lang="en-US" sz="1100" b="1" dirty="0" err="1"/>
-              <a:t>station_status_history</a:t>
-            </a:r>
-            <a:r>
-              <a:rPr lang="en-US" sz="1100" b="1" dirty="0"/>
-              <a:t> </a:t>
-            </a:r>
-            <a:r>
-              <a:rPr lang="en-US" sz="1100" dirty="0"/>
-              <a:t>– stores bike and dock availability over time.</a:t>
-            </a:r>
-          </a:p>
-          <a:p>
-            <a:pPr marL="171450" indent="-171450">
-              <a:buFont typeface="Arial" panose="020B0604020202020204" pitchFamily="34" charset="0"/>
-              <a:buChar char="•"/>
-            </a:pPr>
-            <a:r>
-              <a:rPr lang="en-US" sz="1100" b="1" dirty="0" err="1"/>
-              <a:t>station_alerts</a:t>
-            </a:r>
-            <a:r>
-              <a:rPr lang="en-US" sz="1100" b="1" dirty="0"/>
-              <a:t> </a:t>
-            </a:r>
-            <a:r>
-              <a:rPr lang="en-US" sz="1100" dirty="0"/>
-              <a:t>– stores active and resolved depletion alerts.</a:t>
-            </a:r>
-          </a:p>
-          <a:p>
-            <a:endParaRPr lang="en-US" sz="1100" dirty="0"/>
-          </a:p>
         </p:txBody>
       </p:sp>
-      <p:pic>
-        <p:nvPicPr>
-          <p:cNvPr id="6" name="Picture 5">
-            <a:extLst>
-              <a:ext uri="{FF2B5EF4-FFF2-40B4-BE49-F238E27FC236}">
-                <a16:creationId xmlns:a16="http://schemas.microsoft.com/office/drawing/2014/main" id="{8DE14099-BCED-9C9B-9C53-0FD10A60DA70}"/>
-              </a:ext>
-            </a:extLst>
-          </p:cNvPr>
-          <p:cNvPicPr>
-            <a:picLocks noChangeAspect="1"/>
-          </p:cNvPicPr>
-          <p:nvPr/>
-        </p:nvPicPr>
-        <p:blipFill>
-          <a:blip r:embed="rId3">
-            <a:extLst>
-              <a:ext uri="{28A0092B-C50C-407E-A947-70E740481C1C}">
-                <a14:useLocalDpi xmlns:a14="http://schemas.microsoft.com/office/drawing/2010/main" val="0"/>
-              </a:ext>
-            </a:extLst>
-          </a:blip>
-          <a:stretch>
-            <a:fillRect/>
-          </a:stretch>
-        </p:blipFill>
-        <p:spPr>
-          <a:xfrm>
-            <a:off x="3843866" y="1343022"/>
-            <a:ext cx="8345304" cy="4954072"/>
-          </a:xfrm>
-          <a:prstGeom prst="rect">
-            <a:avLst/>
-          </a:prstGeom>
-        </p:spPr>
-      </p:pic>
+      <p:graphicFrame>
+        <p:nvGraphicFramePr>
+          <p:cNvPr id="9" name="Table 8">
+            <a:extLst>
+              <a:ext uri="{FF2B5EF4-FFF2-40B4-BE49-F238E27FC236}">
+                <a16:creationId xmlns:a16="http://schemas.microsoft.com/office/drawing/2014/main" id="{4E601E0F-906D-0987-F6B6-438A51EBCB2B}"/>
+              </a:ext>
+            </a:extLst>
+          </p:cNvPr>
+          <p:cNvGraphicFramePr>
+            <a:graphicFrameLocks noGrp="1"/>
+          </p:cNvGraphicFramePr>
+          <p:nvPr>
+            <p:extLst>
+              <p:ext uri="{D42A27DB-BD31-4B8C-83A1-F6EECF244321}">
+                <p14:modId xmlns:p14="http://schemas.microsoft.com/office/powerpoint/2010/main" val="3503184626"/>
+              </p:ext>
+            </p:extLst>
+          </p:nvPr>
+        </p:nvGraphicFramePr>
+        <p:xfrm>
+          <a:off x="883794" y="2645507"/>
+          <a:ext cx="10618260" cy="3538217"/>
+        </p:xfrm>
+        <a:graphic>
+          <a:graphicData uri="http://schemas.openxmlformats.org/drawingml/2006/table">
+            <a:tbl>
+              <a:tblPr>
+                <a:tableStyleId>{5C22544A-7EE6-4342-B048-85BDC9FD1C3A}</a:tableStyleId>
+              </a:tblPr>
+              <a:tblGrid>
+                <a:gridCol w="2654565">
+                  <a:extLst>
+                    <a:ext uri="{9D8B030D-6E8A-4147-A177-3AD203B41FA5}">
+                      <a16:colId xmlns:a16="http://schemas.microsoft.com/office/drawing/2014/main" val="3060482573"/>
+                    </a:ext>
+                  </a:extLst>
+                </a:gridCol>
+                <a:gridCol w="2654565">
+                  <a:extLst>
+                    <a:ext uri="{9D8B030D-6E8A-4147-A177-3AD203B41FA5}">
+                      <a16:colId xmlns:a16="http://schemas.microsoft.com/office/drawing/2014/main" val="2616777617"/>
+                    </a:ext>
+                  </a:extLst>
+                </a:gridCol>
+                <a:gridCol w="2654565">
+                  <a:extLst>
+                    <a:ext uri="{9D8B030D-6E8A-4147-A177-3AD203B41FA5}">
+                      <a16:colId xmlns:a16="http://schemas.microsoft.com/office/drawing/2014/main" val="1245683008"/>
+                    </a:ext>
+                  </a:extLst>
+                </a:gridCol>
+                <a:gridCol w="2654565">
+                  <a:extLst>
+                    <a:ext uri="{9D8B030D-6E8A-4147-A177-3AD203B41FA5}">
+                      <a16:colId xmlns:a16="http://schemas.microsoft.com/office/drawing/2014/main" val="4027433134"/>
+                    </a:ext>
+                  </a:extLst>
+                </a:gridCol>
+              </a:tblGrid>
+              <a:tr h="237687">
+                <a:tc>
+                  <a:txBody>
+                    <a:bodyPr/>
+                    <a:lstStyle/>
+                    <a:p>
+                      <a:pPr>
+                        <a:buNone/>
+                      </a:pPr>
+                      <a:r>
+                        <a:rPr lang="en-US" sz="1600"/>
+                        <a:t>API/feed</a:t>
+                      </a:r>
+                    </a:p>
+                  </a:txBody>
+                  <a:tcPr marL="79115" marR="79115" marT="39558" marB="39558" anchor="ctr"/>
+                </a:tc>
+                <a:tc>
+                  <a:txBody>
+                    <a:bodyPr/>
+                    <a:lstStyle/>
+                    <a:p>
+                      <a:pPr>
+                        <a:buNone/>
+                      </a:pPr>
+                      <a:r>
+                        <a:rPr lang="en-US" sz="1600" dirty="0"/>
+                        <a:t>Exact endpoint</a:t>
+                      </a:r>
+                    </a:p>
+                  </a:txBody>
+                  <a:tcPr marL="79115" marR="79115" marT="39558" marB="39558" anchor="ctr"/>
+                </a:tc>
+                <a:tc>
+                  <a:txBody>
+                    <a:bodyPr/>
+                    <a:lstStyle/>
+                    <a:p>
+                      <a:pPr>
+                        <a:buNone/>
+                      </a:pPr>
+                      <a:r>
+                        <a:rPr lang="en-US" sz="1600"/>
+                        <a:t>Why it is used</a:t>
+                      </a:r>
+                    </a:p>
+                  </a:txBody>
+                  <a:tcPr marL="79115" marR="79115" marT="39558" marB="39558" anchor="ctr"/>
+                </a:tc>
+                <a:tc>
+                  <a:txBody>
+                    <a:bodyPr/>
+                    <a:lstStyle/>
+                    <a:p>
+                      <a:pPr>
+                        <a:buNone/>
+                      </a:pPr>
+                      <a:r>
+                        <a:rPr lang="en-US" sz="1600"/>
+                        <a:t>Code location</a:t>
+                      </a:r>
+                    </a:p>
+                  </a:txBody>
+                  <a:tcPr marL="79115" marR="79115" marT="39558" marB="39558" anchor="ctr"/>
+                </a:tc>
+                <a:extLst>
+                  <a:ext uri="{0D108BD9-81ED-4DB2-BD59-A6C34878D82A}">
+                    <a16:rowId xmlns:a16="http://schemas.microsoft.com/office/drawing/2014/main" val="707811824"/>
+                  </a:ext>
+                </a:extLst>
+              </a:tr>
+              <a:tr h="1106309">
+                <a:tc>
+                  <a:txBody>
+                    <a:bodyPr/>
+                    <a:lstStyle/>
+                    <a:p>
+                      <a:pPr>
+                        <a:buNone/>
+                      </a:pPr>
+                      <a:r>
+                        <a:rPr lang="en-US" sz="1600"/>
+                        <a:t>GBFS discovery</a:t>
+                      </a:r>
+                    </a:p>
+                  </a:txBody>
+                  <a:tcPr marL="79115" marR="79115" marT="39558" marB="39558" anchor="ctr"/>
+                </a:tc>
+                <a:tc>
+                  <a:txBody>
+                    <a:bodyPr/>
+                    <a:lstStyle/>
+                    <a:p>
+                      <a:pPr>
+                        <a:buNone/>
+                      </a:pPr>
+                      <a:r>
+                        <a:rPr lang="en-US" sz="1600"/>
+                        <a:t>https://gbfs.capitalbikeshare.com/gbfs/2.3/gbfs.json</a:t>
+                      </a:r>
+                    </a:p>
+                  </a:txBody>
+                  <a:tcPr marL="79115" marR="79115" marT="39558" marB="39558" anchor="ctr"/>
+                </a:tc>
+                <a:tc>
+                  <a:txBody>
+                    <a:bodyPr/>
+                    <a:lstStyle/>
+                    <a:p>
+                      <a:pPr>
+                        <a:buNone/>
+                      </a:pPr>
+                      <a:r>
+                        <a:rPr lang="en-US" sz="1600"/>
+                        <a:t>Provides the current URLs of all available feeds, avoiding hard-coded data-feed addresses.</a:t>
+                      </a:r>
+                    </a:p>
+                  </a:txBody>
+                  <a:tcPr marL="79115" marR="79115" marT="39558" marB="39558" anchor="ctr"/>
+                </a:tc>
+                <a:tc>
+                  <a:txBody>
+                    <a:bodyPr/>
+                    <a:lstStyle/>
+                    <a:p>
+                      <a:pPr>
+                        <a:buNone/>
+                      </a:pPr>
+                      <a:r>
+                        <a:rPr lang="en-US" sz="1600"/>
+                        <a:t>DEFAULT_DISCOVERY_URL and discover_feed_urls() in pipeline/extract.py</a:t>
+                      </a:r>
+                    </a:p>
+                  </a:txBody>
+                  <a:tcPr marL="79115" marR="79115" marT="39558" marB="39558" anchor="ctr"/>
+                </a:tc>
+                <a:extLst>
+                  <a:ext uri="{0D108BD9-81ED-4DB2-BD59-A6C34878D82A}">
+                    <a16:rowId xmlns:a16="http://schemas.microsoft.com/office/drawing/2014/main" val="2238005156"/>
+                  </a:ext>
+                </a:extLst>
+              </a:tr>
+              <a:tr h="931629">
+                <a:tc>
+                  <a:txBody>
+                    <a:bodyPr/>
+                    <a:lstStyle/>
+                    <a:p>
+                      <a:pPr>
+                        <a:buNone/>
+                      </a:pPr>
+                      <a:r>
+                        <a:rPr lang="en-US" sz="1600"/>
+                        <a:t>Station information</a:t>
+                      </a:r>
+                    </a:p>
+                  </a:txBody>
+                  <a:tcPr marL="79115" marR="79115" marT="39558" marB="39558" anchor="ctr"/>
+                </a:tc>
+                <a:tc>
+                  <a:txBody>
+                    <a:bodyPr/>
+                    <a:lstStyle/>
+                    <a:p>
+                      <a:pPr>
+                        <a:buNone/>
+                      </a:pPr>
+                      <a:r>
+                        <a:rPr lang="en-US" sz="1600"/>
+                        <a:t>https://gbfs.lyft.com/gbfs/2.3/dca-cabi/en/station_information.json</a:t>
+                      </a:r>
+                    </a:p>
+                  </a:txBody>
+                  <a:tcPr marL="79115" marR="79115" marT="39558" marB="39558" anchor="ctr"/>
+                </a:tc>
+                <a:tc>
+                  <a:txBody>
+                    <a:bodyPr/>
+                    <a:lstStyle/>
+                    <a:p>
+                      <a:pPr>
+                        <a:buNone/>
+                      </a:pPr>
+                      <a:r>
+                        <a:rPr lang="en-US" sz="1600"/>
+                        <a:t>Supplies station IDs, names, coordinates and capacities for PostgreSQL and the dashboard map.</a:t>
+                      </a:r>
+                    </a:p>
+                  </a:txBody>
+                  <a:tcPr marL="79115" marR="79115" marT="39558" marB="39558" anchor="ctr"/>
+                </a:tc>
+                <a:tc>
+                  <a:txBody>
+                    <a:bodyPr/>
+                    <a:lstStyle/>
+                    <a:p>
+                      <a:pPr>
+                        <a:buNone/>
+                      </a:pPr>
+                      <a:r>
+                        <a:rPr lang="en-US" sz="1600"/>
+                        <a:t>Retrieved by fetch_station_feeds() in pipeline/extract.py</a:t>
+                      </a:r>
+                    </a:p>
+                  </a:txBody>
+                  <a:tcPr marL="79115" marR="79115" marT="39558" marB="39558" anchor="ctr"/>
+                </a:tc>
+                <a:extLst>
+                  <a:ext uri="{0D108BD9-81ED-4DB2-BD59-A6C34878D82A}">
+                    <a16:rowId xmlns:a16="http://schemas.microsoft.com/office/drawing/2014/main" val="778525920"/>
+                  </a:ext>
+                </a:extLst>
+              </a:tr>
+              <a:tr h="931629">
+                <a:tc>
+                  <a:txBody>
+                    <a:bodyPr/>
+                    <a:lstStyle/>
+                    <a:p>
+                      <a:pPr>
+                        <a:buNone/>
+                      </a:pPr>
+                      <a:r>
+                        <a:rPr lang="en-US" sz="1600"/>
+                        <a:t>Station status</a:t>
+                      </a:r>
+                    </a:p>
+                  </a:txBody>
+                  <a:tcPr marL="79115" marR="79115" marT="39558" marB="39558" anchor="ctr"/>
+                </a:tc>
+                <a:tc>
+                  <a:txBody>
+                    <a:bodyPr/>
+                    <a:lstStyle/>
+                    <a:p>
+                      <a:pPr>
+                        <a:buNone/>
+                      </a:pPr>
+                      <a:r>
+                        <a:rPr lang="en-US" sz="1600"/>
+                        <a:t>https://gbfs.lyft.com/gbfs/2.3/dca-cabi/en/station_status.json</a:t>
+                      </a:r>
+                    </a:p>
+                  </a:txBody>
+                  <a:tcPr marL="79115" marR="79115" marT="39558" marB="39558" anchor="ctr"/>
+                </a:tc>
+                <a:tc>
+                  <a:txBody>
+                    <a:bodyPr/>
+                    <a:lstStyle/>
+                    <a:p>
+                      <a:pPr>
+                        <a:buNone/>
+                      </a:pPr>
+                      <a:r>
+                        <a:rPr lang="en-US" sz="1600"/>
+                        <a:t>Supplies current bikes, docks, operating flags and timestamps for history and depletion alerts.</a:t>
+                      </a:r>
+                    </a:p>
+                  </a:txBody>
+                  <a:tcPr marL="79115" marR="79115" marT="39558" marB="39558" anchor="ctr"/>
+                </a:tc>
+                <a:tc>
+                  <a:txBody>
+                    <a:bodyPr/>
+                    <a:lstStyle/>
+                    <a:p>
+                      <a:pPr>
+                        <a:buNone/>
+                      </a:pPr>
+                      <a:r>
+                        <a:rPr lang="en-US" sz="1600" dirty="0"/>
+                        <a:t>Retrieved by </a:t>
+                      </a:r>
+                      <a:r>
+                        <a:rPr lang="en-US" sz="1600" dirty="0" err="1"/>
+                        <a:t>fetch_station_feeds</a:t>
+                      </a:r>
+                      <a:r>
+                        <a:rPr lang="en-US" sz="1600" dirty="0"/>
+                        <a:t>() in pipeline/extract.py</a:t>
+                      </a:r>
+                    </a:p>
+                  </a:txBody>
+                  <a:tcPr marL="79115" marR="79115" marT="39558" marB="39558" anchor="ctr"/>
+                </a:tc>
+                <a:extLst>
+                  <a:ext uri="{0D108BD9-81ED-4DB2-BD59-A6C34878D82A}">
+                    <a16:rowId xmlns:a16="http://schemas.microsoft.com/office/drawing/2014/main" val="1890625242"/>
+                  </a:ext>
+                </a:extLst>
+              </a:tr>
+            </a:tbl>
+          </a:graphicData>
+        </a:graphic>
+      </p:graphicFrame>
     </p:spTree>
     <p:extLst>
       <p:ext uri="{BB962C8B-B14F-4D97-AF65-F5344CB8AC3E}">
-        <p14:creationId xmlns:p14="http://schemas.microsoft.com/office/powerpoint/2010/main" val="3642325858"/>
+        <p14:creationId xmlns:p14="http://schemas.microsoft.com/office/powerpoint/2010/main" val="2362741516"/>
       </p:ext>
     </p:extLst>
   </p:cSld>
@@ -4134,48 +8489,6 @@
           </a:ln>
         </p:spPr>
       </p:cxnSp>
-      <p:sp>
-        <p:nvSpPr>
-          <p:cNvPr id="5" name="Rectangle: Rounded Corners 4">
-            <a:extLst>
-              <a:ext uri="{FF2B5EF4-FFF2-40B4-BE49-F238E27FC236}">
-                <a16:creationId xmlns:a16="http://schemas.microsoft.com/office/drawing/2014/main" id="{849B9FC0-5BD1-4B39-1069-D2281AEC3803}"/>
-              </a:ext>
-            </a:extLst>
-          </p:cNvPr>
-          <p:cNvSpPr>
-            <a:spLocks noGrp="1"/>
-          </p:cNvSpPr>
-          <p:nvPr/>
-        </p:nvSpPr>
-        <p:spPr>
-          <a:xfrm>
-            <a:off x="67733" y="2244724"/>
-            <a:ext cx="3776133" cy="2763305"/>
-          </a:xfrm>
-          <a:prstGeom prst="roundRect">
-            <a:avLst>
-              <a:gd name="adj" fmla="val 2797"/>
-            </a:avLst>
-          </a:prstGeom>
-          <a:solidFill>
-            <a:srgbClr val="EAF6FB"/>
-          </a:solidFill>
-          <a:ln w="9525">
-            <a:solidFill>
-              <a:srgbClr val="C9CED2"/>
-            </a:solidFill>
-            <a:prstDash val="solid"/>
-          </a:ln>
-        </p:spPr>
-        <p:txBody>
-          <a:bodyPr/>
-          <a:lstStyle/>
-          <a:p>
-            <a:endParaRPr lang="en-US"/>
-          </a:p>
-        </p:txBody>
-      </p:sp>
       <p:sp>
         <p:nvSpPr>
           <p:cNvPr id="7" name="Rectangle 6">
@@ -4314,7 +8627,7 @@
         <p:cNvPr id="1" name="">
           <a:extLst>
             <a:ext uri="{FF2B5EF4-FFF2-40B4-BE49-F238E27FC236}">
-              <a16:creationId xmlns:a16="http://schemas.microsoft.com/office/drawing/2014/main" id="{77FF1AFF-4769-A0D0-A80D-B883D72EBA8A}"/>
+              <a16:creationId xmlns:a16="http://schemas.microsoft.com/office/drawing/2014/main" id="{6AF0AD14-DD93-A70F-AE5F-2BFB9290F597}"/>
             </a:ext>
           </a:extLst>
         </p:cNvPr>
@@ -4334,7 +8647,7 @@
           <p:cNvPr id="21" name="Rectangle 20">
             <a:extLst>
               <a:ext uri="{FF2B5EF4-FFF2-40B4-BE49-F238E27FC236}">
-                <a16:creationId xmlns:a16="http://schemas.microsoft.com/office/drawing/2014/main" id="{6A5141A1-F596-F15A-2E72-4991CB2C5D46}"/>
+                <a16:creationId xmlns:a16="http://schemas.microsoft.com/office/drawing/2014/main" id="{F4B70AC6-B681-5931-6C62-6AA23407A96F}"/>
               </a:ext>
             </a:extLst>
           </p:cNvPr>
@@ -4379,7 +8692,7 @@
           <p:cNvPr id="2" name="Rectangle 1">
             <a:extLst>
               <a:ext uri="{FF2B5EF4-FFF2-40B4-BE49-F238E27FC236}">
-                <a16:creationId xmlns:a16="http://schemas.microsoft.com/office/drawing/2014/main" id="{8EA4ABF5-888D-CD7F-ECBB-4B380B418621}"/>
+                <a16:creationId xmlns:a16="http://schemas.microsoft.com/office/drawing/2014/main" id="{D13E4512-CE41-8EA3-106C-A7302E99E888}"/>
               </a:ext>
             </a:extLst>
           </p:cNvPr>
@@ -4403,7 +8716,7 @@
           </a:bodyPr>
           <a:lstStyle/>
           <a:p>
-            <a:pPr algn="l">
+            <a:pPr>
               <a:defRPr sz="3000" b="1">
                 <a:solidFill>
                   <a:srgbClr val="15191D"/>
@@ -4414,8 +8727,17 @@
               </a:defRPr>
             </a:pPr>
             <a:r>
+              <a:rPr lang="en-US" sz="3000" b="1" dirty="0">
+                <a:solidFill>
+                  <a:srgbClr val="15191D"/>
+                </a:solidFill>
+                <a:latin typeface="Arial"/>
+              </a:rPr>
+              <a:t>Airflow Implementation: Automated ETL Orchestration</a:t>
+            </a:r>
+            <a:r>
               <a:rPr lang="en-US" dirty="0"/>
-              <a:t>Airflow </a:t>
+              <a:t> </a:t>
             </a:r>
             <a:endParaRPr dirty="0"/>
           </a:p>
@@ -4426,7 +8748,7 @@
           <p:cNvPr id="23" name="Straight Arrow Connector 22">
             <a:extLst>
               <a:ext uri="{FF2B5EF4-FFF2-40B4-BE49-F238E27FC236}">
-                <a16:creationId xmlns:a16="http://schemas.microsoft.com/office/drawing/2014/main" id="{02D60F23-22AF-F2ED-134D-053054DBD6ED}"/>
+                <a16:creationId xmlns:a16="http://schemas.microsoft.com/office/drawing/2014/main" id="{1D658554-2A06-16C1-BCC3-6D2E34F8F957}"/>
               </a:ext>
             </a:extLst>
           </p:cNvPr>
@@ -4449,12 +8771,1362 @@
           </a:ln>
         </p:spPr>
       </p:cxnSp>
+      <p:graphicFrame>
+        <p:nvGraphicFramePr>
+          <p:cNvPr id="6" name="Table 5">
+            <a:extLst>
+              <a:ext uri="{FF2B5EF4-FFF2-40B4-BE49-F238E27FC236}">
+                <a16:creationId xmlns:a16="http://schemas.microsoft.com/office/drawing/2014/main" id="{7A198911-7A5D-3C87-E5E9-8FDACC1CAD2B}"/>
+              </a:ext>
+            </a:extLst>
+          </p:cNvPr>
+          <p:cNvGraphicFramePr>
+            <a:graphicFrameLocks noGrp="1"/>
+          </p:cNvGraphicFramePr>
+          <p:nvPr>
+            <p:extLst>
+              <p:ext uri="{D42A27DB-BD31-4B8C-83A1-F6EECF244321}">
+                <p14:modId xmlns:p14="http://schemas.microsoft.com/office/powerpoint/2010/main" val="920443376"/>
+              </p:ext>
+            </p:extLst>
+          </p:nvPr>
+        </p:nvGraphicFramePr>
+        <p:xfrm>
+          <a:off x="3039731" y="1419224"/>
+          <a:ext cx="6900135" cy="5186898"/>
+        </p:xfrm>
+        <a:graphic>
+          <a:graphicData uri="http://schemas.openxmlformats.org/drawingml/2006/table">
+            <a:tbl>
+              <a:tblPr>
+                <a:tableStyleId>{5C22544A-7EE6-4342-B048-85BDC9FD1C3A}</a:tableStyleId>
+              </a:tblPr>
+              <a:tblGrid>
+                <a:gridCol w="1353149">
+                  <a:extLst>
+                    <a:ext uri="{9D8B030D-6E8A-4147-A177-3AD203B41FA5}">
+                      <a16:colId xmlns:a16="http://schemas.microsoft.com/office/drawing/2014/main" val="2886756476"/>
+                    </a:ext>
+                  </a:extLst>
+                </a:gridCol>
+                <a:gridCol w="3246941">
+                  <a:extLst>
+                    <a:ext uri="{9D8B030D-6E8A-4147-A177-3AD203B41FA5}">
+                      <a16:colId xmlns:a16="http://schemas.microsoft.com/office/drawing/2014/main" val="1904485059"/>
+                    </a:ext>
+                  </a:extLst>
+                </a:gridCol>
+                <a:gridCol w="2300045">
+                  <a:extLst>
+                    <a:ext uri="{9D8B030D-6E8A-4147-A177-3AD203B41FA5}">
+                      <a16:colId xmlns:a16="http://schemas.microsoft.com/office/drawing/2014/main" val="2890784741"/>
+                    </a:ext>
+                  </a:extLst>
+                </a:gridCol>
+              </a:tblGrid>
+              <a:tr h="203602">
+                <a:tc>
+                  <a:txBody>
+                    <a:bodyPr/>
+                    <a:lstStyle/>
+                    <a:p>
+                      <a:pPr>
+                        <a:buNone/>
+                      </a:pPr>
+                      <a:r>
+                        <a:rPr lang="en-US" sz="1100" dirty="0"/>
+                        <a:t>Implementation</a:t>
+                      </a:r>
+                    </a:p>
+                  </a:txBody>
+                  <a:tcPr marL="35961" marR="35961" marT="17981" marB="17981" anchor="ctr"/>
+                </a:tc>
+                <a:tc>
+                  <a:txBody>
+                    <a:bodyPr/>
+                    <a:lstStyle/>
+                    <a:p>
+                      <a:pPr>
+                        <a:buNone/>
+                      </a:pPr>
+                      <a:r>
+                        <a:rPr lang="en-US" sz="1100"/>
+                        <a:t>What was done</a:t>
+                      </a:r>
+                    </a:p>
+                  </a:txBody>
+                  <a:tcPr marL="35961" marR="35961" marT="17981" marB="17981" anchor="ctr"/>
+                </a:tc>
+                <a:tc>
+                  <a:txBody>
+                    <a:bodyPr/>
+                    <a:lstStyle/>
+                    <a:p>
+                      <a:pPr>
+                        <a:buNone/>
+                      </a:pPr>
+                      <a:r>
+                        <a:rPr lang="en-US" sz="1100"/>
+                        <a:t>Code location</a:t>
+                      </a:r>
+                    </a:p>
+                  </a:txBody>
+                  <a:tcPr marL="35961" marR="35961" marT="17981" marB="17981" anchor="ctr"/>
+                </a:tc>
+                <a:extLst>
+                  <a:ext uri="{0D108BD9-81ED-4DB2-BD59-A6C34878D82A}">
+                    <a16:rowId xmlns:a16="http://schemas.microsoft.com/office/drawing/2014/main" val="391779521"/>
+                  </a:ext>
+                </a:extLst>
+              </a:tr>
+              <a:tr h="521958">
+                <a:tc>
+                  <a:txBody>
+                    <a:bodyPr/>
+                    <a:lstStyle/>
+                    <a:p>
+                      <a:pPr>
+                        <a:buNone/>
+                      </a:pPr>
+                      <a:r>
+                        <a:rPr lang="en-US" sz="1100"/>
+                        <a:t>DAG</a:t>
+                      </a:r>
+                    </a:p>
+                  </a:txBody>
+                  <a:tcPr marL="35961" marR="35961" marT="17981" marB="17981" anchor="ctr"/>
+                </a:tc>
+                <a:tc>
+                  <a:txBody>
+                    <a:bodyPr/>
+                    <a:lstStyle/>
+                    <a:p>
+                      <a:pPr>
+                        <a:buNone/>
+                      </a:pPr>
+                      <a:r>
+                        <a:rPr lang="en-US" sz="1100" dirty="0"/>
+                        <a:t>Created </a:t>
+                      </a:r>
+                      <a:r>
+                        <a:rPr lang="en-US" sz="1100" dirty="0" err="1"/>
+                        <a:t>capital_bikeshare_etl</a:t>
+                      </a:r>
+                      <a:r>
+                        <a:rPr lang="en-US" sz="1100" dirty="0"/>
+                        <a:t> to coordinate the complete ETL workflow.</a:t>
+                      </a:r>
+                    </a:p>
+                  </a:txBody>
+                  <a:tcPr marL="35961" marR="35961" marT="17981" marB="17981" anchor="ctr"/>
+                </a:tc>
+                <a:tc>
+                  <a:txBody>
+                    <a:bodyPr/>
+                    <a:lstStyle/>
+                    <a:p>
+                      <a:pPr>
+                        <a:buNone/>
+                      </a:pPr>
+                      <a:r>
+                        <a:rPr lang="en-US" sz="1100"/>
+                        <a:t>airflow/dags/capital_bikeshare_etl.py</a:t>
+                      </a:r>
+                    </a:p>
+                  </a:txBody>
+                  <a:tcPr marL="35961" marR="35961" marT="17981" marB="17981" anchor="ctr"/>
+                </a:tc>
+                <a:extLst>
+                  <a:ext uri="{0D108BD9-81ED-4DB2-BD59-A6C34878D82A}">
+                    <a16:rowId xmlns:a16="http://schemas.microsoft.com/office/drawing/2014/main" val="2527023835"/>
+                  </a:ext>
+                </a:extLst>
+              </a:tr>
+              <a:tr h="371242">
+                <a:tc>
+                  <a:txBody>
+                    <a:bodyPr/>
+                    <a:lstStyle/>
+                    <a:p>
+                      <a:pPr>
+                        <a:buNone/>
+                      </a:pPr>
+                      <a:r>
+                        <a:rPr lang="en-US" sz="1100"/>
+                        <a:t>Scheduling</a:t>
+                      </a:r>
+                    </a:p>
+                  </a:txBody>
+                  <a:tcPr marL="35961" marR="35961" marT="17981" marB="17981" anchor="ctr"/>
+                </a:tc>
+                <a:tc>
+                  <a:txBody>
+                    <a:bodyPr/>
+                    <a:lstStyle/>
+                    <a:p>
+                      <a:pPr>
+                        <a:buNone/>
+                      </a:pPr>
+                      <a:r>
+                        <a:rPr lang="en-US" sz="1100"/>
+                        <a:t>Configured automatic execution every five minutes.</a:t>
+                      </a:r>
+                    </a:p>
+                  </a:txBody>
+                  <a:tcPr marL="35961" marR="35961" marT="17981" marB="17981" anchor="ctr"/>
+                </a:tc>
+                <a:tc>
+                  <a:txBody>
+                    <a:bodyPr/>
+                    <a:lstStyle/>
+                    <a:p>
+                      <a:pPr>
+                        <a:buNone/>
+                      </a:pPr>
+                      <a:r>
+                        <a:rPr lang="en-US" sz="1100"/>
+                        <a:t>airflow/dags/capital_bikeshare_etl.py</a:t>
+                      </a:r>
+                    </a:p>
+                  </a:txBody>
+                  <a:tcPr marL="35961" marR="35961" marT="17981" marB="17981" anchor="ctr"/>
+                </a:tc>
+                <a:extLst>
+                  <a:ext uri="{0D108BD9-81ED-4DB2-BD59-A6C34878D82A}">
+                    <a16:rowId xmlns:a16="http://schemas.microsoft.com/office/drawing/2014/main" val="31007080"/>
+                  </a:ext>
+                </a:extLst>
+              </a:tr>
+              <a:tr h="1005855">
+                <a:tc>
+                  <a:txBody>
+                    <a:bodyPr/>
+                    <a:lstStyle/>
+                    <a:p>
+                      <a:pPr>
+                        <a:buNone/>
+                      </a:pPr>
+                      <a:r>
+                        <a:rPr lang="en-US" sz="1100"/>
+                        <a:t>Extract task</a:t>
+                      </a:r>
+                    </a:p>
+                  </a:txBody>
+                  <a:tcPr marL="35961" marR="35961" marT="17981" marB="17981" anchor="ctr"/>
+                </a:tc>
+                <a:tc>
+                  <a:txBody>
+                    <a:bodyPr/>
+                    <a:lstStyle/>
+                    <a:p>
+                      <a:pPr>
+                        <a:buNone/>
+                      </a:pPr>
+                      <a:r>
+                        <a:rPr lang="en-US" sz="1100"/>
+                        <a:t>Reads the Capital Bikeshare GBFS discovery API to locate current feed URLs. It downloads station_information for station metadata and station_status for live availability.</a:t>
+                      </a:r>
+                    </a:p>
+                  </a:txBody>
+                  <a:tcPr marL="35961" marR="35961" marT="17981" marB="17981" anchor="ctr"/>
+                </a:tc>
+                <a:tc>
+                  <a:txBody>
+                    <a:bodyPr/>
+                    <a:lstStyle/>
+                    <a:p>
+                      <a:pPr>
+                        <a:buNone/>
+                      </a:pPr>
+                      <a:r>
+                        <a:rPr lang="en-US" sz="1100"/>
+                        <a:t>pipeline/extract.py</a:t>
+                      </a:r>
+                    </a:p>
+                  </a:txBody>
+                  <a:tcPr marL="35961" marR="35961" marT="17981" marB="17981" anchor="ctr"/>
+                </a:tc>
+                <a:extLst>
+                  <a:ext uri="{0D108BD9-81ED-4DB2-BD59-A6C34878D82A}">
+                    <a16:rowId xmlns:a16="http://schemas.microsoft.com/office/drawing/2014/main" val="3118266171"/>
+                  </a:ext>
+                </a:extLst>
+              </a:tr>
+              <a:tr h="844556">
+                <a:tc>
+                  <a:txBody>
+                    <a:bodyPr/>
+                    <a:lstStyle/>
+                    <a:p>
+                      <a:pPr>
+                        <a:buNone/>
+                      </a:pPr>
+                      <a:r>
+                        <a:rPr lang="en-US" sz="1100"/>
+                        <a:t>Transform task</a:t>
+                      </a:r>
+                    </a:p>
+                  </a:txBody>
+                  <a:tcPr marL="35961" marR="35961" marT="17981" marB="17981" anchor="ctr"/>
+                </a:tc>
+                <a:tc>
+                  <a:txBody>
+                    <a:bodyPr/>
+                    <a:lstStyle/>
+                    <a:p>
+                      <a:pPr>
+                        <a:buNone/>
+                      </a:pPr>
+                      <a:r>
+                        <a:rPr lang="en-US" sz="1100"/>
+                        <a:t>Normalizes timestamps, text, booleans, coordinates, and availability counts. It validates records and joins both feeds using station_id.</a:t>
+                      </a:r>
+                    </a:p>
+                  </a:txBody>
+                  <a:tcPr marL="35961" marR="35961" marT="17981" marB="17981" anchor="ctr"/>
+                </a:tc>
+                <a:tc>
+                  <a:txBody>
+                    <a:bodyPr/>
+                    <a:lstStyle/>
+                    <a:p>
+                      <a:pPr>
+                        <a:buNone/>
+                      </a:pPr>
+                      <a:r>
+                        <a:rPr lang="en-US" sz="1100"/>
+                        <a:t>pipeline/transform.py</a:t>
+                      </a:r>
+                    </a:p>
+                  </a:txBody>
+                  <a:tcPr marL="35961" marR="35961" marT="17981" marB="17981" anchor="ctr"/>
+                </a:tc>
+                <a:extLst>
+                  <a:ext uri="{0D108BD9-81ED-4DB2-BD59-A6C34878D82A}">
+                    <a16:rowId xmlns:a16="http://schemas.microsoft.com/office/drawing/2014/main" val="1335042524"/>
+                  </a:ext>
+                </a:extLst>
+              </a:tr>
+              <a:tr h="1005855">
+                <a:tc>
+                  <a:txBody>
+                    <a:bodyPr/>
+                    <a:lstStyle/>
+                    <a:p>
+                      <a:pPr>
+                        <a:buNone/>
+                      </a:pPr>
+                      <a:r>
+                        <a:rPr lang="en-US" sz="1100"/>
+                        <a:t>Load task</a:t>
+                      </a:r>
+                    </a:p>
+                  </a:txBody>
+                  <a:tcPr marL="35961" marR="35961" marT="17981" marB="17981" anchor="ctr"/>
+                </a:tc>
+                <a:tc>
+                  <a:txBody>
+                    <a:bodyPr/>
+                    <a:lstStyle/>
+                    <a:p>
+                      <a:pPr>
+                        <a:buNone/>
+                      </a:pPr>
+                      <a:r>
+                        <a:rPr lang="en-US" sz="1100"/>
+                        <a:t>Uses Psycopg and a PostgreSQL transaction to store raw responses, update station metadata, and append new status observations without duplicates.</a:t>
+                      </a:r>
+                    </a:p>
+                  </a:txBody>
+                  <a:tcPr marL="35961" marR="35961" marT="17981" marB="17981" anchor="ctr"/>
+                </a:tc>
+                <a:tc>
+                  <a:txBody>
+                    <a:bodyPr/>
+                    <a:lstStyle/>
+                    <a:p>
+                      <a:pPr>
+                        <a:buNone/>
+                      </a:pPr>
+                      <a:r>
+                        <a:rPr lang="en-US" sz="1100"/>
+                        <a:t>pipeline/load.py</a:t>
+                      </a:r>
+                    </a:p>
+                  </a:txBody>
+                  <a:tcPr marL="35961" marR="35961" marT="17981" marB="17981" anchor="ctr"/>
+                </a:tc>
+                <a:extLst>
+                  <a:ext uri="{0D108BD9-81ED-4DB2-BD59-A6C34878D82A}">
+                    <a16:rowId xmlns:a16="http://schemas.microsoft.com/office/drawing/2014/main" val="1494177737"/>
+                  </a:ext>
+                </a:extLst>
+              </a:tr>
+              <a:tr h="683257">
+                <a:tc>
+                  <a:txBody>
+                    <a:bodyPr/>
+                    <a:lstStyle/>
+                    <a:p>
+                      <a:pPr>
+                        <a:buNone/>
+                      </a:pPr>
+                      <a:r>
+                        <a:rPr lang="en-US" sz="1100"/>
+                        <a:t>Data exchange</a:t>
+                      </a:r>
+                    </a:p>
+                  </a:txBody>
+                  <a:tcPr marL="35961" marR="35961" marT="17981" marB="17981" anchor="ctr"/>
+                </a:tc>
+                <a:tc>
+                  <a:txBody>
+                    <a:bodyPr/>
+                    <a:lstStyle/>
+                    <a:p>
+                      <a:pPr>
+                        <a:buNone/>
+                      </a:pPr>
+                      <a:r>
+                        <a:rPr lang="en-US" sz="1100"/>
+                        <a:t>Saves temporary JSON artifacts and passes their file paths between Airflow tasks through XCom.</a:t>
+                      </a:r>
+                    </a:p>
+                  </a:txBody>
+                  <a:tcPr marL="35961" marR="35961" marT="17981" marB="17981" anchor="ctr"/>
+                </a:tc>
+                <a:tc>
+                  <a:txBody>
+                    <a:bodyPr/>
+                    <a:lstStyle/>
+                    <a:p>
+                      <a:pPr>
+                        <a:buNone/>
+                      </a:pPr>
+                      <a:r>
+                        <a:rPr lang="en-US" sz="1100"/>
+                        <a:t>pipeline/artifacts.py and the Airflow DAG</a:t>
+                      </a:r>
+                    </a:p>
+                  </a:txBody>
+                  <a:tcPr marL="35961" marR="35961" marT="17981" marB="17981" anchor="ctr"/>
+                </a:tc>
+                <a:extLst>
+                  <a:ext uri="{0D108BD9-81ED-4DB2-BD59-A6C34878D82A}">
+                    <a16:rowId xmlns:a16="http://schemas.microsoft.com/office/drawing/2014/main" val="4138730093"/>
+                  </a:ext>
+                </a:extLst>
+              </a:tr>
+              <a:tr h="550573">
+                <a:tc>
+                  <a:txBody>
+                    <a:bodyPr/>
+                    <a:lstStyle/>
+                    <a:p>
+                      <a:pPr>
+                        <a:buNone/>
+                      </a:pPr>
+                      <a:r>
+                        <a:rPr lang="en-US" sz="1100"/>
+                        <a:t>Reliability</a:t>
+                      </a:r>
+                    </a:p>
+                  </a:txBody>
+                  <a:tcPr marL="35961" marR="35961" marT="17981" marB="17981" anchor="ctr"/>
+                </a:tc>
+                <a:tc>
+                  <a:txBody>
+                    <a:bodyPr/>
+                    <a:lstStyle/>
+                    <a:p>
+                      <a:pPr>
+                        <a:buNone/>
+                      </a:pPr>
+                      <a:r>
+                        <a:rPr lang="en-US" sz="1100"/>
+                        <a:t>Uses two retries, a 30-second retry delay, no historical catch-up, and one active run at a time.</a:t>
+                      </a:r>
+                    </a:p>
+                  </a:txBody>
+                  <a:tcPr marL="35961" marR="35961" marT="17981" marB="17981" anchor="ctr"/>
+                </a:tc>
+                <a:tc>
+                  <a:txBody>
+                    <a:bodyPr/>
+                    <a:lstStyle/>
+                    <a:p>
+                      <a:pPr>
+                        <a:buNone/>
+                      </a:pPr>
+                      <a:r>
+                        <a:rPr lang="en-US" sz="1100" dirty="0"/>
+                        <a:t>airflow/dags/capital_bikeshare_etl.py</a:t>
+                      </a:r>
+                    </a:p>
+                  </a:txBody>
+                  <a:tcPr marL="35961" marR="35961" marT="17981" marB="17981" anchor="ctr"/>
+                </a:tc>
+                <a:extLst>
+                  <a:ext uri="{0D108BD9-81ED-4DB2-BD59-A6C34878D82A}">
+                    <a16:rowId xmlns:a16="http://schemas.microsoft.com/office/drawing/2014/main" val="27288634"/>
+                  </a:ext>
+                </a:extLst>
+              </a:tr>
+            </a:tbl>
+          </a:graphicData>
+        </a:graphic>
+      </p:graphicFrame>
+    </p:spTree>
+    <p:extLst>
+      <p:ext uri="{BB962C8B-B14F-4D97-AF65-F5344CB8AC3E}">
+        <p14:creationId xmlns:p14="http://schemas.microsoft.com/office/powerpoint/2010/main" val="810582112"/>
+      </p:ext>
+    </p:extLst>
+  </p:cSld>
+  <p:clrMapOvr>
+    <a:masterClrMapping/>
+  </p:clrMapOvr>
+</p:sld>
+</file>
+
+<file path=ppt/slides/slide7.xml><?xml version="1.0" encoding="utf-8"?>
+<p:sld xmlns:a="http://schemas.openxmlformats.org/drawingml/2006/main" xmlns:r="http://schemas.openxmlformats.org/officeDocument/2006/relationships" xmlns:p="http://schemas.openxmlformats.org/presentationml/2006/main">
+  <p:cSld>
+    <p:spTree>
+      <p:nvGrpSpPr>
+        <p:cNvPr id="1" name="">
+          <a:extLst>
+            <a:ext uri="{FF2B5EF4-FFF2-40B4-BE49-F238E27FC236}">
+              <a16:creationId xmlns:a16="http://schemas.microsoft.com/office/drawing/2014/main" id="{1B287D04-6CD9-A964-AD4D-40CA6F157E7E}"/>
+            </a:ext>
+          </a:extLst>
+        </p:cNvPr>
+        <p:cNvGrpSpPr/>
+        <p:nvPr/>
+      </p:nvGrpSpPr>
+      <p:grpSpPr>
+        <a:xfrm>
+          <a:off x="0" y="0"/>
+          <a:ext cx="0" cy="0"/>
+          <a:chOff x="0" y="0"/>
+          <a:chExt cx="0" cy="0"/>
+        </a:xfrm>
+      </p:grpSpPr>
+      <p:sp>
+        <p:nvSpPr>
+          <p:cNvPr id="21" name="Rectangle 20">
+            <a:extLst>
+              <a:ext uri="{FF2B5EF4-FFF2-40B4-BE49-F238E27FC236}">
+                <a16:creationId xmlns:a16="http://schemas.microsoft.com/office/drawing/2014/main" id="{9DD936DF-D511-C3B8-5929-82B333B5D261}"/>
+              </a:ext>
+            </a:extLst>
+          </p:cNvPr>
+          <p:cNvSpPr>
+            <a:spLocks noGrp="1"/>
+          </p:cNvSpPr>
+          <p:nvPr/>
+        </p:nvSpPr>
+        <p:spPr>
+          <a:xfrm>
+            <a:off x="400050" y="276225"/>
+            <a:ext cx="4953000" cy="209550"/>
+          </a:xfrm>
+          <a:prstGeom prst="rect">
+            <a:avLst/>
+          </a:prstGeom>
+        </p:spPr>
+        <p:txBody>
+          <a:bodyPr wrap="square" lIns="0" tIns="0" rIns="0" bIns="0" anchor="t">
+            <a:normAutofit/>
+          </a:bodyPr>
+          <a:lstStyle/>
+          <a:p>
+            <a:pPr algn="l">
+              <a:defRPr sz="975" b="1">
+                <a:solidFill>
+                  <a:srgbClr val="D9232E"/>
+                </a:solidFill>
+                <a:latin typeface="Arial"/>
+                <a:ea typeface="Arial"/>
+                <a:cs typeface="Arial"/>
+              </a:defRPr>
+            </a:pPr>
+            <a:r>
+              <a:t>CAPITAL BIKESHARE OPERATIONS</a:t>
+            </a:r>
+          </a:p>
+        </p:txBody>
+      </p:sp>
+      <p:sp>
+        <p:nvSpPr>
+          <p:cNvPr id="2" name="Rectangle 1">
+            <a:extLst>
+              <a:ext uri="{FF2B5EF4-FFF2-40B4-BE49-F238E27FC236}">
+                <a16:creationId xmlns:a16="http://schemas.microsoft.com/office/drawing/2014/main" id="{1A12BDF5-05FD-F4FB-E076-3235E3498724}"/>
+              </a:ext>
+            </a:extLst>
+          </p:cNvPr>
+          <p:cNvSpPr>
+            <a:spLocks noGrp="1"/>
+          </p:cNvSpPr>
+          <p:nvPr/>
+        </p:nvSpPr>
+        <p:spPr>
+          <a:xfrm>
+            <a:off x="400050" y="581025"/>
+            <a:ext cx="11391900" cy="628650"/>
+          </a:xfrm>
+          <a:prstGeom prst="rect">
+            <a:avLst/>
+          </a:prstGeom>
+        </p:spPr>
+        <p:txBody>
+          <a:bodyPr wrap="square" lIns="0" tIns="0" rIns="0" bIns="0" anchor="t">
+            <a:normAutofit/>
+          </a:bodyPr>
+          <a:lstStyle/>
+          <a:p>
+            <a:pPr algn="l">
+              <a:defRPr sz="3000" b="1">
+                <a:solidFill>
+                  <a:srgbClr val="15191D"/>
+                </a:solidFill>
+                <a:latin typeface="Arial"/>
+                <a:ea typeface="Arial"/>
+                <a:cs typeface="Arial"/>
+              </a:defRPr>
+            </a:pPr>
+            <a:r>
+              <a:rPr lang="en-US" dirty="0"/>
+              <a:t>PostgreSQL </a:t>
+            </a:r>
+            <a:endParaRPr dirty="0"/>
+          </a:p>
+        </p:txBody>
+      </p:sp>
+      <p:cxnSp>
+        <p:nvCxnSpPr>
+          <p:cNvPr id="23" name="Straight Arrow Connector 22">
+            <a:extLst>
+              <a:ext uri="{FF2B5EF4-FFF2-40B4-BE49-F238E27FC236}">
+                <a16:creationId xmlns:a16="http://schemas.microsoft.com/office/drawing/2014/main" id="{701F63C5-42E4-28C9-4055-77EAA8DE539C}"/>
+              </a:ext>
+            </a:extLst>
+          </p:cNvPr>
+          <p:cNvCxnSpPr/>
+          <p:nvPr/>
+        </p:nvCxnSpPr>
+        <p:spPr>
+          <a:xfrm>
+            <a:off x="400050" y="1304925"/>
+            <a:ext cx="11391900" cy="9525"/>
+          </a:xfrm>
+          <a:prstGeom prst="straightConnector1">
+            <a:avLst/>
+          </a:prstGeom>
+          <a:ln w="9525">
+            <a:solidFill>
+              <a:srgbClr val="C9CED2"/>
+            </a:solidFill>
+            <a:prstDash val="solid"/>
+          </a:ln>
+        </p:spPr>
+      </p:cxnSp>
+      <p:pic>
+        <p:nvPicPr>
+          <p:cNvPr id="6" name="Picture 5">
+            <a:extLst>
+              <a:ext uri="{FF2B5EF4-FFF2-40B4-BE49-F238E27FC236}">
+                <a16:creationId xmlns:a16="http://schemas.microsoft.com/office/drawing/2014/main" id="{8DE14099-BCED-9C9B-9C53-0FD10A60DA70}"/>
+              </a:ext>
+            </a:extLst>
+          </p:cNvPr>
+          <p:cNvPicPr>
+            <a:picLocks noChangeAspect="1"/>
+          </p:cNvPicPr>
+          <p:nvPr/>
+        </p:nvPicPr>
+        <p:blipFill>
+          <a:blip r:embed="rId3">
+            <a:extLst>
+              <a:ext uri="{28A0092B-C50C-407E-A947-70E740481C1C}">
+                <a14:useLocalDpi xmlns:a14="http://schemas.microsoft.com/office/drawing/2010/main" val="0"/>
+              </a:ext>
+            </a:extLst>
+          </a:blip>
+          <a:stretch>
+            <a:fillRect/>
+          </a:stretch>
+        </p:blipFill>
+        <p:spPr>
+          <a:xfrm>
+            <a:off x="1016000" y="1314450"/>
+            <a:ext cx="9304867" cy="5523703"/>
+          </a:xfrm>
+          <a:prstGeom prst="rect">
+            <a:avLst/>
+          </a:prstGeom>
+        </p:spPr>
+      </p:pic>
+    </p:spTree>
+    <p:extLst>
+      <p:ext uri="{BB962C8B-B14F-4D97-AF65-F5344CB8AC3E}">
+        <p14:creationId xmlns:p14="http://schemas.microsoft.com/office/powerpoint/2010/main" val="3642325858"/>
+      </p:ext>
+    </p:extLst>
+  </p:cSld>
+  <p:clrMapOvr>
+    <a:masterClrMapping/>
+  </p:clrMapOvr>
+</p:sld>
+</file>
+
+<file path=ppt/slides/slide8.xml><?xml version="1.0" encoding="utf-8"?>
+<p:sld xmlns:a="http://schemas.openxmlformats.org/drawingml/2006/main" xmlns:r="http://schemas.openxmlformats.org/officeDocument/2006/relationships" xmlns:p="http://schemas.openxmlformats.org/presentationml/2006/main">
+  <p:cSld>
+    <p:spTree>
+      <p:nvGrpSpPr>
+        <p:cNvPr id="1" name="">
+          <a:extLst>
+            <a:ext uri="{FF2B5EF4-FFF2-40B4-BE49-F238E27FC236}">
+              <a16:creationId xmlns:a16="http://schemas.microsoft.com/office/drawing/2014/main" id="{379C06F0-A8E0-0AA5-E01B-F6F49BD05052}"/>
+            </a:ext>
+          </a:extLst>
+        </p:cNvPr>
+        <p:cNvGrpSpPr/>
+        <p:nvPr/>
+      </p:nvGrpSpPr>
+      <p:grpSpPr>
+        <a:xfrm>
+          <a:off x="0" y="0"/>
+          <a:ext cx="0" cy="0"/>
+          <a:chOff x="0" y="0"/>
+          <a:chExt cx="0" cy="0"/>
+        </a:xfrm>
+      </p:grpSpPr>
+      <p:sp>
+        <p:nvSpPr>
+          <p:cNvPr id="21" name="Rectangle 20">
+            <a:extLst>
+              <a:ext uri="{FF2B5EF4-FFF2-40B4-BE49-F238E27FC236}">
+                <a16:creationId xmlns:a16="http://schemas.microsoft.com/office/drawing/2014/main" id="{3F5034B5-8671-B009-536F-AEB731145F7B}"/>
+              </a:ext>
+            </a:extLst>
+          </p:cNvPr>
+          <p:cNvSpPr>
+            <a:spLocks noGrp="1"/>
+          </p:cNvSpPr>
+          <p:nvPr/>
+        </p:nvSpPr>
+        <p:spPr>
+          <a:xfrm>
+            <a:off x="400050" y="276225"/>
+            <a:ext cx="4953000" cy="209550"/>
+          </a:xfrm>
+          <a:prstGeom prst="rect">
+            <a:avLst/>
+          </a:prstGeom>
+        </p:spPr>
+        <p:txBody>
+          <a:bodyPr wrap="square" lIns="0" tIns="0" rIns="0" bIns="0" anchor="t">
+            <a:normAutofit/>
+          </a:bodyPr>
+          <a:lstStyle/>
+          <a:p>
+            <a:pPr algn="l">
+              <a:defRPr sz="975" b="1">
+                <a:solidFill>
+                  <a:srgbClr val="D9232E"/>
+                </a:solidFill>
+                <a:latin typeface="Arial"/>
+                <a:ea typeface="Arial"/>
+                <a:cs typeface="Arial"/>
+              </a:defRPr>
+            </a:pPr>
+            <a:r>
+              <a:t>CAPITAL BIKESHARE OPERATIONS</a:t>
+            </a:r>
+          </a:p>
+        </p:txBody>
+      </p:sp>
+      <p:sp>
+        <p:nvSpPr>
+          <p:cNvPr id="2" name="Rectangle 1">
+            <a:extLst>
+              <a:ext uri="{FF2B5EF4-FFF2-40B4-BE49-F238E27FC236}">
+                <a16:creationId xmlns:a16="http://schemas.microsoft.com/office/drawing/2014/main" id="{94B57C39-A125-533B-375D-2DAB2F4567D2}"/>
+              </a:ext>
+            </a:extLst>
+          </p:cNvPr>
+          <p:cNvSpPr>
+            <a:spLocks noGrp="1"/>
+          </p:cNvSpPr>
+          <p:nvPr/>
+        </p:nvSpPr>
+        <p:spPr>
+          <a:xfrm>
+            <a:off x="400050" y="581025"/>
+            <a:ext cx="11391900" cy="628650"/>
+          </a:xfrm>
+          <a:prstGeom prst="rect">
+            <a:avLst/>
+          </a:prstGeom>
+        </p:spPr>
+        <p:txBody>
+          <a:bodyPr wrap="square" lIns="0" tIns="0" rIns="0" bIns="0" anchor="t">
+            <a:normAutofit/>
+          </a:bodyPr>
+          <a:lstStyle/>
+          <a:p>
+            <a:pPr>
+              <a:defRPr sz="3000" b="1">
+                <a:solidFill>
+                  <a:srgbClr val="15191D"/>
+                </a:solidFill>
+                <a:latin typeface="Arial"/>
+                <a:ea typeface="Arial"/>
+                <a:cs typeface="Arial"/>
+              </a:defRPr>
+            </a:pPr>
+            <a:r>
+              <a:rPr lang="en-US" sz="3000" b="1" dirty="0">
+                <a:solidFill>
+                  <a:srgbClr val="15191D"/>
+                </a:solidFill>
+                <a:latin typeface="Arial"/>
+              </a:rPr>
+              <a:t>PostgreSQL Tables and Attributes</a:t>
+            </a:r>
+            <a:r>
+              <a:rPr lang="en-US" dirty="0"/>
+              <a:t> </a:t>
+            </a:r>
+            <a:endParaRPr dirty="0"/>
+          </a:p>
+        </p:txBody>
+      </p:sp>
+      <p:cxnSp>
+        <p:nvCxnSpPr>
+          <p:cNvPr id="23" name="Straight Arrow Connector 22">
+            <a:extLst>
+              <a:ext uri="{FF2B5EF4-FFF2-40B4-BE49-F238E27FC236}">
+                <a16:creationId xmlns:a16="http://schemas.microsoft.com/office/drawing/2014/main" id="{BEC492DD-C54B-C0E8-154B-E31D1342BB63}"/>
+              </a:ext>
+            </a:extLst>
+          </p:cNvPr>
+          <p:cNvCxnSpPr/>
+          <p:nvPr/>
+        </p:nvCxnSpPr>
+        <p:spPr>
+          <a:xfrm>
+            <a:off x="400050" y="1304925"/>
+            <a:ext cx="11391900" cy="9525"/>
+          </a:xfrm>
+          <a:prstGeom prst="straightConnector1">
+            <a:avLst/>
+          </a:prstGeom>
+          <a:ln w="9525">
+            <a:solidFill>
+              <a:srgbClr val="C9CED2"/>
+            </a:solidFill>
+            <a:prstDash val="solid"/>
+          </a:ln>
+        </p:spPr>
+      </p:cxnSp>
+      <p:graphicFrame>
+        <p:nvGraphicFramePr>
+          <p:cNvPr id="3" name="Table 2">
+            <a:extLst>
+              <a:ext uri="{FF2B5EF4-FFF2-40B4-BE49-F238E27FC236}">
+                <a16:creationId xmlns:a16="http://schemas.microsoft.com/office/drawing/2014/main" id="{D72A2C61-9CFF-718A-5B85-F0EE501F4E9F}"/>
+              </a:ext>
+            </a:extLst>
+          </p:cNvPr>
+          <p:cNvGraphicFramePr>
+            <a:graphicFrameLocks noGrp="1"/>
+          </p:cNvGraphicFramePr>
+          <p:nvPr>
+            <p:extLst>
+              <p:ext uri="{D42A27DB-BD31-4B8C-83A1-F6EECF244321}">
+                <p14:modId xmlns:p14="http://schemas.microsoft.com/office/powerpoint/2010/main" val="2543007"/>
+              </p:ext>
+            </p:extLst>
+          </p:nvPr>
+        </p:nvGraphicFramePr>
+        <p:xfrm>
+          <a:off x="2466372" y="1542060"/>
+          <a:ext cx="7259256" cy="4968805"/>
+        </p:xfrm>
+        <a:graphic>
+          <a:graphicData uri="http://schemas.openxmlformats.org/drawingml/2006/table">
+            <a:tbl>
+              <a:tblPr>
+                <a:tableStyleId>{5C22544A-7EE6-4342-B048-85BDC9FD1C3A}</a:tableStyleId>
+              </a:tblPr>
+              <a:tblGrid>
+                <a:gridCol w="2419752">
+                  <a:extLst>
+                    <a:ext uri="{9D8B030D-6E8A-4147-A177-3AD203B41FA5}">
+                      <a16:colId xmlns:a16="http://schemas.microsoft.com/office/drawing/2014/main" val="3088779863"/>
+                    </a:ext>
+                  </a:extLst>
+                </a:gridCol>
+                <a:gridCol w="2419752">
+                  <a:extLst>
+                    <a:ext uri="{9D8B030D-6E8A-4147-A177-3AD203B41FA5}">
+                      <a16:colId xmlns:a16="http://schemas.microsoft.com/office/drawing/2014/main" val="885618328"/>
+                    </a:ext>
+                  </a:extLst>
+                </a:gridCol>
+                <a:gridCol w="2419752">
+                  <a:extLst>
+                    <a:ext uri="{9D8B030D-6E8A-4147-A177-3AD203B41FA5}">
+                      <a16:colId xmlns:a16="http://schemas.microsoft.com/office/drawing/2014/main" val="2885627469"/>
+                    </a:ext>
+                  </a:extLst>
+                </a:gridCol>
+              </a:tblGrid>
+              <a:tr h="253279">
+                <a:tc>
+                  <a:txBody>
+                    <a:bodyPr/>
+                    <a:lstStyle/>
+                    <a:p>
+                      <a:pPr>
+                        <a:buNone/>
+                      </a:pPr>
+                      <a:r>
+                        <a:rPr lang="en-US" sz="1100"/>
+                        <a:t>Table</a:t>
+                      </a:r>
+                    </a:p>
+                  </a:txBody>
+                  <a:tcPr marL="54392" marR="54392" marT="27196" marB="27196" anchor="ctr"/>
+                </a:tc>
+                <a:tc>
+                  <a:txBody>
+                    <a:bodyPr/>
+                    <a:lstStyle/>
+                    <a:p>
+                      <a:pPr>
+                        <a:buNone/>
+                      </a:pPr>
+                      <a:r>
+                        <a:rPr lang="en-US" sz="1100"/>
+                        <a:t>Main attributes</a:t>
+                      </a:r>
+                    </a:p>
+                  </a:txBody>
+                  <a:tcPr marL="54392" marR="54392" marT="27196" marB="27196" anchor="ctr"/>
+                </a:tc>
+                <a:tc>
+                  <a:txBody>
+                    <a:bodyPr/>
+                    <a:lstStyle/>
+                    <a:p>
+                      <a:pPr>
+                        <a:buNone/>
+                      </a:pPr>
+                      <a:r>
+                        <a:rPr lang="en-US" sz="1100"/>
+                        <a:t>Why they are stored</a:t>
+                      </a:r>
+                    </a:p>
+                  </a:txBody>
+                  <a:tcPr marL="54392" marR="54392" marT="27196" marB="27196" anchor="ctr"/>
+                </a:tc>
+                <a:extLst>
+                  <a:ext uri="{0D108BD9-81ED-4DB2-BD59-A6C34878D82A}">
+                    <a16:rowId xmlns:a16="http://schemas.microsoft.com/office/drawing/2014/main" val="2276205697"/>
+                  </a:ext>
+                </a:extLst>
+              </a:tr>
+              <a:tr h="806603">
+                <a:tc>
+                  <a:txBody>
+                    <a:bodyPr/>
+                    <a:lstStyle/>
+                    <a:p>
+                      <a:pPr>
+                        <a:buNone/>
+                      </a:pPr>
+                      <a:r>
+                        <a:rPr lang="en-US" sz="1100"/>
+                        <a:t>gbfs_raw_data</a:t>
+                      </a:r>
+                    </a:p>
+                  </a:txBody>
+                  <a:tcPr marL="54392" marR="54392" marT="27196" marB="27196" anchor="ctr"/>
+                </a:tc>
+                <a:tc>
+                  <a:txBody>
+                    <a:bodyPr/>
+                    <a:lstStyle/>
+                    <a:p>
+                      <a:pPr>
+                        <a:buNone/>
+                      </a:pPr>
+                      <a:r>
+                        <a:rPr lang="en-US" sz="1100"/>
+                        <a:t>id, feed_name, gbfs_version, source_last_updated, fetched_at, payload</a:t>
+                      </a:r>
+                    </a:p>
+                  </a:txBody>
+                  <a:tcPr marL="54392" marR="54392" marT="27196" marB="27196" anchor="ctr"/>
+                </a:tc>
+                <a:tc>
+                  <a:txBody>
+                    <a:bodyPr/>
+                    <a:lstStyle/>
+                    <a:p>
+                      <a:pPr>
+                        <a:buNone/>
+                      </a:pPr>
+                      <a:r>
+                        <a:rPr lang="en-US" sz="1100"/>
+                        <a:t>Preserves original API responses for auditing, troubleshooting, and replaying transformations.</a:t>
+                      </a:r>
+                    </a:p>
+                  </a:txBody>
+                  <a:tcPr marL="54392" marR="54392" marT="27196" marB="27196" anchor="ctr"/>
+                </a:tc>
+                <a:extLst>
+                  <a:ext uri="{0D108BD9-81ED-4DB2-BD59-A6C34878D82A}">
+                    <a16:rowId xmlns:a16="http://schemas.microsoft.com/office/drawing/2014/main" val="1545860352"/>
+                  </a:ext>
+                </a:extLst>
+              </a:tr>
+              <a:tr h="806603">
+                <a:tc>
+                  <a:txBody>
+                    <a:bodyPr/>
+                    <a:lstStyle/>
+                    <a:p>
+                      <a:pPr>
+                        <a:buNone/>
+                      </a:pPr>
+                      <a:r>
+                        <a:rPr lang="en-US" sz="1100"/>
+                        <a:t>stations</a:t>
+                      </a:r>
+                    </a:p>
+                  </a:txBody>
+                  <a:tcPr marL="54392" marR="54392" marT="27196" marB="27196" anchor="ctr"/>
+                </a:tc>
+                <a:tc>
+                  <a:txBody>
+                    <a:bodyPr/>
+                    <a:lstStyle/>
+                    <a:p>
+                      <a:pPr>
+                        <a:buNone/>
+                      </a:pPr>
+                      <a:r>
+                        <a:rPr lang="en-US" sz="1100"/>
+                        <a:t>station_id, name, short_name, latitude, longitude, capacity, source_last_updated</a:t>
+                      </a:r>
+                    </a:p>
+                  </a:txBody>
+                  <a:tcPr marL="54392" marR="54392" marT="27196" marB="27196" anchor="ctr"/>
+                </a:tc>
+                <a:tc>
+                  <a:txBody>
+                    <a:bodyPr/>
+                    <a:lstStyle/>
+                    <a:p>
+                      <a:pPr>
+                        <a:buNone/>
+                      </a:pPr>
+                      <a:r>
+                        <a:rPr lang="en-US" sz="1100"/>
+                        <a:t>Stores the latest descriptive information for each station and provides coordinates for the map.</a:t>
+                      </a:r>
+                    </a:p>
+                  </a:txBody>
+                  <a:tcPr marL="54392" marR="54392" marT="27196" marB="27196" anchor="ctr"/>
+                </a:tc>
+                <a:extLst>
+                  <a:ext uri="{0D108BD9-81ED-4DB2-BD59-A6C34878D82A}">
+                    <a16:rowId xmlns:a16="http://schemas.microsoft.com/office/drawing/2014/main" val="1331441143"/>
+                  </a:ext>
+                </a:extLst>
+              </a:tr>
+              <a:tr h="1365021">
+                <a:tc>
+                  <a:txBody>
+                    <a:bodyPr/>
+                    <a:lstStyle/>
+                    <a:p>
+                      <a:pPr>
+                        <a:buNone/>
+                      </a:pPr>
+                      <a:r>
+                        <a:rPr lang="en-US" sz="1100"/>
+                        <a:t>station_status_history</a:t>
+                      </a:r>
+                    </a:p>
+                  </a:txBody>
+                  <a:tcPr marL="54392" marR="54392" marT="27196" marB="27196" anchor="ctr"/>
+                </a:tc>
+                <a:tc>
+                  <a:txBody>
+                    <a:bodyPr/>
+                    <a:lstStyle/>
+                    <a:p>
+                      <a:pPr>
+                        <a:buNone/>
+                      </a:pPr>
+                      <a:r>
+                        <a:rPr lang="en-US" sz="1100"/>
+                        <a:t>station_id, reported_at, bikes_available, bikes_disabled, docks_available, docks_disabled, is_installed, is_renting, is_returning</a:t>
+                      </a:r>
+                    </a:p>
+                  </a:txBody>
+                  <a:tcPr marL="54392" marR="54392" marT="27196" marB="27196" anchor="ctr"/>
+                </a:tc>
+                <a:tc>
+                  <a:txBody>
+                    <a:bodyPr/>
+                    <a:lstStyle/>
+                    <a:p>
+                      <a:pPr>
+                        <a:buNone/>
+                      </a:pPr>
+                      <a:r>
+                        <a:rPr lang="en-US" sz="1100"/>
+                        <a:t>Records changing availability over time for trend analysis and depletion prediction.</a:t>
+                      </a:r>
+                    </a:p>
+                  </a:txBody>
+                  <a:tcPr marL="54392" marR="54392" marT="27196" marB="27196" anchor="ctr"/>
+                </a:tc>
+                <a:extLst>
+                  <a:ext uri="{0D108BD9-81ED-4DB2-BD59-A6C34878D82A}">
+                    <a16:rowId xmlns:a16="http://schemas.microsoft.com/office/drawing/2014/main" val="2311727869"/>
+                  </a:ext>
+                </a:extLst>
+              </a:tr>
+              <a:tr h="1737299">
+                <a:tc>
+                  <a:txBody>
+                    <a:bodyPr/>
+                    <a:lstStyle/>
+                    <a:p>
+                      <a:pPr>
+                        <a:buNone/>
+                      </a:pPr>
+                      <a:r>
+                        <a:rPr lang="en-US" sz="1100"/>
+                        <a:t>station_alerts</a:t>
+                      </a:r>
+                    </a:p>
+                  </a:txBody>
+                  <a:tcPr marL="54392" marR="54392" marT="27196" marB="27196" anchor="ctr"/>
+                </a:tc>
+                <a:tc>
+                  <a:txBody>
+                    <a:bodyPr/>
+                    <a:lstStyle/>
+                    <a:p>
+                      <a:pPr>
+                        <a:buNone/>
+                      </a:pPr>
+                      <a:r>
+                        <a:rPr lang="en-US" sz="1100"/>
+                        <a:t>station_id, station_name, severity, bikes_available, depletion_rate_per_minute, predicted_minutes_to_empty, reason, first_reported_at, last_reported_at, resolved_at</a:t>
+                      </a:r>
+                    </a:p>
+                  </a:txBody>
+                  <a:tcPr marL="54392" marR="54392" marT="27196" marB="27196" anchor="ctr"/>
+                </a:tc>
+                <a:tc>
+                  <a:txBody>
+                    <a:bodyPr/>
+                    <a:lstStyle/>
+                    <a:p>
+                      <a:pPr>
+                        <a:buNone/>
+                      </a:pPr>
+                      <a:r>
+                        <a:rPr lang="en-US" sz="1100" dirty="0"/>
+                        <a:t>Stores warning and critical alerts, their cause, prediction values, duration, and resolution status.</a:t>
+                      </a:r>
+                    </a:p>
+                  </a:txBody>
+                  <a:tcPr marL="54392" marR="54392" marT="27196" marB="27196" anchor="ctr"/>
+                </a:tc>
+                <a:extLst>
+                  <a:ext uri="{0D108BD9-81ED-4DB2-BD59-A6C34878D82A}">
+                    <a16:rowId xmlns:a16="http://schemas.microsoft.com/office/drawing/2014/main" val="1758663376"/>
+                  </a:ext>
+                </a:extLst>
+              </a:tr>
+            </a:tbl>
+          </a:graphicData>
+        </a:graphic>
+      </p:graphicFrame>
+    </p:spTree>
+    <p:extLst>
+      <p:ext uri="{BB962C8B-B14F-4D97-AF65-F5344CB8AC3E}">
+        <p14:creationId xmlns:p14="http://schemas.microsoft.com/office/powerpoint/2010/main" val="1406673078"/>
+      </p:ext>
+    </p:extLst>
+  </p:cSld>
+  <p:clrMapOvr>
+    <a:masterClrMapping/>
+  </p:clrMapOvr>
+</p:sld>
+</file>
+
+<file path=ppt/slides/slide9.xml><?xml version="1.0" encoding="utf-8"?>
+<p:sld xmlns:a="http://schemas.openxmlformats.org/drawingml/2006/main" xmlns:r="http://schemas.openxmlformats.org/officeDocument/2006/relationships" xmlns:p="http://schemas.openxmlformats.org/presentationml/2006/main">
+  <p:cSld>
+    <p:spTree>
+      <p:nvGrpSpPr>
+        <p:cNvPr id="1" name="">
+          <a:extLst>
+            <a:ext uri="{FF2B5EF4-FFF2-40B4-BE49-F238E27FC236}">
+              <a16:creationId xmlns:a16="http://schemas.microsoft.com/office/drawing/2014/main" id="{45EBF689-8D12-5462-865E-AA7AADF59A3D}"/>
+            </a:ext>
+          </a:extLst>
+        </p:cNvPr>
+        <p:cNvGrpSpPr/>
+        <p:nvPr/>
+      </p:nvGrpSpPr>
+      <p:grpSpPr>
+        <a:xfrm>
+          <a:off x="0" y="0"/>
+          <a:ext cx="0" cy="0"/>
+          <a:chOff x="0" y="0"/>
+          <a:chExt cx="0" cy="0"/>
+        </a:xfrm>
+      </p:grpSpPr>
+      <p:sp>
+        <p:nvSpPr>
+          <p:cNvPr id="21" name="Rectangle 20">
+            <a:extLst>
+              <a:ext uri="{FF2B5EF4-FFF2-40B4-BE49-F238E27FC236}">
+                <a16:creationId xmlns:a16="http://schemas.microsoft.com/office/drawing/2014/main" id="{20CD678A-CE8B-5F3D-76CD-F5805A21CB51}"/>
+              </a:ext>
+            </a:extLst>
+          </p:cNvPr>
+          <p:cNvSpPr>
+            <a:spLocks noGrp="1"/>
+          </p:cNvSpPr>
+          <p:nvPr/>
+        </p:nvSpPr>
+        <p:spPr>
+          <a:xfrm>
+            <a:off x="400050" y="276225"/>
+            <a:ext cx="4953000" cy="209550"/>
+          </a:xfrm>
+          <a:prstGeom prst="rect">
+            <a:avLst/>
+          </a:prstGeom>
+        </p:spPr>
+        <p:txBody>
+          <a:bodyPr wrap="square" lIns="0" tIns="0" rIns="0" bIns="0" anchor="t">
+            <a:normAutofit/>
+          </a:bodyPr>
+          <a:lstStyle/>
+          <a:p>
+            <a:pPr algn="l">
+              <a:defRPr sz="975" b="1">
+                <a:solidFill>
+                  <a:srgbClr val="D9232E"/>
+                </a:solidFill>
+                <a:latin typeface="Arial"/>
+                <a:ea typeface="Arial"/>
+                <a:cs typeface="Arial"/>
+              </a:defRPr>
+            </a:pPr>
+            <a:r>
+              <a:t>CAPITAL BIKESHARE OPERATIONS</a:t>
+            </a:r>
+          </a:p>
+        </p:txBody>
+      </p:sp>
+      <p:sp>
+        <p:nvSpPr>
+          <p:cNvPr id="2" name="Rectangle 1">
+            <a:extLst>
+              <a:ext uri="{FF2B5EF4-FFF2-40B4-BE49-F238E27FC236}">
+                <a16:creationId xmlns:a16="http://schemas.microsoft.com/office/drawing/2014/main" id="{6B49A3F9-7DFF-9E4D-572C-6759A2DD21EA}"/>
+              </a:ext>
+            </a:extLst>
+          </p:cNvPr>
+          <p:cNvSpPr>
+            <a:spLocks noGrp="1"/>
+          </p:cNvSpPr>
+          <p:nvPr/>
+        </p:nvSpPr>
+        <p:spPr>
+          <a:xfrm>
+            <a:off x="400050" y="581025"/>
+            <a:ext cx="11391900" cy="628650"/>
+          </a:xfrm>
+          <a:prstGeom prst="rect">
+            <a:avLst/>
+          </a:prstGeom>
+        </p:spPr>
+        <p:txBody>
+          <a:bodyPr wrap="square" lIns="0" tIns="0" rIns="0" bIns="0" anchor="t">
+            <a:normAutofit/>
+          </a:bodyPr>
+          <a:lstStyle/>
+          <a:p>
+            <a:pPr algn="l">
+              <a:defRPr sz="3000" b="1">
+                <a:solidFill>
+                  <a:srgbClr val="15191D"/>
+                </a:solidFill>
+                <a:latin typeface="Arial"/>
+                <a:ea typeface="Arial"/>
+                <a:cs typeface="Arial"/>
+              </a:defRPr>
+            </a:pPr>
+            <a:r>
+              <a:rPr lang="en-US" dirty="0"/>
+              <a:t>Kafka </a:t>
+            </a:r>
+            <a:endParaRPr dirty="0"/>
+          </a:p>
+        </p:txBody>
+      </p:sp>
+      <p:cxnSp>
+        <p:nvCxnSpPr>
+          <p:cNvPr id="23" name="Straight Arrow Connector 22">
+            <a:extLst>
+              <a:ext uri="{FF2B5EF4-FFF2-40B4-BE49-F238E27FC236}">
+                <a16:creationId xmlns:a16="http://schemas.microsoft.com/office/drawing/2014/main" id="{36450370-24AB-9E3E-FC3A-FB1F4D80B751}"/>
+              </a:ext>
+            </a:extLst>
+          </p:cNvPr>
+          <p:cNvCxnSpPr/>
+          <p:nvPr/>
+        </p:nvCxnSpPr>
+        <p:spPr>
+          <a:xfrm>
+            <a:off x="400050" y="1304925"/>
+            <a:ext cx="11391900" cy="9525"/>
+          </a:xfrm>
+          <a:prstGeom prst="straightConnector1">
+            <a:avLst/>
+          </a:prstGeom>
+          <a:ln w="9525">
+            <a:solidFill>
+              <a:srgbClr val="C9CED2"/>
+            </a:solidFill>
+            <a:prstDash val="solid"/>
+          </a:ln>
+        </p:spPr>
+      </p:cxnSp>
       <p:sp>
         <p:nvSpPr>
           <p:cNvPr id="5" name="Rectangle: Rounded Corners 4">
             <a:extLst>
               <a:ext uri="{FF2B5EF4-FFF2-40B4-BE49-F238E27FC236}">
-                <a16:creationId xmlns:a16="http://schemas.microsoft.com/office/drawing/2014/main" id="{79BE8998-4671-5E24-7B45-1FC5E1A98D30}"/>
+                <a16:creationId xmlns:a16="http://schemas.microsoft.com/office/drawing/2014/main" id="{47892220-A556-A14F-D6D1-302CC649D45F}"/>
               </a:ext>
             </a:extLst>
           </p:cNvPr>
@@ -4496,321 +10168,6 @@
           <p:cNvPr id="7" name="Rectangle 6">
             <a:extLst>
               <a:ext uri="{FF2B5EF4-FFF2-40B4-BE49-F238E27FC236}">
-                <a16:creationId xmlns:a16="http://schemas.microsoft.com/office/drawing/2014/main" id="{E4432393-1C86-F8E7-B775-94DC3712369D}"/>
-              </a:ext>
-            </a:extLst>
-          </p:cNvPr>
-          <p:cNvSpPr>
-            <a:spLocks noGrp="1"/>
-          </p:cNvSpPr>
-          <p:nvPr/>
-        </p:nvSpPr>
-        <p:spPr>
-          <a:xfrm>
-            <a:off x="174624" y="3204633"/>
-            <a:ext cx="3669242" cy="1231900"/>
-          </a:xfrm>
-          <a:prstGeom prst="rect">
-            <a:avLst/>
-          </a:prstGeom>
-        </p:spPr>
-        <p:txBody>
-          <a:bodyPr wrap="square" lIns="0" tIns="0" rIns="0" bIns="0" anchor="t">
-            <a:normAutofit/>
-          </a:bodyPr>
-          <a:lstStyle/>
-          <a:p>
-            <a:r>
-              <a:rPr lang="en-US" sz="1100" dirty="0"/>
-              <a:t>Apache Airflow automatically executes the ETL pipeline every five minutes:</a:t>
-            </a:r>
-          </a:p>
-          <a:p>
-            <a:endParaRPr lang="en-US" sz="1100" dirty="0"/>
-          </a:p>
-          <a:p>
-            <a:pPr marL="171450" indent="-171450">
-              <a:buFont typeface="Arial" panose="020B0604020202020204" pitchFamily="34" charset="0"/>
-              <a:buChar char="•"/>
-            </a:pPr>
-            <a:r>
-              <a:rPr lang="en-US" sz="1100" b="1" dirty="0"/>
-              <a:t>extract </a:t>
-            </a:r>
-            <a:r>
-              <a:rPr lang="en-US" sz="1100" dirty="0"/>
-              <a:t>– fetches the latest Capital Bikeshare data.</a:t>
-            </a:r>
-          </a:p>
-          <a:p>
-            <a:pPr marL="171450" indent="-171450">
-              <a:buFont typeface="Arial" panose="020B0604020202020204" pitchFamily="34" charset="0"/>
-              <a:buChar char="•"/>
-            </a:pPr>
-            <a:r>
-              <a:rPr lang="en-US" sz="1100" b="1" dirty="0"/>
-              <a:t>transform</a:t>
-            </a:r>
-            <a:r>
-              <a:rPr lang="en-US" sz="1100" dirty="0"/>
-              <a:t> – cleans and validates the records.</a:t>
-            </a:r>
-          </a:p>
-          <a:p>
-            <a:pPr marL="171450" indent="-171450">
-              <a:buFont typeface="Arial" panose="020B0604020202020204" pitchFamily="34" charset="0"/>
-              <a:buChar char="•"/>
-            </a:pPr>
-            <a:r>
-              <a:rPr lang="en-US" sz="1100" b="1" dirty="0"/>
-              <a:t>load </a:t>
-            </a:r>
-            <a:r>
-              <a:rPr lang="en-US" sz="1100" dirty="0"/>
-              <a:t>– stores the results in PostgreSQL.</a:t>
-            </a:r>
-          </a:p>
-        </p:txBody>
-      </p:sp>
-      <p:pic>
-        <p:nvPicPr>
-          <p:cNvPr id="4" name="Picture 3">
-            <a:extLst>
-              <a:ext uri="{FF2B5EF4-FFF2-40B4-BE49-F238E27FC236}">
-                <a16:creationId xmlns:a16="http://schemas.microsoft.com/office/drawing/2014/main" id="{18A3BFB6-CB93-6C9F-49A0-DFE853402B45}"/>
-              </a:ext>
-            </a:extLst>
-          </p:cNvPr>
-          <p:cNvPicPr>
-            <a:picLocks noChangeAspect="1"/>
-          </p:cNvPicPr>
-          <p:nvPr/>
-        </p:nvPicPr>
-        <p:blipFill>
-          <a:blip r:embed="rId3">
-            <a:extLst>
-              <a:ext uri="{28A0092B-C50C-407E-A947-70E740481C1C}">
-                <a14:useLocalDpi xmlns:a14="http://schemas.microsoft.com/office/drawing/2010/main" val="0"/>
-              </a:ext>
-            </a:extLst>
-          </a:blip>
-          <a:stretch>
-            <a:fillRect/>
-          </a:stretch>
-        </p:blipFill>
-        <p:spPr>
-          <a:xfrm>
-            <a:off x="3935501" y="1772154"/>
-            <a:ext cx="8188766" cy="4190496"/>
-          </a:xfrm>
-          <a:prstGeom prst="rect">
-            <a:avLst/>
-          </a:prstGeom>
-        </p:spPr>
-      </p:pic>
-    </p:spTree>
-    <p:extLst>
-      <p:ext uri="{BB962C8B-B14F-4D97-AF65-F5344CB8AC3E}">
-        <p14:creationId xmlns:p14="http://schemas.microsoft.com/office/powerpoint/2010/main" val="3255495754"/>
-      </p:ext>
-    </p:extLst>
-  </p:cSld>
-  <p:clrMapOvr>
-    <a:masterClrMapping/>
-  </p:clrMapOvr>
-</p:sld>
-</file>
-
-<file path=ppt/slides/slide7.xml><?xml version="1.0" encoding="utf-8"?>
-<p:sld xmlns:a="http://schemas.openxmlformats.org/drawingml/2006/main" xmlns:r="http://schemas.openxmlformats.org/officeDocument/2006/relationships" xmlns:p="http://schemas.openxmlformats.org/presentationml/2006/main">
-  <p:cSld>
-    <p:spTree>
-      <p:nvGrpSpPr>
-        <p:cNvPr id="1" name="">
-          <a:extLst>
-            <a:ext uri="{FF2B5EF4-FFF2-40B4-BE49-F238E27FC236}">
-              <a16:creationId xmlns:a16="http://schemas.microsoft.com/office/drawing/2014/main" id="{45EBF689-8D12-5462-865E-AA7AADF59A3D}"/>
-            </a:ext>
-          </a:extLst>
-        </p:cNvPr>
-        <p:cNvGrpSpPr/>
-        <p:nvPr/>
-      </p:nvGrpSpPr>
-      <p:grpSpPr>
-        <a:xfrm>
-          <a:off x="0" y="0"/>
-          <a:ext cx="0" cy="0"/>
-          <a:chOff x="0" y="0"/>
-          <a:chExt cx="0" cy="0"/>
-        </a:xfrm>
-      </p:grpSpPr>
-      <p:sp>
-        <p:nvSpPr>
-          <p:cNvPr id="21" name="Rectangle 20">
-            <a:extLst>
-              <a:ext uri="{FF2B5EF4-FFF2-40B4-BE49-F238E27FC236}">
-                <a16:creationId xmlns:a16="http://schemas.microsoft.com/office/drawing/2014/main" id="{20CD678A-CE8B-5F3D-76CD-F5805A21CB51}"/>
-              </a:ext>
-            </a:extLst>
-          </p:cNvPr>
-          <p:cNvSpPr>
-            <a:spLocks noGrp="1"/>
-          </p:cNvSpPr>
-          <p:nvPr/>
-        </p:nvSpPr>
-        <p:spPr>
-          <a:xfrm>
-            <a:off x="400050" y="276225"/>
-            <a:ext cx="4953000" cy="209550"/>
-          </a:xfrm>
-          <a:prstGeom prst="rect">
-            <a:avLst/>
-          </a:prstGeom>
-        </p:spPr>
-        <p:txBody>
-          <a:bodyPr wrap="square" lIns="0" tIns="0" rIns="0" bIns="0" anchor="t">
-            <a:normAutofit/>
-          </a:bodyPr>
-          <a:lstStyle/>
-          <a:p>
-            <a:pPr algn="l">
-              <a:defRPr sz="975" b="1">
-                <a:solidFill>
-                  <a:srgbClr val="D9232E"/>
-                </a:solidFill>
-                <a:latin typeface="Arial"/>
-                <a:ea typeface="Arial"/>
-                <a:cs typeface="Arial"/>
-              </a:defRPr>
-            </a:pPr>
-            <a:r>
-              <a:t>CAPITAL BIKESHARE OPERATIONS</a:t>
-            </a:r>
-          </a:p>
-        </p:txBody>
-      </p:sp>
-      <p:sp>
-        <p:nvSpPr>
-          <p:cNvPr id="2" name="Rectangle 1">
-            <a:extLst>
-              <a:ext uri="{FF2B5EF4-FFF2-40B4-BE49-F238E27FC236}">
-                <a16:creationId xmlns:a16="http://schemas.microsoft.com/office/drawing/2014/main" id="{6B49A3F9-7DFF-9E4D-572C-6759A2DD21EA}"/>
-              </a:ext>
-            </a:extLst>
-          </p:cNvPr>
-          <p:cNvSpPr>
-            <a:spLocks noGrp="1"/>
-          </p:cNvSpPr>
-          <p:nvPr/>
-        </p:nvSpPr>
-        <p:spPr>
-          <a:xfrm>
-            <a:off x="400050" y="581025"/>
-            <a:ext cx="11391900" cy="628650"/>
-          </a:xfrm>
-          <a:prstGeom prst="rect">
-            <a:avLst/>
-          </a:prstGeom>
-        </p:spPr>
-        <p:txBody>
-          <a:bodyPr wrap="square" lIns="0" tIns="0" rIns="0" bIns="0" anchor="t">
-            <a:normAutofit/>
-          </a:bodyPr>
-          <a:lstStyle/>
-          <a:p>
-            <a:pPr algn="l">
-              <a:defRPr sz="3000" b="1">
-                <a:solidFill>
-                  <a:srgbClr val="15191D"/>
-                </a:solidFill>
-                <a:latin typeface="Arial"/>
-                <a:ea typeface="Arial"/>
-                <a:cs typeface="Arial"/>
-              </a:defRPr>
-            </a:pPr>
-            <a:r>
-              <a:rPr lang="en-US" dirty="0"/>
-              <a:t>Kafka </a:t>
-            </a:r>
-            <a:endParaRPr dirty="0"/>
-          </a:p>
-        </p:txBody>
-      </p:sp>
-      <p:cxnSp>
-        <p:nvCxnSpPr>
-          <p:cNvPr id="23" name="Straight Arrow Connector 22">
-            <a:extLst>
-              <a:ext uri="{FF2B5EF4-FFF2-40B4-BE49-F238E27FC236}">
-                <a16:creationId xmlns:a16="http://schemas.microsoft.com/office/drawing/2014/main" id="{36450370-24AB-9E3E-FC3A-FB1F4D80B751}"/>
-              </a:ext>
-            </a:extLst>
-          </p:cNvPr>
-          <p:cNvCxnSpPr/>
-          <p:nvPr/>
-        </p:nvCxnSpPr>
-        <p:spPr>
-          <a:xfrm>
-            <a:off x="400050" y="1304925"/>
-            <a:ext cx="11391900" cy="9525"/>
-          </a:xfrm>
-          <a:prstGeom prst="straightConnector1">
-            <a:avLst/>
-          </a:prstGeom>
-          <a:ln w="9525">
-            <a:solidFill>
-              <a:srgbClr val="C9CED2"/>
-            </a:solidFill>
-            <a:prstDash val="solid"/>
-          </a:ln>
-        </p:spPr>
-      </p:cxnSp>
-      <p:sp>
-        <p:nvSpPr>
-          <p:cNvPr id="5" name="Rectangle: Rounded Corners 4">
-            <a:extLst>
-              <a:ext uri="{FF2B5EF4-FFF2-40B4-BE49-F238E27FC236}">
-                <a16:creationId xmlns:a16="http://schemas.microsoft.com/office/drawing/2014/main" id="{47892220-A556-A14F-D6D1-302CC649D45F}"/>
-              </a:ext>
-            </a:extLst>
-          </p:cNvPr>
-          <p:cNvSpPr>
-            <a:spLocks noGrp="1"/>
-          </p:cNvSpPr>
-          <p:nvPr/>
-        </p:nvSpPr>
-        <p:spPr>
-          <a:xfrm>
-            <a:off x="67733" y="2244724"/>
-            <a:ext cx="3776133" cy="2763305"/>
-          </a:xfrm>
-          <a:prstGeom prst="roundRect">
-            <a:avLst>
-              <a:gd name="adj" fmla="val 2797"/>
-            </a:avLst>
-          </a:prstGeom>
-          <a:solidFill>
-            <a:srgbClr val="EAF6FB"/>
-          </a:solidFill>
-          <a:ln w="9525">
-            <a:solidFill>
-              <a:srgbClr val="C9CED2"/>
-            </a:solidFill>
-            <a:prstDash val="solid"/>
-          </a:ln>
-        </p:spPr>
-        <p:txBody>
-          <a:bodyPr/>
-          <a:lstStyle/>
-          <a:p>
-            <a:endParaRPr lang="en-US"/>
-          </a:p>
-        </p:txBody>
-      </p:sp>
-      <p:sp>
-        <p:nvSpPr>
-          <p:cNvPr id="7" name="Rectangle 6">
-            <a:extLst>
-              <a:ext uri="{FF2B5EF4-FFF2-40B4-BE49-F238E27FC236}">
                 <a16:creationId xmlns:a16="http://schemas.microsoft.com/office/drawing/2014/main" id="{AFA4D4F0-3C41-2976-17AE-5D74CA41843C}"/>
               </a:ext>
             </a:extLst>
@@ -4925,375 +10282,6 @@
     <p:extLst>
       <p:ext uri="{BB962C8B-B14F-4D97-AF65-F5344CB8AC3E}">
         <p14:creationId xmlns:p14="http://schemas.microsoft.com/office/powerpoint/2010/main" val="4066143184"/>
-      </p:ext>
-    </p:extLst>
-  </p:cSld>
-  <p:clrMapOvr>
-    <a:masterClrMapping/>
-  </p:clrMapOvr>
-</p:sld>
-</file>
-
-<file path=ppt/slides/slide8.xml><?xml version="1.0" encoding="utf-8"?>
-<p:sld xmlns:a="http://schemas.openxmlformats.org/drawingml/2006/main" xmlns:r="http://schemas.openxmlformats.org/officeDocument/2006/relationships" xmlns:p="http://schemas.openxmlformats.org/presentationml/2006/main">
-  <p:cSld>
-    <p:spTree>
-      <p:nvGrpSpPr>
-        <p:cNvPr id="1" name="">
-          <a:extLst>
-            <a:ext uri="{FF2B5EF4-FFF2-40B4-BE49-F238E27FC236}">
-              <a16:creationId xmlns:a16="http://schemas.microsoft.com/office/drawing/2014/main" id="{C16E43A6-F04D-47F7-A58E-70B3C98295F9}"/>
-            </a:ext>
-          </a:extLst>
-        </p:cNvPr>
-        <p:cNvGrpSpPr/>
-        <p:nvPr/>
-      </p:nvGrpSpPr>
-      <p:grpSpPr>
-        <a:xfrm>
-          <a:off x="0" y="0"/>
-          <a:ext cx="0" cy="0"/>
-          <a:chOff x="0" y="0"/>
-          <a:chExt cx="0" cy="0"/>
-        </a:xfrm>
-      </p:grpSpPr>
-      <p:sp>
-        <p:nvSpPr>
-          <p:cNvPr id="21" name="Rectangle 20">
-            <a:extLst>
-              <a:ext uri="{FF2B5EF4-FFF2-40B4-BE49-F238E27FC236}">
-                <a16:creationId xmlns:a16="http://schemas.microsoft.com/office/drawing/2014/main" id="{F315090B-1995-4A68-9F99-0EE6A5889F58}"/>
-              </a:ext>
-            </a:extLst>
-          </p:cNvPr>
-          <p:cNvSpPr>
-            <a:spLocks noGrp="1"/>
-          </p:cNvSpPr>
-          <p:nvPr/>
-        </p:nvSpPr>
-        <p:spPr>
-          <a:xfrm>
-            <a:off x="400050" y="276225"/>
-            <a:ext cx="4953000" cy="209550"/>
-          </a:xfrm>
-          <a:prstGeom prst="rect">
-            <a:avLst/>
-          </a:prstGeom>
-        </p:spPr>
-        <p:txBody>
-          <a:bodyPr wrap="square" lIns="0" tIns="0" rIns="0" bIns="0" anchor="t">
-            <a:normAutofit/>
-          </a:bodyPr>
-          <a:lstStyle/>
-          <a:p>
-            <a:pPr algn="l">
-              <a:defRPr sz="975" b="1">
-                <a:solidFill>
-                  <a:srgbClr val="D9232E"/>
-                </a:solidFill>
-                <a:latin typeface="Arial"/>
-                <a:ea typeface="Arial"/>
-                <a:cs typeface="Arial"/>
-              </a:defRPr>
-            </a:pPr>
-            <a:r>
-              <a:t>CAPITAL BIKESHARE OPERATIONS</a:t>
-            </a:r>
-          </a:p>
-        </p:txBody>
-      </p:sp>
-      <p:sp>
-        <p:nvSpPr>
-          <p:cNvPr id="2" name="Rectangle 1">
-            <a:extLst>
-              <a:ext uri="{FF2B5EF4-FFF2-40B4-BE49-F238E27FC236}">
-                <a16:creationId xmlns:a16="http://schemas.microsoft.com/office/drawing/2014/main" id="{2D531190-DE33-F507-CCFA-5A8E45BFE9F3}"/>
-              </a:ext>
-            </a:extLst>
-          </p:cNvPr>
-          <p:cNvSpPr>
-            <a:spLocks noGrp="1"/>
-          </p:cNvSpPr>
-          <p:nvPr/>
-        </p:nvSpPr>
-        <p:spPr>
-          <a:xfrm>
-            <a:off x="400050" y="581025"/>
-            <a:ext cx="11391900" cy="628650"/>
-          </a:xfrm>
-          <a:prstGeom prst="rect">
-            <a:avLst/>
-          </a:prstGeom>
-        </p:spPr>
-        <p:txBody>
-          <a:bodyPr wrap="square" lIns="0" tIns="0" rIns="0" bIns="0" anchor="t">
-            <a:normAutofit/>
-          </a:bodyPr>
-          <a:lstStyle/>
-          <a:p>
-            <a:pPr algn="l">
-              <a:defRPr sz="3000" b="1">
-                <a:solidFill>
-                  <a:srgbClr val="15191D"/>
-                </a:solidFill>
-                <a:latin typeface="Arial"/>
-                <a:ea typeface="Arial"/>
-                <a:cs typeface="Arial"/>
-              </a:defRPr>
-            </a:pPr>
-            <a:r>
-              <a:rPr lang="en-US" dirty="0"/>
-              <a:t>Dashboard(React Front-End) </a:t>
-            </a:r>
-            <a:endParaRPr dirty="0"/>
-          </a:p>
-        </p:txBody>
-      </p:sp>
-      <p:cxnSp>
-        <p:nvCxnSpPr>
-          <p:cNvPr id="23" name="Straight Arrow Connector 22">
-            <a:extLst>
-              <a:ext uri="{FF2B5EF4-FFF2-40B4-BE49-F238E27FC236}">
-                <a16:creationId xmlns:a16="http://schemas.microsoft.com/office/drawing/2014/main" id="{5E44558C-A245-34FA-97CB-B58F4150F7C4}"/>
-              </a:ext>
-            </a:extLst>
-          </p:cNvPr>
-          <p:cNvCxnSpPr/>
-          <p:nvPr/>
-        </p:nvCxnSpPr>
-        <p:spPr>
-          <a:xfrm>
-            <a:off x="400050" y="1304925"/>
-            <a:ext cx="11391900" cy="9525"/>
-          </a:xfrm>
-          <a:prstGeom prst="straightConnector1">
-            <a:avLst/>
-          </a:prstGeom>
-          <a:ln w="9525">
-            <a:solidFill>
-              <a:srgbClr val="C9CED2"/>
-            </a:solidFill>
-            <a:prstDash val="solid"/>
-          </a:ln>
-        </p:spPr>
-      </p:cxnSp>
-      <p:sp>
-        <p:nvSpPr>
-          <p:cNvPr id="5" name="Rectangle: Rounded Corners 4">
-            <a:extLst>
-              <a:ext uri="{FF2B5EF4-FFF2-40B4-BE49-F238E27FC236}">
-                <a16:creationId xmlns:a16="http://schemas.microsoft.com/office/drawing/2014/main" id="{B91D5C29-7470-2013-6E73-A5529DB234B4}"/>
-              </a:ext>
-            </a:extLst>
-          </p:cNvPr>
-          <p:cNvSpPr>
-            <a:spLocks noGrp="1"/>
-          </p:cNvSpPr>
-          <p:nvPr/>
-        </p:nvSpPr>
-        <p:spPr>
-          <a:xfrm>
-            <a:off x="67733" y="2244724"/>
-            <a:ext cx="3776133" cy="2763305"/>
-          </a:xfrm>
-          <a:prstGeom prst="roundRect">
-            <a:avLst>
-              <a:gd name="adj" fmla="val 2797"/>
-            </a:avLst>
-          </a:prstGeom>
-          <a:solidFill>
-            <a:srgbClr val="EAF6FB"/>
-          </a:solidFill>
-          <a:ln w="9525">
-            <a:solidFill>
-              <a:srgbClr val="C9CED2"/>
-            </a:solidFill>
-            <a:prstDash val="solid"/>
-          </a:ln>
-        </p:spPr>
-        <p:txBody>
-          <a:bodyPr/>
-          <a:lstStyle/>
-          <a:p>
-            <a:endParaRPr lang="en-US"/>
-          </a:p>
-        </p:txBody>
-      </p:sp>
-      <p:sp>
-        <p:nvSpPr>
-          <p:cNvPr id="7" name="Rectangle 6">
-            <a:extLst>
-              <a:ext uri="{FF2B5EF4-FFF2-40B4-BE49-F238E27FC236}">
-                <a16:creationId xmlns:a16="http://schemas.microsoft.com/office/drawing/2014/main" id="{1A72D72D-03F4-4D26-A8E7-D05D89EC55DF}"/>
-              </a:ext>
-            </a:extLst>
-          </p:cNvPr>
-          <p:cNvSpPr>
-            <a:spLocks noGrp="1"/>
-          </p:cNvSpPr>
-          <p:nvPr/>
-        </p:nvSpPr>
-        <p:spPr>
-          <a:xfrm>
-            <a:off x="67733" y="2802467"/>
-            <a:ext cx="3776133" cy="1634066"/>
-          </a:xfrm>
-          <a:prstGeom prst="rect">
-            <a:avLst/>
-          </a:prstGeom>
-        </p:spPr>
-        <p:txBody>
-          <a:bodyPr wrap="square" lIns="0" tIns="0" rIns="0" bIns="0" anchor="t">
-            <a:normAutofit lnSpcReduction="10000"/>
-          </a:bodyPr>
-          <a:lstStyle/>
-          <a:p>
-            <a:r>
-              <a:rPr lang="en-US" sz="1100" dirty="0"/>
-              <a:t>The Dashboard features the following:</a:t>
-            </a:r>
-          </a:p>
-          <a:p>
-            <a:endParaRPr lang="en-US" sz="1100" dirty="0"/>
-          </a:p>
-          <a:p>
-            <a:pPr marL="171450" indent="-171450">
-              <a:buFont typeface="Arial" panose="020B0604020202020204" pitchFamily="34" charset="0"/>
-              <a:buChar char="•"/>
-            </a:pPr>
-            <a:r>
-              <a:rPr lang="en-US" sz="1100" dirty="0"/>
-              <a:t>Network summary showing total stations, available bikes, empty stations, and low-bike stations.</a:t>
-            </a:r>
-          </a:p>
-          <a:p>
-            <a:pPr marL="171450" indent="-171450">
-              <a:buFont typeface="Arial" panose="020B0604020202020204" pitchFamily="34" charset="0"/>
-              <a:buChar char="•"/>
-            </a:pPr>
-            <a:r>
-              <a:rPr lang="en-US" sz="1100" dirty="0"/>
-              <a:t>Interactive map with red, yellow, and green markers based on bike availability.</a:t>
-            </a:r>
-          </a:p>
-          <a:p>
-            <a:pPr marL="171450" indent="-171450">
-              <a:buFont typeface="Arial" panose="020B0604020202020204" pitchFamily="34" charset="0"/>
-              <a:buChar char="•"/>
-            </a:pPr>
-            <a:r>
-              <a:rPr lang="en-US" sz="1100" dirty="0"/>
-              <a:t>Active warning and critical depletion alerts.</a:t>
-            </a:r>
-          </a:p>
-          <a:p>
-            <a:pPr marL="171450" indent="-171450">
-              <a:buFont typeface="Arial" panose="020B0604020202020204" pitchFamily="34" charset="0"/>
-              <a:buChar char="•"/>
-            </a:pPr>
-            <a:r>
-              <a:rPr lang="en-US" sz="1100" dirty="0"/>
-              <a:t>Searchable and sortable live station inventory.</a:t>
-            </a:r>
-          </a:p>
-          <a:p>
-            <a:pPr marL="171450" indent="-171450">
-              <a:buFont typeface="Arial" panose="020B0604020202020204" pitchFamily="34" charset="0"/>
-              <a:buChar char="•"/>
-            </a:pPr>
-            <a:r>
-              <a:rPr lang="en-US" sz="1100" dirty="0"/>
-              <a:t>Station details including bikes, docks, capacity, and location.</a:t>
-            </a:r>
-          </a:p>
-          <a:p>
-            <a:pPr marL="171450" indent="-171450">
-              <a:buFont typeface="Arial" panose="020B0604020202020204" pitchFamily="34" charset="0"/>
-              <a:buChar char="•"/>
-            </a:pPr>
-            <a:r>
-              <a:rPr lang="en-US" sz="1100" dirty="0"/>
-              <a:t>Historical availability chart for each selected station.</a:t>
-            </a:r>
-          </a:p>
-        </p:txBody>
-      </p:sp>
-      <p:pic>
-        <p:nvPicPr>
-          <p:cNvPr id="9" name="Picture 8">
-            <a:extLst>
-              <a:ext uri="{FF2B5EF4-FFF2-40B4-BE49-F238E27FC236}">
-                <a16:creationId xmlns:a16="http://schemas.microsoft.com/office/drawing/2014/main" id="{0BB78305-A1FB-4042-D9BE-F7125E0436AE}"/>
-              </a:ext>
-            </a:extLst>
-          </p:cNvPr>
-          <p:cNvPicPr>
-            <a:picLocks noChangeAspect="1"/>
-          </p:cNvPicPr>
-          <p:nvPr/>
-        </p:nvPicPr>
-        <p:blipFill>
-          <a:blip r:embed="rId3">
-            <a:extLst>
-              <a:ext uri="{28A0092B-C50C-407E-A947-70E740481C1C}">
-                <a14:useLocalDpi xmlns:a14="http://schemas.microsoft.com/office/drawing/2010/main" val="0"/>
-              </a:ext>
-            </a:extLst>
-          </a:blip>
-          <a:stretch>
-            <a:fillRect/>
-          </a:stretch>
-        </p:blipFill>
-        <p:spPr>
-          <a:xfrm>
-            <a:off x="3976157" y="1314450"/>
-            <a:ext cx="5608266" cy="3247825"/>
-          </a:xfrm>
-          <a:prstGeom prst="rect">
-            <a:avLst/>
-          </a:prstGeom>
-        </p:spPr>
-      </p:pic>
-      <p:pic>
-        <p:nvPicPr>
-          <p:cNvPr id="4" name="Picture 3">
-            <a:extLst>
-              <a:ext uri="{FF2B5EF4-FFF2-40B4-BE49-F238E27FC236}">
-                <a16:creationId xmlns:a16="http://schemas.microsoft.com/office/drawing/2014/main" id="{83052F48-504B-B89E-C880-25897604BA2D}"/>
-              </a:ext>
-            </a:extLst>
-          </p:cNvPr>
-          <p:cNvPicPr>
-            <a:picLocks noChangeAspect="1"/>
-          </p:cNvPicPr>
-          <p:nvPr/>
-        </p:nvPicPr>
-        <p:blipFill>
-          <a:blip r:embed="rId4">
-            <a:extLst>
-              <a:ext uri="{28A0092B-C50C-407E-A947-70E740481C1C}">
-                <a14:useLocalDpi xmlns:a14="http://schemas.microsoft.com/office/drawing/2010/main" val="0"/>
-              </a:ext>
-            </a:extLst>
-          </a:blip>
-          <a:stretch>
-            <a:fillRect/>
-          </a:stretch>
-        </p:blipFill>
-        <p:spPr>
-          <a:xfrm>
-            <a:off x="6373697" y="3513548"/>
-            <a:ext cx="5750570" cy="2988962"/>
-          </a:xfrm>
-          <a:prstGeom prst="rect">
-            <a:avLst/>
-          </a:prstGeom>
-        </p:spPr>
-      </p:pic>
-    </p:spTree>
-    <p:extLst>
-      <p:ext uri="{BB962C8B-B14F-4D97-AF65-F5344CB8AC3E}">
-        <p14:creationId xmlns:p14="http://schemas.microsoft.com/office/powerpoint/2010/main" val="2844188485"/>
       </p:ext>
     </p:extLst>
   </p:cSld>
